--- a/lecons/F2T/09_S03_L2_P4_Tropical_Grassland_Human_Activities.pptx
+++ b/lecons/F2T/09_S03_L2_P4_Tropical_Grassland_Human_Activities.pptx
@@ -60,9 +60,11 @@
     <p:sldId id="308" r:id="rId54"/>
     <p:sldId id="309" r:id="rId55"/>
     <p:sldId id="310" r:id="rId56"/>
+    <p:sldId id="311" r:id="rId57"/>
+    <p:sldId id="312" r:id="rId58"/>
   </p:sldIdLst>
   <p:notesMasterIdLst>
-    <p:notesMasterId r:id="rId57"/>
+    <p:notesMasterId r:id="rId59"/>
   </p:notesMasterIdLst>
   <p:sldSz cx="12192000" cy="6858000"/>
   <p:notesSz cx="6858000" cy="12192000"/>
@@ -644,7 +646,7 @@
           <a:p>
             <a:r>
               <a:rPr lang="en-US" dirty="0"/>
-              <a:t>Listen carefully to this situation from real life. Every year in November, Adamou, a Fulani herder, leaves his village near Garoua with his cattle. He walks south for weeks and comes back when the rains return. His classmate Paul thinks Adamou is lost. Think about it, because I am going to ask you some questions.</a:t>
+              <a:t>Take your time to copy this part; we will continue together.</a:t>
             </a:r>
             <a:endParaRPr lang="en-US" dirty="0"/>
           </a:p>
@@ -732,7 +734,7 @@
           <a:p>
             <a:r>
               <a:rPr lang="en-US" dirty="0"/>
-              <a:t>Question 1: What is the problem in the situation? Think for a moment, then raise your hand to answer.</a:t>
+              <a:t>Listen carefully to this situation from real life. Every year in November, Adamou, a Fulani herder, leaves his village near Garoua with his cattle. He walks south for weeks and comes back when the rains return. His classmate Paul thinks that Adamou is lost. Paul asks: "Why does Adamou move with his cattle, and what other work do people do in the savanna?" Think about it, because I am going to ask you some questions.</a:t>
             </a:r>
             <a:endParaRPr lang="en-US" dirty="0"/>
           </a:p>
@@ -820,7 +822,7 @@
           <a:p>
             <a:r>
               <a:rPr lang="en-US" dirty="0"/>
-              <a:t>Good. Paul does not understand why Adamou moves every year.</a:t>
+              <a:t>Question 1: What is the problem in the situation? Think for a moment, then raise your hand to answer.</a:t>
             </a:r>
             <a:endParaRPr lang="en-US" dirty="0"/>
           </a:p>
@@ -908,7 +910,7 @@
           <a:p>
             <a:r>
               <a:rPr lang="en-US" dirty="0"/>
-              <a:t>Question 2: When does Adamou leave, and when does he come back? Think for a moment, then raise your hand to answer.</a:t>
+              <a:t>Good. Paul does not understand why the herder moves and what activities people do in the savanna.</a:t>
             </a:r>
             <a:endParaRPr lang="en-US" dirty="0"/>
           </a:p>
@@ -996,7 +998,7 @@
           <a:p>
             <a:r>
               <a:rPr lang="en-US" dirty="0"/>
-              <a:t>Good. He leaves in November and comes back when the rains return.</a:t>
+              <a:t>Question 2: When does Adamou leave? Think for a moment, then raise your hand to answer.</a:t>
             </a:r>
             <a:endParaRPr lang="en-US" dirty="0"/>
           </a:p>
@@ -1084,7 +1086,7 @@
           <a:p>
             <a:r>
               <a:rPr lang="en-US" dirty="0"/>
-              <a:t>Question 3: Why does he move? Think for a moment, then raise your hand to answer.</a:t>
+              <a:t>Good. In November, at the start of the dry season.</a:t>
             </a:r>
             <a:endParaRPr lang="en-US" dirty="0"/>
           </a:p>
@@ -1172,7 +1174,7 @@
           <a:p>
             <a:r>
               <a:rPr lang="en-US" dirty="0"/>
-              <a:t>Good. To find grass and water for his cattle.</a:t>
+              <a:t>Question 3: When does he come back? Think for a moment, then raise your hand to answer.</a:t>
             </a:r>
             <a:endParaRPr lang="en-US" dirty="0"/>
           </a:p>
@@ -1260,7 +1262,7 @@
           <a:p>
             <a:r>
               <a:rPr lang="en-US" dirty="0"/>
-              <a:t>From this situation, the action we are working towards in this lesson is the following: respect the work of farmers and herders and help them live in peace.</a:t>
+              <a:t>Good. When the rains return.</a:t>
             </a:r>
             <a:endParaRPr lang="en-US" dirty="0"/>
           </a:p>
@@ -1348,7 +1350,7 @@
           <a:p>
             <a:r>
               <a:rPr lang="en-US" dirty="0"/>
-              <a:t>Why is this lesson important for you? This lesson helps us to know the work of the people of the savanna.</a:t>
+              <a:t>From this situation, the action we are working towards in this lesson is the following: respect the work of farmers and herders and help them live in peace.</a:t>
             </a:r>
             <a:endParaRPr lang="en-US" dirty="0"/>
           </a:p>
@@ -1436,7 +1438,7 @@
           <a:p>
             <a:r>
               <a:rPr lang="en-US" dirty="0"/>
-              <a:t>Activity 1. Look carefully at this picture: farmers harvest cotton. Observe every detail before I ask the question.</a:t>
+              <a:t>Why is this lesson important for you? This lesson helps us to know the work of the people of the savanna.</a:t>
             </a:r>
             <a:endParaRPr lang="en-US" dirty="0"/>
           </a:p>
@@ -1612,7 +1614,7 @@
           <a:p>
             <a:r>
               <a:rPr lang="en-US" dirty="0"/>
-              <a:t>Here is the question for Activity 1: Do farmers grow cotton to eat it or to sell it? What do we call this type of crop? Take one minute to think and write your answer in your rough notebook.</a:t>
+              <a:t>Activity 1. Look carefully at this picture: harvesting cotton. Observe every detail before I ask the question.</a:t>
             </a:r>
             <a:endParaRPr lang="en-US" dirty="0"/>
           </a:p>
@@ -1700,7 +1702,7 @@
           <a:p>
             <a:r>
               <a:rPr lang="en-US" dirty="0"/>
-              <a:t>Let us check the answer together. To sell it. It is a cash crop.</a:t>
+              <a:t>Here is the question for Activity 1: What do we call a crop that is grown to be sold? Take one minute to think and write your answer in your rough notebook.</a:t>
             </a:r>
             <a:endParaRPr lang="en-US" dirty="0"/>
           </a:p>
@@ -1788,7 +1790,7 @@
           <a:p>
             <a:r>
               <a:rPr lang="en-US" dirty="0"/>
-              <a:t>Activity 2. Look carefully at this picture: a rice field with water. Observe every detail before I ask the question.</a:t>
+              <a:t>Let us check the answer together. A cash crop.</a:t>
             </a:r>
             <a:endParaRPr lang="en-US" dirty="0"/>
           </a:p>
@@ -1876,7 +1878,7 @@
           <a:p>
             <a:r>
               <a:rPr lang="en-US" dirty="0"/>
-              <a:t>Here is the question for Activity 2: Rice needs a lot of water. How do farmers get water in the dry savanna? Take one minute to think and write your answer in your rough notebook.</a:t>
+              <a:t>Activity 2. Look carefully at this picture: a rice field. Observe every detail before I ask the question.</a:t>
             </a:r>
             <a:endParaRPr lang="en-US" dirty="0"/>
           </a:p>
@@ -1964,7 +1966,7 @@
           <a:p>
             <a:r>
               <a:rPr lang="en-US" dirty="0"/>
-              <a:t>Let us check the answer together. They bring water from rivers and dams to the fields: irrigation.</a:t>
+              <a:t>Here is the question for Activity 2: How do farmers bring water to their fields in the dry savanna? Take one minute to think and write your answer in your rough notebook.</a:t>
             </a:r>
             <a:endParaRPr lang="en-US" dirty="0"/>
           </a:p>
@@ -2052,7 +2054,7 @@
           <a:p>
             <a:r>
               <a:rPr lang="en-US" dirty="0"/>
-              <a:t>Activity 3. Look carefully at this animation: animation: the herder moves with his cattle. Watch the animation to the end; it will play again.</a:t>
+              <a:t>Let us check the answer together. By irrigation from rivers and dams.</a:t>
             </a:r>
             <a:endParaRPr lang="en-US" dirty="0"/>
           </a:p>
@@ -2140,7 +2142,7 @@
           <a:p>
             <a:r>
               <a:rPr lang="en-US" dirty="0"/>
-              <a:t>Here is the question for Activity 3: Where does the herder go in the dry season? And in the rainy season? Take one minute to think and write your answer in your rough notebook.</a:t>
+              <a:t>Activity 3. Look carefully at this animation: animation: herders move with the seasons. Watch the animation to the end; it will play again.</a:t>
             </a:r>
             <a:endParaRPr lang="en-US" dirty="0"/>
           </a:p>
@@ -2228,7 +2230,7 @@
           <a:p>
             <a:r>
               <a:rPr lang="en-US" dirty="0"/>
-              <a:t>Let us check the answer together. South in the dry season; back north in the rainy season.</a:t>
+              <a:t>Here is the question for Activity 3: Where does the herder go in the dry season? Take one minute to think and write your answer in your rough notebook.</a:t>
             </a:r>
             <a:endParaRPr lang="en-US" dirty="0"/>
           </a:p>
@@ -2316,7 +2318,7 @@
           <a:p>
             <a:r>
               <a:rPr lang="en-US" dirty="0"/>
-              <a:t>Activity 4. Look carefully at this picture: maasai herders with their cattle in East Africa. Observe every detail before I ask the question.</a:t>
+              <a:t>Let us check the answer together. To the south, where there is grass and water.</a:t>
             </a:r>
             <a:endParaRPr lang="en-US" dirty="0"/>
           </a:p>
@@ -2404,7 +2406,7 @@
           <a:p>
             <a:r>
               <a:rPr lang="en-US" dirty="0"/>
-              <a:t>Here is the question for Activity 4: Why are cattle important for these herders? Take one minute to think and write your answer in your rough notebook.</a:t>
+              <a:t>Activity 4. Look carefully at this picture: herders with cattle. Observe every detail before I ask the question.</a:t>
             </a:r>
             <a:endParaRPr lang="en-US" dirty="0"/>
           </a:p>
@@ -2580,7 +2582,7 @@
           <a:p>
             <a:r>
               <a:rPr lang="en-US" dirty="0"/>
-              <a:t>Let us check the answer together. Cattle give milk, meat and money. They show that a man is rich.</a:t>
+              <a:t>Here is the question for Activity 4: Why are cattle important for herders? Take one minute to think and write your answer in your rough notebook.</a:t>
             </a:r>
             <a:endParaRPr lang="en-US" dirty="0"/>
           </a:p>
@@ -2668,7 +2670,7 @@
           <a:p>
             <a:r>
               <a:rPr lang="en-US" dirty="0"/>
-              <a:t>Activity 5. Look carefully at this picture: fishermen in a canoe on a river. Observe every detail before I ask the question.</a:t>
+              <a:t>Let us check the answer together. They give milk, meat and money.</a:t>
             </a:r>
             <a:endParaRPr lang="en-US" dirty="0"/>
           </a:p>
@@ -2756,7 +2758,7 @@
           <a:p>
             <a:r>
               <a:rPr lang="en-US" dirty="0"/>
-              <a:t>Here is the question for Activity 5: Give two other activities of the people of the savanna. Take one minute to think and write your answer in your rough notebook.</a:t>
+              <a:t>Activity 5. Look carefully at this picture: fishermen. Observe every detail before I ask the question.</a:t>
             </a:r>
             <a:endParaRPr lang="en-US" dirty="0"/>
           </a:p>
@@ -2844,7 +2846,7 @@
           <a:p>
             <a:r>
               <a:rPr lang="en-US" dirty="0"/>
-              <a:t>Let us check the answer together. Fishing and tourism. Also hunting and cutting wood.</a:t>
+              <a:t>Here is the question for Activity 5: Give one other activity of the people of the savanna. Take one minute to think and write your answer in your rough notebook.</a:t>
             </a:r>
             <a:endParaRPr lang="en-US" dirty="0"/>
           </a:p>
@@ -2932,7 +2934,7 @@
           <a:p>
             <a:r>
               <a:rPr lang="en-US" dirty="0"/>
-              <a:t>Now we are going to copy the board summary. Write the title and the headings neatly in your notebooks. I will give you enough time for each slide, so do not rush.</a:t>
+              <a:t>Let us check the answer together. Fishing (also hunting, tourism and cutting wood).</a:t>
             </a:r>
             <a:endParaRPr lang="en-US" dirty="0"/>
           </a:p>
@@ -3020,7 +3022,7 @@
           <a:p>
             <a:r>
               <a:rPr lang="en-US" dirty="0"/>
-              <a:t>Let us copy the definitions. The key terms of this lesson are defined as follows. On this slide we have Cash crop and Food crop. Write each point on a new line, with the key term first, and explain it in your own words when we revise. When you finish, we go to the next slide.</a:t>
+              <a:t>Now we are going to copy the board summary. Write the title and the headings neatly in your notebooks. I will give you enough time for each slide, so do not rush.</a:t>
             </a:r>
             <a:endParaRPr lang="en-US" dirty="0"/>
           </a:p>
@@ -3108,7 +3110,7 @@
           <a:p>
             <a:r>
               <a:rPr lang="en-US" dirty="0"/>
-              <a:t>We continue with the definitions. On this slide we have Transhumance. Write each point on a new line, with the key term first, and explain it in your own words when we revise.</a:t>
+              <a:t>Let us copy the definitions. The key terms of this lesson are defined as follows. On this slide we have Cash crop and Transhumance. Write each point on a new line, with the key term first, and explain it in your own words when we revise.</a:t>
             </a:r>
             <a:endParaRPr lang="en-US" dirty="0"/>
           </a:p>
@@ -3196,7 +3198,7 @@
           <a:p>
             <a:r>
               <a:rPr lang="en-US" dirty="0"/>
-              <a:t>Let us copy Crop Farming. Crop farming in the savanna takes the following forms. On this slide we have Food crops and Cash crops. Write each point on a new line, with the key term first, and explain it in your own words when we revise. When you finish, we go to the next slide.</a:t>
+              <a:t>Let us copy Farming. Farming in the savanna has the following forms. On this slide we have Food crops. Write each point on a new line, with the key term first, and explain it in your own words when we revise.</a:t>
             </a:r>
             <a:endParaRPr lang="en-US" dirty="0"/>
           </a:p>
@@ -3284,7 +3286,7 @@
           <a:p>
             <a:r>
               <a:rPr lang="en-US" dirty="0"/>
-              <a:t>We continue with Crop Farming. On this slide we have Irrigated farming. Write each point on a new line, with the key term first, and explain it in your own words when we revise.</a:t>
+              <a:t>Copy the point on Cash crops on the left, then draw the diagram on the right: harvesting cotton. Give it a title and label it clearly.</a:t>
             </a:r>
             <a:endParaRPr lang="en-US" dirty="0"/>
           </a:p>
@@ -3372,7 +3374,7 @@
           <a:p>
             <a:r>
               <a:rPr lang="en-US" dirty="0"/>
-              <a:t>Let us copy Livestock Rearing. Herders rear animals in three ways. On this slide we have Nomadic herding and Transhumance. Write each point on a new line, with the key term first, and explain it in your own words when we revise. When you finish, we go to the next slide.</a:t>
+              <a:t>Copy the point on Irrigated farming on the left, then draw the diagram on the right: a rice field. Give it a title and label it clearly.</a:t>
             </a:r>
             <a:endParaRPr lang="en-US" dirty="0"/>
           </a:p>
@@ -3548,7 +3550,7 @@
           <a:p>
             <a:r>
               <a:rPr lang="en-US" dirty="0"/>
-              <a:t>We continue with Livestock Rearing. On this slide we have Ranching. Write each point on a new line, with the key term first, and explain it in your own words when we revise.</a:t>
+              <a:t>Let us copy Livestock Rearing. Livestock rearing has the following forms. On this slide we have Nomadic pastoralism. Write each point on a new line, with the key term first, and explain it in your own words when we revise.</a:t>
             </a:r>
             <a:endParaRPr lang="en-US" dirty="0"/>
           </a:p>
@@ -3636,7 +3638,7 @@
           <a:p>
             <a:r>
               <a:rPr lang="en-US" dirty="0"/>
-              <a:t>Let us copy Other Activities. People also carry out the following activities. On this slide we have Fishing and Tourism. Write each point on a new line, with the key term first, and explain it in your own words when we revise. When you finish, we go to the next slide.</a:t>
+              <a:t>Copy the point on Transhumance on the left, then draw the diagram on the right: transhumance. Give it a title and label it clearly.</a:t>
             </a:r>
             <a:endParaRPr lang="en-US" dirty="0"/>
           </a:p>
@@ -3724,7 +3726,7 @@
           <a:p>
             <a:r>
               <a:rPr lang="en-US" dirty="0"/>
-              <a:t>We continue with Other Activities. On this slide we have Hunting. Write each point on a new line, with the key term first, and explain it in your own words when we revise.</a:t>
+              <a:t>We continue with Livestock Rearing. On this slide we have Ranching. Write each point on a new line, with the key term first, and explain it in your own words when we revise.</a:t>
             </a:r>
             <a:endParaRPr lang="en-US" dirty="0"/>
           </a:p>
@@ -3812,7 +3814,7 @@
           <a:p>
             <a:r>
               <a:rPr lang="en-US" dirty="0"/>
-              <a:t>Now let us check what you have understood. Question 1: What is the difference between a food crop and a cash crop? Answer in your exercise book.</a:t>
+              <a:t>Let us copy Other Activities. People also carry out the following activities. On this slide we have Hunting. Write each point on a new line, with the key term first, and explain it in your own words when we revise.</a:t>
             </a:r>
             <a:endParaRPr lang="en-US" dirty="0"/>
           </a:p>
@@ -3900,7 +3902,7 @@
           <a:p>
             <a:r>
               <a:rPr lang="en-US" dirty="0"/>
-              <a:t>The expected answer is: a food crop feeds the family; a cash crop is sold. If you got it right, well done.</a:t>
+              <a:t>Copy the point on Fishing on the left, then draw the diagram on the right: fishing. Give it a title and label it clearly.</a:t>
             </a:r>
             <a:endParaRPr lang="en-US" dirty="0"/>
           </a:p>
@@ -3988,7 +3990,7 @@
           <a:p>
             <a:r>
               <a:rPr lang="en-US" dirty="0"/>
-              <a:t>Now let us check what you have understood. Question 2: What is transhumance? Answer in your exercise book.</a:t>
+              <a:t>We continue with Other Activities. On this slide we have Lumbering and Tourism. Write each point on a new line, with the key term first, and explain it in your own words when we revise.</a:t>
             </a:r>
             <a:endParaRPr lang="en-US" dirty="0"/>
           </a:p>
@@ -4076,7 +4078,7 @@
           <a:p>
             <a:r>
               <a:rPr lang="en-US" dirty="0"/>
-              <a:t>The expected answer is: the movement of herders with their animals between seasons. If you got it right, well done.</a:t>
+              <a:t>Now let us check what you have understood. Question 1: What is the difference between a food crop and a cash crop? Answer in your exercise book.</a:t>
             </a:r>
             <a:endParaRPr lang="en-US" dirty="0"/>
           </a:p>
@@ -4164,7 +4166,7 @@
           <a:p>
             <a:r>
               <a:rPr lang="en-US" dirty="0"/>
-              <a:t>For those who need more practice, fill in the blanks in your exercise book. The answers are: number 1, cash; number 2, transhumance; number 3, irrigation.</a:t>
+              <a:t>The expected answer is: a food crop feeds the family; a cash crop is sold. If you got it right, well done.</a:t>
             </a:r>
             <a:endParaRPr lang="en-US" dirty="0"/>
           </a:p>
@@ -4252,7 +4254,7 @@
           <a:p>
             <a:r>
               <a:rPr lang="en-US" dirty="0"/>
-              <a:t>For your homework: Write down two problems that farmers or herders around Garoua face, for example with rain, fires or pests. We shall correct it at the beginning of our next lesson.</a:t>
+              <a:t>Now let us check what you have understood. Question 2: What is transhumance? Answer in your exercise book.</a:t>
             </a:r>
             <a:endParaRPr lang="en-US" dirty="0"/>
           </a:p>
@@ -4340,7 +4342,7 @@
           <a:p>
             <a:r>
               <a:rPr lang="en-US" dirty="0"/>
-              <a:t>Our next lesson will be on Lesson 2 (Part 5): The Tropical Grassland Region: Problems Faced and Attempted Solutions. Thank you for your attention, and see you next time.</a:t>
+              <a:t>The expected answer is: the movement of herders with their animals between seasons. If you got it right, well done.</a:t>
             </a:r>
             <a:endParaRPr lang="en-US" dirty="0"/>
           </a:p>
@@ -4516,7 +4518,7 @@
           <a:p>
             <a:r>
               <a:rPr lang="en-US" dirty="0"/>
-              <a:t>Let us play the bilingual game. I say a word in English, and you give me the French word. Then we do the reverse.</a:t>
+              <a:t>For those who need more practice, fill in the blanks in your exercise book. The answers are: number 1, cash; number 2, transhumance; number 3, irrigation.</a:t>
             </a:r>
             <a:endParaRPr lang="en-US" dirty="0"/>
           </a:p>
@@ -4604,7 +4606,7 @@
           <a:p>
             <a:r>
               <a:rPr lang="en-US" dirty="0"/>
-              <a:t>I record this information in the official logbook of the class after the lesson.</a:t>
+              <a:t>For your homework: Write down two problems that farmers or herders around Garoua face, for example with rain, fires or pests. We shall correct it at the beginning of our next lesson.</a:t>
             </a:r>
             <a:endParaRPr lang="en-US" dirty="0"/>
           </a:p>
@@ -4692,7 +4694,7 @@
           <a:p>
             <a:r>
               <a:rPr lang="en-US" dirty="0"/>
-              <a:t>I complete the second page of the logbook: the matter taught, the evaluation, the homework and the attendance.</a:t>
+              <a:t>Our next lesson will be on Lesson 2 (Part 5): The Tropical Grassland Region: Problems Faced and Attempted Solutions. Thank you for your attention, and see you next time.</a:t>
             </a:r>
             <a:endParaRPr lang="en-US" dirty="0"/>
           </a:p>
@@ -4780,7 +4782,7 @@
           <a:p>
             <a:r>
               <a:rPr lang="en-US" dirty="0"/>
-              <a:t>Take your time to copy this part; we will continue together.</a:t>
+              <a:t>Let us play the bilingual game. I say a word in English, and you give me the French word. Then we do the reverse.</a:t>
             </a:r>
             <a:endParaRPr lang="en-US" dirty="0"/>
           </a:p>
@@ -4868,7 +4870,7 @@
           <a:p>
             <a:r>
               <a:rPr lang="en-US" dirty="0"/>
-              <a:t>This slide is for me, the teacher: it gives the timing of the lesson and what to do if the projector is not available.</a:t>
+              <a:t>I record this information in the official logbook of the class after the lesson.</a:t>
             </a:r>
             <a:endParaRPr lang="en-US" dirty="0"/>
           </a:p>
@@ -4956,7 +4958,7 @@
           <a:p>
             <a:r>
               <a:rPr lang="en-US" dirty="0"/>
-              <a:t>These are the references and picture credits used to prepare this lesson.</a:t>
+              <a:t>I complete the second page of the logbook: the matter taught, the evaluation, the homework and the attendance.</a:t>
             </a:r>
             <a:endParaRPr lang="en-US" dirty="0"/>
           </a:p>
@@ -4980,6 +4982,182 @@
             <a:fld id="{F7021451-1387-4CA6-816F-3879F97B5CBC}" type="slidenum">
               <a:rPr lang="en-US"/>
               <a:t>55</a:t>
+            </a:fld>
+            <a:endParaRPr lang="en-US"/>
+          </a:p>
+        </p:txBody>
+      </p:sp>
+    </p:spTree>
+    <p:extLst>
+      <p:ext uri="{BB962C8B-B14F-4D97-AF65-F5344CB8AC3E}">
+        <p14:creationId xmlns:p14="http://schemas.microsoft.com/office/powerpoint/2010/main" val="1024086991"/>
+      </p:ext>
+    </p:extLst>
+  </p:cSld>
+  <p:clrMapOvr>
+    <a:masterClrMapping/>
+  </p:clrMapOvr>
+</p:notes>
+</file>
+
+<file path=ppt/notesSlides/notesSlide56.xml><?xml version="1.0" encoding="utf-8"?>
+<p:notes xmlns:a="http://schemas.openxmlformats.org/drawingml/2006/main" xmlns:r="http://schemas.openxmlformats.org/officeDocument/2006/relationships" xmlns:p="http://schemas.openxmlformats.org/presentationml/2006/main">
+  <p:cSld>
+    <p:spTree>
+      <p:nvGrpSpPr>
+        <p:cNvPr id="1" name=""/>
+        <p:cNvGrpSpPr/>
+        <p:nvPr/>
+      </p:nvGrpSpPr>
+      <p:grpSpPr>
+        <a:xfrm>
+          <a:off x="0" y="0"/>
+          <a:ext cx="0" cy="0"/>
+          <a:chOff x="0" y="0"/>
+          <a:chExt cx="0" cy="0"/>
+        </a:xfrm>
+      </p:grpSpPr>
+      <p:sp>
+        <p:nvSpPr>
+          <p:cNvPr id="2" name="Slide Image Placeholder 1"/>
+          <p:cNvSpPr>
+            <a:spLocks noGrp="1" noRot="1" noChangeAspect="1"/>
+          </p:cNvSpPr>
+          <p:nvPr>
+            <p:ph type="sldImg"/>
+          </p:nvPr>
+        </p:nvSpPr>
+        <p:spPr/>
+      </p:sp>
+      <p:sp>
+        <p:nvSpPr>
+          <p:cNvPr id="3" name="Notes Placeholder 2"/>
+          <p:cNvSpPr>
+            <a:spLocks noGrp="1"/>
+          </p:cNvSpPr>
+          <p:nvPr>
+            <p:ph type="body" idx="1"/>
+          </p:nvPr>
+        </p:nvSpPr>
+        <p:spPr/>
+        <p:txBody>
+          <a:bodyPr/>
+          <a:lstStyle/>
+          <a:p>
+            <a:r>
+              <a:rPr lang="en-US" dirty="0"/>
+              <a:t>This slide is for me, the teacher: it gives the timing of the lesson and what to do if the projector is not available.</a:t>
+            </a:r>
+            <a:endParaRPr lang="en-US" dirty="0"/>
+          </a:p>
+        </p:txBody>
+      </p:sp>
+      <p:sp>
+        <p:nvSpPr>
+          <p:cNvPr id="4" name="Slide Number Placeholder 3"/>
+          <p:cNvSpPr>
+            <a:spLocks noGrp="1"/>
+          </p:cNvSpPr>
+          <p:nvPr>
+            <p:ph type="sldNum" sz="quarter" idx="10"/>
+          </p:nvPr>
+        </p:nvSpPr>
+        <p:spPr/>
+        <p:txBody>
+          <a:bodyPr/>
+          <a:lstStyle/>
+          <a:p>
+            <a:fld id="{F7021451-1387-4CA6-816F-3879F97B5CBC}" type="slidenum">
+              <a:rPr lang="en-US"/>
+              <a:t>56</a:t>
+            </a:fld>
+            <a:endParaRPr lang="en-US"/>
+          </a:p>
+        </p:txBody>
+      </p:sp>
+    </p:spTree>
+    <p:extLst>
+      <p:ext uri="{BB962C8B-B14F-4D97-AF65-F5344CB8AC3E}">
+        <p14:creationId xmlns:p14="http://schemas.microsoft.com/office/powerpoint/2010/main" val="1024086991"/>
+      </p:ext>
+    </p:extLst>
+  </p:cSld>
+  <p:clrMapOvr>
+    <a:masterClrMapping/>
+  </p:clrMapOvr>
+</p:notes>
+</file>
+
+<file path=ppt/notesSlides/notesSlide57.xml><?xml version="1.0" encoding="utf-8"?>
+<p:notes xmlns:a="http://schemas.openxmlformats.org/drawingml/2006/main" xmlns:r="http://schemas.openxmlformats.org/officeDocument/2006/relationships" xmlns:p="http://schemas.openxmlformats.org/presentationml/2006/main">
+  <p:cSld>
+    <p:spTree>
+      <p:nvGrpSpPr>
+        <p:cNvPr id="1" name=""/>
+        <p:cNvGrpSpPr/>
+        <p:nvPr/>
+      </p:nvGrpSpPr>
+      <p:grpSpPr>
+        <a:xfrm>
+          <a:off x="0" y="0"/>
+          <a:ext cx="0" cy="0"/>
+          <a:chOff x="0" y="0"/>
+          <a:chExt cx="0" cy="0"/>
+        </a:xfrm>
+      </p:grpSpPr>
+      <p:sp>
+        <p:nvSpPr>
+          <p:cNvPr id="2" name="Slide Image Placeholder 1"/>
+          <p:cNvSpPr>
+            <a:spLocks noGrp="1" noRot="1" noChangeAspect="1"/>
+          </p:cNvSpPr>
+          <p:nvPr>
+            <p:ph type="sldImg"/>
+          </p:nvPr>
+        </p:nvSpPr>
+        <p:spPr/>
+      </p:sp>
+      <p:sp>
+        <p:nvSpPr>
+          <p:cNvPr id="3" name="Notes Placeholder 2"/>
+          <p:cNvSpPr>
+            <a:spLocks noGrp="1"/>
+          </p:cNvSpPr>
+          <p:nvPr>
+            <p:ph type="body" idx="1"/>
+          </p:nvPr>
+        </p:nvSpPr>
+        <p:spPr/>
+        <p:txBody>
+          <a:bodyPr/>
+          <a:lstStyle/>
+          <a:p>
+            <a:r>
+              <a:rPr lang="en-US" dirty="0"/>
+              <a:t>These are the references and picture credits used to prepare this lesson.</a:t>
+            </a:r>
+            <a:endParaRPr lang="en-US" dirty="0"/>
+          </a:p>
+        </p:txBody>
+      </p:sp>
+      <p:sp>
+        <p:nvSpPr>
+          <p:cNvPr id="4" name="Slide Number Placeholder 3"/>
+          <p:cNvSpPr>
+            <a:spLocks noGrp="1"/>
+          </p:cNvSpPr>
+          <p:nvPr>
+            <p:ph type="sldNum" sz="quarter" idx="10"/>
+          </p:nvPr>
+        </p:nvSpPr>
+        <p:spPr/>
+        <p:txBody>
+          <a:bodyPr/>
+          <a:lstStyle/>
+          <a:p>
+            <a:fld id="{F7021451-1387-4CA6-816F-3879F97B5CBC}" type="slidenum">
+              <a:rPr lang="en-US"/>
+              <a:t>57</a:t>
             </a:fld>
             <a:endParaRPr lang="en-US"/>
           </a:p>
@@ -6772,7 +6950,47 @@
                 <a:ea typeface="Times New Roman" pitchFamily="34" charset="-122"/>
                 <a:cs typeface="Times New Roman" pitchFamily="34" charset="-120"/>
               </a:rPr>
-              <a:t>Every year in November, Adamou, a Fulani herder, leaves his village near Garoua with his cattle. He walks south for weeks and comes back when the rains return. His classmate Paul thinks Adamou is lost.</a:t>
+              <a:t>Every year in November, Adamou, a Fulani herder, leaves his village near Garoua with his cattle.</a:t>
+            </a:r>
+            <a:endParaRPr lang="en-US" sz="4000" dirty="0"/>
+          </a:p>
+          <a:p>
+            <a:pPr algn="l" indent="0" marL="0">
+              <a:spcAft>
+                <a:spcPts val="800"/>
+              </a:spcAft>
+              <a:buNone/>
+            </a:pPr>
+            <a:r>
+              <a:rPr lang="en-US" sz="4000" dirty="0">
+                <a:solidFill>
+                  <a:srgbClr val="111111"/>
+                </a:solidFill>
+                <a:latin typeface="Times New Roman" pitchFamily="34" charset="0"/>
+                <a:ea typeface="Times New Roman" pitchFamily="34" charset="-122"/>
+                <a:cs typeface="Times New Roman" pitchFamily="34" charset="-120"/>
+              </a:rPr>
+              <a:t>He walks south for weeks and comes back when the rains return.</a:t>
+            </a:r>
+            <a:endParaRPr lang="en-US" sz="4000" dirty="0"/>
+          </a:p>
+          <a:p>
+            <a:pPr algn="l" indent="0" marL="0">
+              <a:spcAft>
+                <a:spcPts val="800"/>
+              </a:spcAft>
+              <a:buNone/>
+            </a:pPr>
+            <a:r>
+              <a:rPr lang="en-US" sz="4000" dirty="0">
+                <a:solidFill>
+                  <a:srgbClr val="111111"/>
+                </a:solidFill>
+                <a:latin typeface="Times New Roman" pitchFamily="34" charset="0"/>
+                <a:ea typeface="Times New Roman" pitchFamily="34" charset="-122"/>
+                <a:cs typeface="Times New Roman" pitchFamily="34" charset="-120"/>
+              </a:rPr>
+              <a:t>His classmate Paul thinks that Adamou is lost.</a:t>
             </a:r>
             <a:endParaRPr lang="en-US" sz="4000" dirty="0"/>
           </a:p>
@@ -6949,7 +7167,7 @@
                 <a:ea typeface="Times New Roman" pitchFamily="34" charset="-122"/>
                 <a:cs typeface="Times New Roman" pitchFamily="34" charset="-120"/>
               </a:rPr>
-              <a:t>Situation: Question 1</a:t>
+              <a:t>Situation in Real Life (continued)</a:t>
             </a:r>
             <a:endParaRPr lang="en-US" sz="3600" dirty="0"/>
           </a:p>
@@ -6991,7 +7209,7 @@
                 <a:ea typeface="Times New Roman" pitchFamily="34" charset="-122"/>
                 <a:cs typeface="Times New Roman" pitchFamily="34" charset="-120"/>
               </a:rPr>
-              <a:t>What is the problem in the situation?</a:t>
+              <a:t>"</a:t>
             </a:r>
             <a:endParaRPr lang="en-US" sz="4000" dirty="0"/>
           </a:p>
@@ -7168,7 +7386,7 @@
                 <a:ea typeface="Times New Roman" pitchFamily="34" charset="-122"/>
                 <a:cs typeface="Times New Roman" pitchFamily="34" charset="-120"/>
               </a:rPr>
-              <a:t>Answer</a:t>
+              <a:t>Situation: Question 1</a:t>
             </a:r>
             <a:endParaRPr lang="en-US" sz="3600" dirty="0"/>
           </a:p>
@@ -7210,7 +7428,7 @@
                 <a:ea typeface="Times New Roman" pitchFamily="34" charset="-122"/>
                 <a:cs typeface="Times New Roman" pitchFamily="34" charset="-120"/>
               </a:rPr>
-              <a:t>Paul does not understand why Adamou moves every year.</a:t>
+              <a:t>What is the problem in the situation?</a:t>
             </a:r>
             <a:endParaRPr lang="en-US" sz="4000" dirty="0"/>
           </a:p>
@@ -7387,7 +7605,7 @@
                 <a:ea typeface="Times New Roman" pitchFamily="34" charset="-122"/>
                 <a:cs typeface="Times New Roman" pitchFamily="34" charset="-120"/>
               </a:rPr>
-              <a:t>Situation: Question 2</a:t>
+              <a:t>Answer</a:t>
             </a:r>
             <a:endParaRPr lang="en-US" sz="3600" dirty="0"/>
           </a:p>
@@ -7429,7 +7647,7 @@
                 <a:ea typeface="Times New Roman" pitchFamily="34" charset="-122"/>
                 <a:cs typeface="Times New Roman" pitchFamily="34" charset="-120"/>
               </a:rPr>
-              <a:t>When does Adamou leave, and when does he come back?</a:t>
+              <a:t>Paul does not understand why the herder moves and what activities people do in the savanna.</a:t>
             </a:r>
             <a:endParaRPr lang="en-US" sz="4000" dirty="0"/>
           </a:p>
@@ -7606,7 +7824,7 @@
                 <a:ea typeface="Times New Roman" pitchFamily="34" charset="-122"/>
                 <a:cs typeface="Times New Roman" pitchFamily="34" charset="-120"/>
               </a:rPr>
-              <a:t>Answer</a:t>
+              <a:t>Situation: Question 2</a:t>
             </a:r>
             <a:endParaRPr lang="en-US" sz="3600" dirty="0"/>
           </a:p>
@@ -7648,7 +7866,7 @@
                 <a:ea typeface="Times New Roman" pitchFamily="34" charset="-122"/>
                 <a:cs typeface="Times New Roman" pitchFamily="34" charset="-120"/>
               </a:rPr>
-              <a:t>He leaves in November and comes back when the rains return.</a:t>
+              <a:t>When does Adamou leave?</a:t>
             </a:r>
             <a:endParaRPr lang="en-US" sz="4000" dirty="0"/>
           </a:p>
@@ -7825,7 +8043,7 @@
                 <a:ea typeface="Times New Roman" pitchFamily="34" charset="-122"/>
                 <a:cs typeface="Times New Roman" pitchFamily="34" charset="-120"/>
               </a:rPr>
-              <a:t>Situation: Question 3</a:t>
+              <a:t>Answer</a:t>
             </a:r>
             <a:endParaRPr lang="en-US" sz="3600" dirty="0"/>
           </a:p>
@@ -7867,7 +8085,7 @@
                 <a:ea typeface="Times New Roman" pitchFamily="34" charset="-122"/>
                 <a:cs typeface="Times New Roman" pitchFamily="34" charset="-120"/>
               </a:rPr>
-              <a:t>Why does he move?</a:t>
+              <a:t>In November, at the start of the dry season.</a:t>
             </a:r>
             <a:endParaRPr lang="en-US" sz="4000" dirty="0"/>
           </a:p>
@@ -8044,7 +8262,7 @@
                 <a:ea typeface="Times New Roman" pitchFamily="34" charset="-122"/>
                 <a:cs typeface="Times New Roman" pitchFamily="34" charset="-120"/>
               </a:rPr>
-              <a:t>Possible Answer</a:t>
+              <a:t>Situation: Question 3</a:t>
             </a:r>
             <a:endParaRPr lang="en-US" sz="3600" dirty="0"/>
           </a:p>
@@ -8086,7 +8304,7 @@
                 <a:ea typeface="Times New Roman" pitchFamily="34" charset="-122"/>
                 <a:cs typeface="Times New Roman" pitchFamily="34" charset="-120"/>
               </a:rPr>
-              <a:t>To find grass and water for his cattle.</a:t>
+              <a:t>When does he come back?</a:t>
             </a:r>
             <a:endParaRPr lang="en-US" sz="4000" dirty="0"/>
           </a:p>
@@ -8198,7 +8416,7 @@
                 <a:ea typeface="Calibri" pitchFamily="34" charset="-122"/>
                 <a:cs typeface="Calibri" pitchFamily="34" charset="-120"/>
               </a:rPr>
-              <a:t>ACTION TO TAKE</a:t>
+              <a:t>REAL-LIFE SITUATION</a:t>
             </a:r>
             <a:endParaRPr lang="en-US" sz="1400" dirty="0"/>
           </a:p>
@@ -8263,7 +8481,7 @@
                 <a:ea typeface="Times New Roman" pitchFamily="34" charset="-122"/>
                 <a:cs typeface="Times New Roman" pitchFamily="34" charset="-120"/>
               </a:rPr>
-              <a:t>Action to Take</a:t>
+              <a:t>Possible Answer</a:t>
             </a:r>
             <a:endParaRPr lang="en-US" sz="3600" dirty="0"/>
           </a:p>
@@ -8305,7 +8523,7 @@
                 <a:ea typeface="Times New Roman" pitchFamily="34" charset="-122"/>
                 <a:cs typeface="Times New Roman" pitchFamily="34" charset="-120"/>
               </a:rPr>
-              <a:t>Respect the work of farmers and herders and help them live in peace.</a:t>
+              <a:t>When the rains return.</a:t>
             </a:r>
             <a:endParaRPr lang="en-US" sz="4000" dirty="0"/>
           </a:p>
@@ -8417,7 +8635,7 @@
                 <a:ea typeface="Calibri" pitchFamily="34" charset="-122"/>
                 <a:cs typeface="Calibri" pitchFamily="34" charset="-120"/>
               </a:rPr>
-              <a:t>JUSTIFICATION</a:t>
+              <a:t>ACTION TO TAKE</a:t>
             </a:r>
             <a:endParaRPr lang="en-US" sz="1400" dirty="0"/>
           </a:p>
@@ -8482,7 +8700,7 @@
                 <a:ea typeface="Times New Roman" pitchFamily="34" charset="-122"/>
                 <a:cs typeface="Times New Roman" pitchFamily="34" charset="-120"/>
               </a:rPr>
-              <a:t>Justification of the Lesson</a:t>
+              <a:t>Action to Take</a:t>
             </a:r>
             <a:endParaRPr lang="en-US" sz="3600" dirty="0"/>
           </a:p>
@@ -8524,7 +8742,7 @@
                 <a:ea typeface="Times New Roman" pitchFamily="34" charset="-122"/>
                 <a:cs typeface="Times New Roman" pitchFamily="34" charset="-120"/>
               </a:rPr>
-              <a:t>This lesson helps us to know the work of the people of the savanna.</a:t>
+              <a:t>Respect the work of farmers and herders and help them live in peace.</a:t>
             </a:r>
             <a:endParaRPr lang="en-US" sz="4000" dirty="0"/>
           </a:p>
@@ -8636,54 +8854,15 @@
                 <a:ea typeface="Calibri" pitchFamily="34" charset="-122"/>
                 <a:cs typeface="Calibri" pitchFamily="34" charset="-120"/>
               </a:rPr>
-              <a:t>1. CROP FARMING</a:t>
+              <a:t>JUSTIFICATION</a:t>
             </a:r>
             <a:endParaRPr lang="en-US" sz="1400" dirty="0"/>
-          </a:p>
-        </p:txBody>
-      </p:sp>
-      <p:sp>
-        <p:nvSpPr>
-          <p:cNvPr id="3" name="Text 1"/>
-          <p:cNvSpPr/>
-          <p:nvPr/>
-        </p:nvSpPr>
-        <p:spPr>
-          <a:xfrm>
-            <a:off x="457200" y="1005840"/>
-            <a:ext cx="11277295" cy="731520"/>
-          </a:xfrm>
-          <a:prstGeom prst="rect">
-            <a:avLst/>
-          </a:prstGeom>
-          <a:noFill/>
-          <a:ln/>
-        </p:spPr>
-        <p:txBody>
-          <a:bodyPr wrap="square" lIns="0" tIns="0" rIns="0" bIns="0" rtlCol="0" anchor="ctr"/>
-          <a:lstStyle/>
-          <a:p>
-            <a:pPr algn="ctr" indent="0" marL="0">
-              <a:buNone/>
-            </a:pPr>
-            <a:r>
-              <a:rPr lang="en-US" sz="3600" b="1" dirty="0">
-                <a:solidFill>
-                  <a:srgbClr val="990011"/>
-                </a:solidFill>
-                <a:latin typeface="Times New Roman" pitchFamily="34" charset="0"/>
-                <a:ea typeface="Times New Roman" pitchFamily="34" charset="-122"/>
-                <a:cs typeface="Times New Roman" pitchFamily="34" charset="-120"/>
-              </a:rPr>
-              <a:t>Activity 1</a:t>
-            </a:r>
-            <a:endParaRPr lang="en-US" sz="3600" dirty="0"/>
           </a:p>
         </p:txBody>
       </p:sp>
       <p:pic>
         <p:nvPicPr>
-          <p:cNvPr id="4" name="Image 0" descr="/home/claude/f4/img/v2/f2t_cotton_harvest.jpg">    </p:cNvPr>
+          <p:cNvPr id="3" name="Image 0" descr="/home/claude/f4/img/minesec_sheet.png">    </p:cNvPr>
           <p:cNvPicPr>
             <a:picLocks noChangeAspect="1"/>
           </p:cNvPicPr>
@@ -8697,8 +8876,8 @@
         </p:blipFill>
         <p:spPr>
           <a:xfrm>
-            <a:off x="2250369" y="1783080"/>
-            <a:ext cx="7690957" cy="4270248"/>
+            <a:off x="0" y="658368"/>
+            <a:ext cx="5120640" cy="5833872"/>
           </a:xfrm>
           <a:prstGeom prst="rect">
             <a:avLst/>
@@ -8707,14 +8886,14 @@
       </p:pic>
       <p:sp>
         <p:nvSpPr>
-          <p:cNvPr id="5" name="Text 2"/>
+          <p:cNvPr id="4" name="Text 1"/>
           <p:cNvSpPr/>
           <p:nvPr/>
         </p:nvSpPr>
         <p:spPr>
           <a:xfrm>
-            <a:off x="457200" y="6089904"/>
-            <a:ext cx="11277295" cy="347472"/>
+            <a:off x="5349240" y="1005840"/>
+            <a:ext cx="6522415" cy="731520"/>
           </a:xfrm>
           <a:prstGeom prst="rect">
             <a:avLst/>
@@ -8723,24 +8902,68 @@
           <a:ln/>
         </p:spPr>
         <p:txBody>
-          <a:bodyPr wrap="square" lIns="0" tIns="0" rIns="0" bIns="0" rtlCol="0" anchor="ctr"/>
+          <a:bodyPr wrap="square" lIns="0" tIns="0" rIns="0" bIns="0" rtlCol="0" anchor="ctr">
+            <a:normAutofit/>
+          </a:bodyPr>
           <a:lstStyle/>
           <a:p>
             <a:pPr algn="ctr" indent="0" marL="0">
               <a:buNone/>
             </a:pPr>
             <a:r>
-              <a:rPr lang="en-US" sz="1800" i="1" dirty="0">
-                <a:solidFill>
-                  <a:srgbClr val="555555"/>
+              <a:rPr lang="en-US" sz="3600" b="1" dirty="0">
+                <a:solidFill>
+                  <a:srgbClr val="990011"/>
                 </a:solidFill>
                 <a:latin typeface="Times New Roman" pitchFamily="34" charset="0"/>
                 <a:ea typeface="Times New Roman" pitchFamily="34" charset="-122"/>
                 <a:cs typeface="Times New Roman" pitchFamily="34" charset="-120"/>
               </a:rPr>
-              <a:t>Farmers harvest cotton.</a:t>
-            </a:r>
-            <a:endParaRPr lang="en-US" sz="1800" dirty="0"/>
+              <a:t>Justification of the Lesson</a:t>
+            </a:r>
+            <a:endParaRPr lang="en-US" sz="3600" dirty="0"/>
+          </a:p>
+        </p:txBody>
+      </p:sp>
+      <p:sp>
+        <p:nvSpPr>
+          <p:cNvPr id="5" name="Text 2"/>
+          <p:cNvSpPr/>
+          <p:nvPr/>
+        </p:nvSpPr>
+        <p:spPr>
+          <a:xfrm>
+            <a:off x="5349240" y="1783080"/>
+            <a:ext cx="6522415" cy="4663440"/>
+          </a:xfrm>
+          <a:prstGeom prst="rect">
+            <a:avLst/>
+          </a:prstGeom>
+          <a:noFill/>
+          <a:ln/>
+        </p:spPr>
+        <p:txBody>
+          <a:bodyPr wrap="square" lIns="0" tIns="0" rIns="0" bIns="0" rtlCol="0" anchor="t"/>
+          <a:lstStyle/>
+          <a:p>
+            <a:pPr algn="l" indent="0" marL="0">
+              <a:spcAft>
+                <a:spcPts val="800"/>
+              </a:spcAft>
+              <a:buNone/>
+            </a:pPr>
+            <a:r>
+              <a:rPr lang="en-US" sz="4000" dirty="0">
+                <a:solidFill>
+                  <a:srgbClr val="111111"/>
+                </a:solidFill>
+                <a:latin typeface="Times New Roman" pitchFamily="34" charset="0"/>
+                <a:ea typeface="Times New Roman" pitchFamily="34" charset="-122"/>
+                <a:cs typeface="Times New Roman" pitchFamily="34" charset="-120"/>
+              </a:rPr>
+              <a:t>This lesson helps us to know the work of the people of the savanna.</a:t>
+            </a:r>
+            <a:endParaRPr lang="en-US" sz="4000" dirty="0"/>
           </a:p>
         </p:txBody>
       </p:sp>
@@ -9445,15 +9668,54 @@
                 <a:ea typeface="Calibri" pitchFamily="34" charset="-122"/>
                 <a:cs typeface="Calibri" pitchFamily="34" charset="-120"/>
               </a:rPr>
-              <a:t>1. CROP FARMING</a:t>
+              <a:t>1. FARMING</a:t>
             </a:r>
             <a:endParaRPr lang="en-US" sz="1400" dirty="0"/>
+          </a:p>
+        </p:txBody>
+      </p:sp>
+      <p:sp>
+        <p:nvSpPr>
+          <p:cNvPr id="3" name="Text 1"/>
+          <p:cNvSpPr/>
+          <p:nvPr/>
+        </p:nvSpPr>
+        <p:spPr>
+          <a:xfrm>
+            <a:off x="457200" y="1005840"/>
+            <a:ext cx="11277295" cy="731520"/>
+          </a:xfrm>
+          <a:prstGeom prst="rect">
+            <a:avLst/>
+          </a:prstGeom>
+          <a:noFill/>
+          <a:ln/>
+        </p:spPr>
+        <p:txBody>
+          <a:bodyPr wrap="square" lIns="0" tIns="0" rIns="0" bIns="0" rtlCol="0" anchor="ctr"/>
+          <a:lstStyle/>
+          <a:p>
+            <a:pPr algn="ctr" indent="0" marL="0">
+              <a:buNone/>
+            </a:pPr>
+            <a:r>
+              <a:rPr lang="en-US" sz="3600" b="1" dirty="0">
+                <a:solidFill>
+                  <a:srgbClr val="990011"/>
+                </a:solidFill>
+                <a:latin typeface="Times New Roman" pitchFamily="34" charset="0"/>
+                <a:ea typeface="Times New Roman" pitchFamily="34" charset="-122"/>
+                <a:cs typeface="Times New Roman" pitchFamily="34" charset="-120"/>
+              </a:rPr>
+              <a:t>Activity 1</a:t>
+            </a:r>
+            <a:endParaRPr lang="en-US" sz="3600" dirty="0"/>
           </a:p>
         </p:txBody>
       </p:sp>
       <p:pic>
         <p:nvPicPr>
-          <p:cNvPr id="3" name="Image 0" descr="/home/claude/f4/img/minesec_sheet.png">    </p:cNvPr>
+          <p:cNvPr id="4" name="Image 0" descr="/home/claude/f4/img/v2/f2t_cotton_harvest.jpg">    </p:cNvPr>
           <p:cNvPicPr>
             <a:picLocks noChangeAspect="1"/>
           </p:cNvPicPr>
@@ -9467,8 +9729,8 @@
         </p:blipFill>
         <p:spPr>
           <a:xfrm>
-            <a:off x="0" y="658368"/>
-            <a:ext cx="5120640" cy="5833872"/>
+            <a:off x="2250369" y="1783080"/>
+            <a:ext cx="7690957" cy="4270248"/>
           </a:xfrm>
           <a:prstGeom prst="rect">
             <a:avLst/>
@@ -9477,14 +9739,14 @@
       </p:pic>
       <p:sp>
         <p:nvSpPr>
-          <p:cNvPr id="4" name="Text 1"/>
+          <p:cNvPr id="5" name="Text 2"/>
           <p:cNvSpPr/>
           <p:nvPr/>
         </p:nvSpPr>
         <p:spPr>
           <a:xfrm>
-            <a:off x="5349240" y="1005840"/>
-            <a:ext cx="6522415" cy="731520"/>
+            <a:off x="457200" y="6089904"/>
+            <a:ext cx="11277295" cy="347472"/>
           </a:xfrm>
           <a:prstGeom prst="rect">
             <a:avLst/>
@@ -9493,68 +9755,24 @@
           <a:ln/>
         </p:spPr>
         <p:txBody>
-          <a:bodyPr wrap="square" lIns="0" tIns="0" rIns="0" bIns="0" rtlCol="0" anchor="ctr">
-            <a:normAutofit/>
-          </a:bodyPr>
+          <a:bodyPr wrap="square" lIns="0" tIns="0" rIns="0" bIns="0" rtlCol="0" anchor="ctr"/>
           <a:lstStyle/>
           <a:p>
             <a:pPr algn="ctr" indent="0" marL="0">
               <a:buNone/>
             </a:pPr>
             <a:r>
-              <a:rPr lang="en-US" sz="3600" b="1" dirty="0">
-                <a:solidFill>
-                  <a:srgbClr val="990011"/>
+              <a:rPr lang="en-US" sz="1800" i="1" dirty="0">
+                <a:solidFill>
+                  <a:srgbClr val="555555"/>
                 </a:solidFill>
                 <a:latin typeface="Times New Roman" pitchFamily="34" charset="0"/>
                 <a:ea typeface="Times New Roman" pitchFamily="34" charset="-122"/>
                 <a:cs typeface="Times New Roman" pitchFamily="34" charset="-120"/>
               </a:rPr>
-              <a:t>Activity 1: Question</a:t>
-            </a:r>
-            <a:endParaRPr lang="en-US" sz="3600" dirty="0"/>
-          </a:p>
-        </p:txBody>
-      </p:sp>
-      <p:sp>
-        <p:nvSpPr>
-          <p:cNvPr id="5" name="Text 2"/>
-          <p:cNvSpPr/>
-          <p:nvPr/>
-        </p:nvSpPr>
-        <p:spPr>
-          <a:xfrm>
-            <a:off x="5349240" y="1783080"/>
-            <a:ext cx="6522415" cy="4663440"/>
-          </a:xfrm>
-          <a:prstGeom prst="rect">
-            <a:avLst/>
-          </a:prstGeom>
-          <a:noFill/>
-          <a:ln/>
-        </p:spPr>
-        <p:txBody>
-          <a:bodyPr wrap="square" lIns="0" tIns="0" rIns="0" bIns="0" rtlCol="0" anchor="t"/>
-          <a:lstStyle/>
-          <a:p>
-            <a:pPr algn="l" indent="0" marL="0">
-              <a:spcAft>
-                <a:spcPts val="800"/>
-              </a:spcAft>
-              <a:buNone/>
-            </a:pPr>
-            <a:r>
-              <a:rPr lang="en-US" sz="4000" dirty="0">
-                <a:solidFill>
-                  <a:srgbClr val="111111"/>
-                </a:solidFill>
-                <a:latin typeface="Times New Roman" pitchFamily="34" charset="0"/>
-                <a:ea typeface="Times New Roman" pitchFamily="34" charset="-122"/>
-                <a:cs typeface="Times New Roman" pitchFamily="34" charset="-120"/>
-              </a:rPr>
-              <a:t>Do farmers grow cotton to eat it or to sell it? What do we call this type of crop?</a:t>
-            </a:r>
-            <a:endParaRPr lang="en-US" sz="4000" dirty="0"/>
+              <a:t>Harvesting cotton.</a:t>
+            </a:r>
+            <a:endParaRPr lang="en-US" sz="1800" dirty="0"/>
           </a:p>
         </p:txBody>
       </p:sp>
@@ -9664,7 +9882,7 @@
                 <a:ea typeface="Calibri" pitchFamily="34" charset="-122"/>
                 <a:cs typeface="Calibri" pitchFamily="34" charset="-120"/>
               </a:rPr>
-              <a:t>1. CROP FARMING</a:t>
+              <a:t>1. FARMING</a:t>
             </a:r>
             <a:endParaRPr lang="en-US" sz="1400" dirty="0"/>
           </a:p>
@@ -9729,7 +9947,7 @@
                 <a:ea typeface="Times New Roman" pitchFamily="34" charset="-122"/>
                 <a:cs typeface="Times New Roman" pitchFamily="34" charset="-120"/>
               </a:rPr>
-              <a:t>Activity 1: Answer</a:t>
+              <a:t>Activity 1: Question</a:t>
             </a:r>
             <a:endParaRPr lang="en-US" sz="3600" dirty="0"/>
           </a:p>
@@ -9771,7 +9989,7 @@
                 <a:ea typeface="Times New Roman" pitchFamily="34" charset="-122"/>
                 <a:cs typeface="Times New Roman" pitchFamily="34" charset="-120"/>
               </a:rPr>
-              <a:t>To sell it. It is a cash crop.</a:t>
+              <a:t>What do we call a crop that is grown to be sold?</a:t>
             </a:r>
             <a:endParaRPr lang="en-US" sz="4000" dirty="0"/>
           </a:p>
@@ -9883,54 +10101,15 @@
                 <a:ea typeface="Calibri" pitchFamily="34" charset="-122"/>
                 <a:cs typeface="Calibri" pitchFamily="34" charset="-120"/>
               </a:rPr>
-              <a:t>1. CROP FARMING</a:t>
+              <a:t>1. FARMING</a:t>
             </a:r>
             <a:endParaRPr lang="en-US" sz="1400" dirty="0"/>
-          </a:p>
-        </p:txBody>
-      </p:sp>
-      <p:sp>
-        <p:nvSpPr>
-          <p:cNvPr id="3" name="Text 1"/>
-          <p:cNvSpPr/>
-          <p:nvPr/>
-        </p:nvSpPr>
-        <p:spPr>
-          <a:xfrm>
-            <a:off x="457200" y="1005840"/>
-            <a:ext cx="11277295" cy="731520"/>
-          </a:xfrm>
-          <a:prstGeom prst="rect">
-            <a:avLst/>
-          </a:prstGeom>
-          <a:noFill/>
-          <a:ln/>
-        </p:spPr>
-        <p:txBody>
-          <a:bodyPr wrap="square" lIns="0" tIns="0" rIns="0" bIns="0" rtlCol="0" anchor="ctr"/>
-          <a:lstStyle/>
-          <a:p>
-            <a:pPr algn="ctr" indent="0" marL="0">
-              <a:buNone/>
-            </a:pPr>
-            <a:r>
-              <a:rPr lang="en-US" sz="3600" b="1" dirty="0">
-                <a:solidFill>
-                  <a:srgbClr val="990011"/>
-                </a:solidFill>
-                <a:latin typeface="Times New Roman" pitchFamily="34" charset="0"/>
-                <a:ea typeface="Times New Roman" pitchFamily="34" charset="-122"/>
-                <a:cs typeface="Times New Roman" pitchFamily="34" charset="-120"/>
-              </a:rPr>
-              <a:t>Activity 2</a:t>
-            </a:r>
-            <a:endParaRPr lang="en-US" sz="3600" dirty="0"/>
           </a:p>
         </p:txBody>
       </p:sp>
       <p:pic>
         <p:nvPicPr>
-          <p:cNvPr id="4" name="Image 0" descr="/home/claude/f4/img/v2/f2t_rice_field.jpg">    </p:cNvPr>
+          <p:cNvPr id="3" name="Image 0" descr="/home/claude/f4/img/minesec_sheet.png">    </p:cNvPr>
           <p:cNvPicPr>
             <a:picLocks noChangeAspect="1"/>
           </p:cNvPicPr>
@@ -9944,8 +10123,8 @@
         </p:blipFill>
         <p:spPr>
           <a:xfrm>
-            <a:off x="2246610" y="1783080"/>
-            <a:ext cx="7698475" cy="4270248"/>
+            <a:off x="0" y="658368"/>
+            <a:ext cx="5120640" cy="5833872"/>
           </a:xfrm>
           <a:prstGeom prst="rect">
             <a:avLst/>
@@ -9954,14 +10133,14 @@
       </p:pic>
       <p:sp>
         <p:nvSpPr>
-          <p:cNvPr id="5" name="Text 2"/>
+          <p:cNvPr id="4" name="Text 1"/>
           <p:cNvSpPr/>
           <p:nvPr/>
         </p:nvSpPr>
         <p:spPr>
           <a:xfrm>
-            <a:off x="457200" y="6089904"/>
-            <a:ext cx="11277295" cy="347472"/>
+            <a:off x="5349240" y="1005840"/>
+            <a:ext cx="6522415" cy="731520"/>
           </a:xfrm>
           <a:prstGeom prst="rect">
             <a:avLst/>
@@ -9970,24 +10149,68 @@
           <a:ln/>
         </p:spPr>
         <p:txBody>
-          <a:bodyPr wrap="square" lIns="0" tIns="0" rIns="0" bIns="0" rtlCol="0" anchor="ctr"/>
+          <a:bodyPr wrap="square" lIns="0" tIns="0" rIns="0" bIns="0" rtlCol="0" anchor="ctr">
+            <a:normAutofit/>
+          </a:bodyPr>
           <a:lstStyle/>
           <a:p>
             <a:pPr algn="ctr" indent="0" marL="0">
               <a:buNone/>
             </a:pPr>
             <a:r>
-              <a:rPr lang="en-US" sz="1800" i="1" dirty="0">
-                <a:solidFill>
-                  <a:srgbClr val="555555"/>
+              <a:rPr lang="en-US" sz="3600" b="1" dirty="0">
+                <a:solidFill>
+                  <a:srgbClr val="990011"/>
                 </a:solidFill>
                 <a:latin typeface="Times New Roman" pitchFamily="34" charset="0"/>
                 <a:ea typeface="Times New Roman" pitchFamily="34" charset="-122"/>
                 <a:cs typeface="Times New Roman" pitchFamily="34" charset="-120"/>
               </a:rPr>
-              <a:t>A rice field with water.</a:t>
-            </a:r>
-            <a:endParaRPr lang="en-US" sz="1800" dirty="0"/>
+              <a:t>Activity 1: Answer</a:t>
+            </a:r>
+            <a:endParaRPr lang="en-US" sz="3600" dirty="0"/>
+          </a:p>
+        </p:txBody>
+      </p:sp>
+      <p:sp>
+        <p:nvSpPr>
+          <p:cNvPr id="5" name="Text 2"/>
+          <p:cNvSpPr/>
+          <p:nvPr/>
+        </p:nvSpPr>
+        <p:spPr>
+          <a:xfrm>
+            <a:off x="5349240" y="1783080"/>
+            <a:ext cx="6522415" cy="4663440"/>
+          </a:xfrm>
+          <a:prstGeom prst="rect">
+            <a:avLst/>
+          </a:prstGeom>
+          <a:noFill/>
+          <a:ln/>
+        </p:spPr>
+        <p:txBody>
+          <a:bodyPr wrap="square" lIns="0" tIns="0" rIns="0" bIns="0" rtlCol="0" anchor="t"/>
+          <a:lstStyle/>
+          <a:p>
+            <a:pPr algn="l" indent="0" marL="0">
+              <a:spcAft>
+                <a:spcPts val="800"/>
+              </a:spcAft>
+              <a:buNone/>
+            </a:pPr>
+            <a:r>
+              <a:rPr lang="en-US" sz="4000" dirty="0">
+                <a:solidFill>
+                  <a:srgbClr val="111111"/>
+                </a:solidFill>
+                <a:latin typeface="Times New Roman" pitchFamily="34" charset="0"/>
+                <a:ea typeface="Times New Roman" pitchFamily="34" charset="-122"/>
+                <a:cs typeface="Times New Roman" pitchFamily="34" charset="-120"/>
+              </a:rPr>
+              <a:t>A cash crop.</a:t>
+            </a:r>
+            <a:endParaRPr lang="en-US" sz="4000" dirty="0"/>
           </a:p>
         </p:txBody>
       </p:sp>
@@ -10097,15 +10320,54 @@
                 <a:ea typeface="Calibri" pitchFamily="34" charset="-122"/>
                 <a:cs typeface="Calibri" pitchFamily="34" charset="-120"/>
               </a:rPr>
-              <a:t>1. CROP FARMING</a:t>
+              <a:t>1. FARMING</a:t>
             </a:r>
             <a:endParaRPr lang="en-US" sz="1400" dirty="0"/>
+          </a:p>
+        </p:txBody>
+      </p:sp>
+      <p:sp>
+        <p:nvSpPr>
+          <p:cNvPr id="3" name="Text 1"/>
+          <p:cNvSpPr/>
+          <p:nvPr/>
+        </p:nvSpPr>
+        <p:spPr>
+          <a:xfrm>
+            <a:off x="457200" y="1005840"/>
+            <a:ext cx="11277295" cy="731520"/>
+          </a:xfrm>
+          <a:prstGeom prst="rect">
+            <a:avLst/>
+          </a:prstGeom>
+          <a:noFill/>
+          <a:ln/>
+        </p:spPr>
+        <p:txBody>
+          <a:bodyPr wrap="square" lIns="0" tIns="0" rIns="0" bIns="0" rtlCol="0" anchor="ctr"/>
+          <a:lstStyle/>
+          <a:p>
+            <a:pPr algn="ctr" indent="0" marL="0">
+              <a:buNone/>
+            </a:pPr>
+            <a:r>
+              <a:rPr lang="en-US" sz="3600" b="1" dirty="0">
+                <a:solidFill>
+                  <a:srgbClr val="990011"/>
+                </a:solidFill>
+                <a:latin typeface="Times New Roman" pitchFamily="34" charset="0"/>
+                <a:ea typeface="Times New Roman" pitchFamily="34" charset="-122"/>
+                <a:cs typeface="Times New Roman" pitchFamily="34" charset="-120"/>
+              </a:rPr>
+              <a:t>Activity 2</a:t>
+            </a:r>
+            <a:endParaRPr lang="en-US" sz="3600" dirty="0"/>
           </a:p>
         </p:txBody>
       </p:sp>
       <p:pic>
         <p:nvPicPr>
-          <p:cNvPr id="3" name="Image 0" descr="/home/claude/f4/img/minesec_sheet.png">    </p:cNvPr>
+          <p:cNvPr id="4" name="Image 0" descr="/home/claude/f4/img/v2/f2t_rice_field.jpg">    </p:cNvPr>
           <p:cNvPicPr>
             <a:picLocks noChangeAspect="1"/>
           </p:cNvPicPr>
@@ -10119,8 +10381,8 @@
         </p:blipFill>
         <p:spPr>
           <a:xfrm>
-            <a:off x="0" y="658368"/>
-            <a:ext cx="5120640" cy="5833872"/>
+            <a:off x="2246610" y="1783080"/>
+            <a:ext cx="7698475" cy="4270248"/>
           </a:xfrm>
           <a:prstGeom prst="rect">
             <a:avLst/>
@@ -10129,14 +10391,14 @@
       </p:pic>
       <p:sp>
         <p:nvSpPr>
-          <p:cNvPr id="4" name="Text 1"/>
+          <p:cNvPr id="5" name="Text 2"/>
           <p:cNvSpPr/>
           <p:nvPr/>
         </p:nvSpPr>
         <p:spPr>
           <a:xfrm>
-            <a:off x="5349240" y="1005840"/>
-            <a:ext cx="6522415" cy="731520"/>
+            <a:off x="457200" y="6089904"/>
+            <a:ext cx="11277295" cy="347472"/>
           </a:xfrm>
           <a:prstGeom prst="rect">
             <a:avLst/>
@@ -10145,68 +10407,24 @@
           <a:ln/>
         </p:spPr>
         <p:txBody>
-          <a:bodyPr wrap="square" lIns="0" tIns="0" rIns="0" bIns="0" rtlCol="0" anchor="ctr">
-            <a:normAutofit/>
-          </a:bodyPr>
+          <a:bodyPr wrap="square" lIns="0" tIns="0" rIns="0" bIns="0" rtlCol="0" anchor="ctr"/>
           <a:lstStyle/>
           <a:p>
             <a:pPr algn="ctr" indent="0" marL="0">
               <a:buNone/>
             </a:pPr>
             <a:r>
-              <a:rPr lang="en-US" sz="3600" b="1" dirty="0">
-                <a:solidFill>
-                  <a:srgbClr val="990011"/>
+              <a:rPr lang="en-US" sz="1800" i="1" dirty="0">
+                <a:solidFill>
+                  <a:srgbClr val="555555"/>
                 </a:solidFill>
                 <a:latin typeface="Times New Roman" pitchFamily="34" charset="0"/>
                 <a:ea typeface="Times New Roman" pitchFamily="34" charset="-122"/>
                 <a:cs typeface="Times New Roman" pitchFamily="34" charset="-120"/>
               </a:rPr>
-              <a:t>Activity 2: Question</a:t>
-            </a:r>
-            <a:endParaRPr lang="en-US" sz="3600" dirty="0"/>
-          </a:p>
-        </p:txBody>
-      </p:sp>
-      <p:sp>
-        <p:nvSpPr>
-          <p:cNvPr id="5" name="Text 2"/>
-          <p:cNvSpPr/>
-          <p:nvPr/>
-        </p:nvSpPr>
-        <p:spPr>
-          <a:xfrm>
-            <a:off x="5349240" y="1783080"/>
-            <a:ext cx="6522415" cy="4663440"/>
-          </a:xfrm>
-          <a:prstGeom prst="rect">
-            <a:avLst/>
-          </a:prstGeom>
-          <a:noFill/>
-          <a:ln/>
-        </p:spPr>
-        <p:txBody>
-          <a:bodyPr wrap="square" lIns="0" tIns="0" rIns="0" bIns="0" rtlCol="0" anchor="t"/>
-          <a:lstStyle/>
-          <a:p>
-            <a:pPr algn="l" indent="0" marL="0">
-              <a:spcAft>
-                <a:spcPts val="800"/>
-              </a:spcAft>
-              <a:buNone/>
-            </a:pPr>
-            <a:r>
-              <a:rPr lang="en-US" sz="4000" dirty="0">
-                <a:solidFill>
-                  <a:srgbClr val="111111"/>
-                </a:solidFill>
-                <a:latin typeface="Times New Roman" pitchFamily="34" charset="0"/>
-                <a:ea typeface="Times New Roman" pitchFamily="34" charset="-122"/>
-                <a:cs typeface="Times New Roman" pitchFamily="34" charset="-120"/>
-              </a:rPr>
-              <a:t>Rice needs a lot of water. How do farmers get water in the dry savanna?</a:t>
-            </a:r>
-            <a:endParaRPr lang="en-US" sz="4000" dirty="0"/>
+              <a:t>A rice field.</a:t>
+            </a:r>
+            <a:endParaRPr lang="en-US" sz="1800" dirty="0"/>
           </a:p>
         </p:txBody>
       </p:sp>
@@ -10316,7 +10534,7 @@
                 <a:ea typeface="Calibri" pitchFamily="34" charset="-122"/>
                 <a:cs typeface="Calibri" pitchFamily="34" charset="-120"/>
               </a:rPr>
-              <a:t>1. CROP FARMING</a:t>
+              <a:t>1. FARMING</a:t>
             </a:r>
             <a:endParaRPr lang="en-US" sz="1400" dirty="0"/>
           </a:p>
@@ -10381,7 +10599,7 @@
                 <a:ea typeface="Times New Roman" pitchFamily="34" charset="-122"/>
                 <a:cs typeface="Times New Roman" pitchFamily="34" charset="-120"/>
               </a:rPr>
-              <a:t>Activity 2: Answer</a:t>
+              <a:t>Activity 2: Question</a:t>
             </a:r>
             <a:endParaRPr lang="en-US" sz="3600" dirty="0"/>
           </a:p>
@@ -10423,7 +10641,7 @@
                 <a:ea typeface="Times New Roman" pitchFamily="34" charset="-122"/>
                 <a:cs typeface="Times New Roman" pitchFamily="34" charset="-120"/>
               </a:rPr>
-              <a:t>They bring water from rivers and dams to the fields: irrigation.</a:t>
+              <a:t>How do farmers bring water to their fields in the dry savanna?</a:t>
             </a:r>
             <a:endParaRPr lang="en-US" sz="4000" dirty="0"/>
           </a:p>
@@ -10535,54 +10753,15 @@
                 <a:ea typeface="Calibri" pitchFamily="34" charset="-122"/>
                 <a:cs typeface="Calibri" pitchFamily="34" charset="-120"/>
               </a:rPr>
-              <a:t>2. LIVESTOCK REARING</a:t>
+              <a:t>1. FARMING</a:t>
             </a:r>
             <a:endParaRPr lang="en-US" sz="1400" dirty="0"/>
-          </a:p>
-        </p:txBody>
-      </p:sp>
-      <p:sp>
-        <p:nvSpPr>
-          <p:cNvPr id="3" name="Text 1"/>
-          <p:cNvSpPr/>
-          <p:nvPr/>
-        </p:nvSpPr>
-        <p:spPr>
-          <a:xfrm>
-            <a:off x="457200" y="1005840"/>
-            <a:ext cx="11277295" cy="731520"/>
-          </a:xfrm>
-          <a:prstGeom prst="rect">
-            <a:avLst/>
-          </a:prstGeom>
-          <a:noFill/>
-          <a:ln/>
-        </p:spPr>
-        <p:txBody>
-          <a:bodyPr wrap="square" lIns="0" tIns="0" rIns="0" bIns="0" rtlCol="0" anchor="ctr"/>
-          <a:lstStyle/>
-          <a:p>
-            <a:pPr algn="ctr" indent="0" marL="0">
-              <a:buNone/>
-            </a:pPr>
-            <a:r>
-              <a:rPr lang="en-US" sz="3600" b="1" dirty="0">
-                <a:solidFill>
-                  <a:srgbClr val="990011"/>
-                </a:solidFill>
-                <a:latin typeface="Times New Roman" pitchFamily="34" charset="0"/>
-                <a:ea typeface="Times New Roman" pitchFamily="34" charset="-122"/>
-                <a:cs typeface="Times New Roman" pitchFamily="34" charset="-120"/>
-              </a:rPr>
-              <a:t>Activity 3</a:t>
-            </a:r>
-            <a:endParaRPr lang="en-US" sz="3600" dirty="0"/>
           </a:p>
         </p:txBody>
       </p:sp>
       <p:pic>
         <p:nvPicPr>
-          <p:cNvPr id="4" name="Image 0" descr="/home/claude/f4/img/v2/transhumance.gif">    </p:cNvPr>
+          <p:cNvPr id="3" name="Image 0" descr="/home/claude/f4/img/minesec_sheet.png">    </p:cNvPr>
           <p:cNvPicPr>
             <a:picLocks noChangeAspect="1"/>
           </p:cNvPicPr>
@@ -10596,8 +10775,8 @@
         </p:blipFill>
         <p:spPr>
           <a:xfrm>
-            <a:off x="629930" y="1783080"/>
-            <a:ext cx="10931835" cy="4270248"/>
+            <a:off x="0" y="658368"/>
+            <a:ext cx="5120640" cy="5833872"/>
           </a:xfrm>
           <a:prstGeom prst="rect">
             <a:avLst/>
@@ -10606,14 +10785,14 @@
       </p:pic>
       <p:sp>
         <p:nvSpPr>
-          <p:cNvPr id="5" name="Text 2"/>
+          <p:cNvPr id="4" name="Text 1"/>
           <p:cNvSpPr/>
           <p:nvPr/>
         </p:nvSpPr>
         <p:spPr>
           <a:xfrm>
-            <a:off x="457200" y="6089904"/>
-            <a:ext cx="11277295" cy="347472"/>
+            <a:off x="5349240" y="1005840"/>
+            <a:ext cx="6522415" cy="731520"/>
           </a:xfrm>
           <a:prstGeom prst="rect">
             <a:avLst/>
@@ -10622,24 +10801,68 @@
           <a:ln/>
         </p:spPr>
         <p:txBody>
-          <a:bodyPr wrap="square" lIns="0" tIns="0" rIns="0" bIns="0" rtlCol="0" anchor="ctr"/>
+          <a:bodyPr wrap="square" lIns="0" tIns="0" rIns="0" bIns="0" rtlCol="0" anchor="ctr">
+            <a:normAutofit/>
+          </a:bodyPr>
           <a:lstStyle/>
           <a:p>
             <a:pPr algn="ctr" indent="0" marL="0">
               <a:buNone/>
             </a:pPr>
             <a:r>
-              <a:rPr lang="en-US" sz="1800" i="1" dirty="0">
-                <a:solidFill>
-                  <a:srgbClr val="555555"/>
+              <a:rPr lang="en-US" sz="3600" b="1" dirty="0">
+                <a:solidFill>
+                  <a:srgbClr val="990011"/>
                 </a:solidFill>
                 <a:latin typeface="Times New Roman" pitchFamily="34" charset="0"/>
                 <a:ea typeface="Times New Roman" pitchFamily="34" charset="-122"/>
                 <a:cs typeface="Times New Roman" pitchFamily="34" charset="-120"/>
               </a:rPr>
-              <a:t>Animation: the herder moves with his cattle.</a:t>
-            </a:r>
-            <a:endParaRPr lang="en-US" sz="1800" dirty="0"/>
+              <a:t>Activity 2: Answer</a:t>
+            </a:r>
+            <a:endParaRPr lang="en-US" sz="3600" dirty="0"/>
+          </a:p>
+        </p:txBody>
+      </p:sp>
+      <p:sp>
+        <p:nvSpPr>
+          <p:cNvPr id="5" name="Text 2"/>
+          <p:cNvSpPr/>
+          <p:nvPr/>
+        </p:nvSpPr>
+        <p:spPr>
+          <a:xfrm>
+            <a:off x="5349240" y="1783080"/>
+            <a:ext cx="6522415" cy="4663440"/>
+          </a:xfrm>
+          <a:prstGeom prst="rect">
+            <a:avLst/>
+          </a:prstGeom>
+          <a:noFill/>
+          <a:ln/>
+        </p:spPr>
+        <p:txBody>
+          <a:bodyPr wrap="square" lIns="0" tIns="0" rIns="0" bIns="0" rtlCol="0" anchor="t"/>
+          <a:lstStyle/>
+          <a:p>
+            <a:pPr algn="l" indent="0" marL="0">
+              <a:spcAft>
+                <a:spcPts val="800"/>
+              </a:spcAft>
+              <a:buNone/>
+            </a:pPr>
+            <a:r>
+              <a:rPr lang="en-US" sz="4000" dirty="0">
+                <a:solidFill>
+                  <a:srgbClr val="111111"/>
+                </a:solidFill>
+                <a:latin typeface="Times New Roman" pitchFamily="34" charset="0"/>
+                <a:ea typeface="Times New Roman" pitchFamily="34" charset="-122"/>
+                <a:cs typeface="Times New Roman" pitchFamily="34" charset="-120"/>
+              </a:rPr>
+              <a:t>By irrigation from rivers and dams.</a:t>
+            </a:r>
+            <a:endParaRPr lang="en-US" sz="4000" dirty="0"/>
           </a:p>
         </p:txBody>
       </p:sp>
@@ -10755,9 +10978,48 @@
           </a:p>
         </p:txBody>
       </p:sp>
+      <p:sp>
+        <p:nvSpPr>
+          <p:cNvPr id="3" name="Text 1"/>
+          <p:cNvSpPr/>
+          <p:nvPr/>
+        </p:nvSpPr>
+        <p:spPr>
+          <a:xfrm>
+            <a:off x="457200" y="1005840"/>
+            <a:ext cx="11277295" cy="731520"/>
+          </a:xfrm>
+          <a:prstGeom prst="rect">
+            <a:avLst/>
+          </a:prstGeom>
+          <a:noFill/>
+          <a:ln/>
+        </p:spPr>
+        <p:txBody>
+          <a:bodyPr wrap="square" lIns="0" tIns="0" rIns="0" bIns="0" rtlCol="0" anchor="ctr"/>
+          <a:lstStyle/>
+          <a:p>
+            <a:pPr algn="ctr" indent="0" marL="0">
+              <a:buNone/>
+            </a:pPr>
+            <a:r>
+              <a:rPr lang="en-US" sz="3600" b="1" dirty="0">
+                <a:solidFill>
+                  <a:srgbClr val="990011"/>
+                </a:solidFill>
+                <a:latin typeface="Times New Roman" pitchFamily="34" charset="0"/>
+                <a:ea typeface="Times New Roman" pitchFamily="34" charset="-122"/>
+                <a:cs typeface="Times New Roman" pitchFamily="34" charset="-120"/>
+              </a:rPr>
+              <a:t>Activity 3</a:t>
+            </a:r>
+            <a:endParaRPr lang="en-US" sz="3600" dirty="0"/>
+          </a:p>
+        </p:txBody>
+      </p:sp>
       <p:pic>
         <p:nvPicPr>
-          <p:cNvPr id="3" name="Image 0" descr="/home/claude/f4/img/minesec_sheet.png">    </p:cNvPr>
+          <p:cNvPr id="4" name="Image 0" descr="/home/claude/f4/img/v2/transhumance.gif">    </p:cNvPr>
           <p:cNvPicPr>
             <a:picLocks noChangeAspect="1"/>
           </p:cNvPicPr>
@@ -10771,8 +11033,8 @@
         </p:blipFill>
         <p:spPr>
           <a:xfrm>
-            <a:off x="0" y="658368"/>
-            <a:ext cx="5120640" cy="5833872"/>
+            <a:off x="629930" y="1783080"/>
+            <a:ext cx="10931835" cy="4270248"/>
           </a:xfrm>
           <a:prstGeom prst="rect">
             <a:avLst/>
@@ -10781,14 +11043,14 @@
       </p:pic>
       <p:sp>
         <p:nvSpPr>
-          <p:cNvPr id="4" name="Text 1"/>
+          <p:cNvPr id="5" name="Text 2"/>
           <p:cNvSpPr/>
           <p:nvPr/>
         </p:nvSpPr>
         <p:spPr>
           <a:xfrm>
-            <a:off x="5349240" y="1005840"/>
-            <a:ext cx="6522415" cy="731520"/>
+            <a:off x="457200" y="6089904"/>
+            <a:ext cx="11277295" cy="347472"/>
           </a:xfrm>
           <a:prstGeom prst="rect">
             <a:avLst/>
@@ -10797,68 +11059,24 @@
           <a:ln/>
         </p:spPr>
         <p:txBody>
-          <a:bodyPr wrap="square" lIns="0" tIns="0" rIns="0" bIns="0" rtlCol="0" anchor="ctr">
-            <a:normAutofit/>
-          </a:bodyPr>
+          <a:bodyPr wrap="square" lIns="0" tIns="0" rIns="0" bIns="0" rtlCol="0" anchor="ctr"/>
           <a:lstStyle/>
           <a:p>
             <a:pPr algn="ctr" indent="0" marL="0">
               <a:buNone/>
             </a:pPr>
             <a:r>
-              <a:rPr lang="en-US" sz="3600" b="1" dirty="0">
-                <a:solidFill>
-                  <a:srgbClr val="990011"/>
+              <a:rPr lang="en-US" sz="1800" i="1" dirty="0">
+                <a:solidFill>
+                  <a:srgbClr val="555555"/>
                 </a:solidFill>
                 <a:latin typeface="Times New Roman" pitchFamily="34" charset="0"/>
                 <a:ea typeface="Times New Roman" pitchFamily="34" charset="-122"/>
                 <a:cs typeface="Times New Roman" pitchFamily="34" charset="-120"/>
               </a:rPr>
-              <a:t>Activity 3: Question</a:t>
-            </a:r>
-            <a:endParaRPr lang="en-US" sz="3600" dirty="0"/>
-          </a:p>
-        </p:txBody>
-      </p:sp>
-      <p:sp>
-        <p:nvSpPr>
-          <p:cNvPr id="5" name="Text 2"/>
-          <p:cNvSpPr/>
-          <p:nvPr/>
-        </p:nvSpPr>
-        <p:spPr>
-          <a:xfrm>
-            <a:off x="5349240" y="1783080"/>
-            <a:ext cx="6522415" cy="4663440"/>
-          </a:xfrm>
-          <a:prstGeom prst="rect">
-            <a:avLst/>
-          </a:prstGeom>
-          <a:noFill/>
-          <a:ln/>
-        </p:spPr>
-        <p:txBody>
-          <a:bodyPr wrap="square" lIns="0" tIns="0" rIns="0" bIns="0" rtlCol="0" anchor="t"/>
-          <a:lstStyle/>
-          <a:p>
-            <a:pPr algn="l" indent="0" marL="0">
-              <a:spcAft>
-                <a:spcPts val="800"/>
-              </a:spcAft>
-              <a:buNone/>
-            </a:pPr>
-            <a:r>
-              <a:rPr lang="en-US" sz="4000" dirty="0">
-                <a:solidFill>
-                  <a:srgbClr val="111111"/>
-                </a:solidFill>
-                <a:latin typeface="Times New Roman" pitchFamily="34" charset="0"/>
-                <a:ea typeface="Times New Roman" pitchFamily="34" charset="-122"/>
-                <a:cs typeface="Times New Roman" pitchFamily="34" charset="-120"/>
-              </a:rPr>
-              <a:t>Where does the herder go in the dry season? And in the rainy season?</a:t>
-            </a:r>
-            <a:endParaRPr lang="en-US" sz="4000" dirty="0"/>
+              <a:t>Animation: herders move with the seasons.</a:t>
+            </a:r>
+            <a:endParaRPr lang="en-US" sz="1800" dirty="0"/>
           </a:p>
         </p:txBody>
       </p:sp>
@@ -11033,7 +11251,7 @@
                 <a:ea typeface="Times New Roman" pitchFamily="34" charset="-122"/>
                 <a:cs typeface="Times New Roman" pitchFamily="34" charset="-120"/>
               </a:rPr>
-              <a:t>Activity 3: Answer</a:t>
+              <a:t>Activity 3: Question</a:t>
             </a:r>
             <a:endParaRPr lang="en-US" sz="3600" dirty="0"/>
           </a:p>
@@ -11075,7 +11293,7 @@
                 <a:ea typeface="Times New Roman" pitchFamily="34" charset="-122"/>
                 <a:cs typeface="Times New Roman" pitchFamily="34" charset="-120"/>
               </a:rPr>
-              <a:t>South in the dry season; back north in the rainy season.</a:t>
+              <a:t>Where does the herder go in the dry season?</a:t>
             </a:r>
             <a:endParaRPr lang="en-US" sz="4000" dirty="0"/>
           </a:p>
@@ -11193,48 +11411,9 @@
           </a:p>
         </p:txBody>
       </p:sp>
-      <p:sp>
-        <p:nvSpPr>
-          <p:cNvPr id="3" name="Text 1"/>
-          <p:cNvSpPr/>
-          <p:nvPr/>
-        </p:nvSpPr>
-        <p:spPr>
-          <a:xfrm>
-            <a:off x="457200" y="1005840"/>
-            <a:ext cx="11277295" cy="731520"/>
-          </a:xfrm>
-          <a:prstGeom prst="rect">
-            <a:avLst/>
-          </a:prstGeom>
-          <a:noFill/>
-          <a:ln/>
-        </p:spPr>
-        <p:txBody>
-          <a:bodyPr wrap="square" lIns="0" tIns="0" rIns="0" bIns="0" rtlCol="0" anchor="ctr"/>
-          <a:lstStyle/>
-          <a:p>
-            <a:pPr algn="ctr" indent="0" marL="0">
-              <a:buNone/>
-            </a:pPr>
-            <a:r>
-              <a:rPr lang="en-US" sz="3600" b="1" dirty="0">
-                <a:solidFill>
-                  <a:srgbClr val="990011"/>
-                </a:solidFill>
-                <a:latin typeface="Times New Roman" pitchFamily="34" charset="0"/>
-                <a:ea typeface="Times New Roman" pitchFamily="34" charset="-122"/>
-                <a:cs typeface="Times New Roman" pitchFamily="34" charset="-120"/>
-              </a:rPr>
-              <a:t>Activity 4</a:t>
-            </a:r>
-            <a:endParaRPr lang="en-US" sz="3600" dirty="0"/>
-          </a:p>
-        </p:txBody>
-      </p:sp>
       <p:pic>
         <p:nvPicPr>
-          <p:cNvPr id="4" name="Image 0" descr="/home/claude/f4/img/v2/f2t_maasai.jpg">    </p:cNvPr>
+          <p:cNvPr id="3" name="Image 0" descr="/home/claude/f4/img/minesec_sheet.png">    </p:cNvPr>
           <p:cNvPicPr>
             <a:picLocks noChangeAspect="1"/>
           </p:cNvPicPr>
@@ -11248,8 +11427,8 @@
         </p:blipFill>
         <p:spPr>
           <a:xfrm>
-            <a:off x="2246610" y="1783080"/>
-            <a:ext cx="7698475" cy="4270248"/>
+            <a:off x="0" y="658368"/>
+            <a:ext cx="5120640" cy="5833872"/>
           </a:xfrm>
           <a:prstGeom prst="rect">
             <a:avLst/>
@@ -11258,14 +11437,14 @@
       </p:pic>
       <p:sp>
         <p:nvSpPr>
-          <p:cNvPr id="5" name="Text 2"/>
+          <p:cNvPr id="4" name="Text 1"/>
           <p:cNvSpPr/>
           <p:nvPr/>
         </p:nvSpPr>
         <p:spPr>
           <a:xfrm>
-            <a:off x="457200" y="6089904"/>
-            <a:ext cx="11277295" cy="347472"/>
+            <a:off x="5349240" y="1005840"/>
+            <a:ext cx="6522415" cy="731520"/>
           </a:xfrm>
           <a:prstGeom prst="rect">
             <a:avLst/>
@@ -11274,24 +11453,68 @@
           <a:ln/>
         </p:spPr>
         <p:txBody>
-          <a:bodyPr wrap="square" lIns="0" tIns="0" rIns="0" bIns="0" rtlCol="0" anchor="ctr"/>
+          <a:bodyPr wrap="square" lIns="0" tIns="0" rIns="0" bIns="0" rtlCol="0" anchor="ctr">
+            <a:normAutofit/>
+          </a:bodyPr>
           <a:lstStyle/>
           <a:p>
             <a:pPr algn="ctr" indent="0" marL="0">
               <a:buNone/>
             </a:pPr>
             <a:r>
-              <a:rPr lang="en-US" sz="1800" i="1" dirty="0">
-                <a:solidFill>
-                  <a:srgbClr val="555555"/>
+              <a:rPr lang="en-US" sz="3600" b="1" dirty="0">
+                <a:solidFill>
+                  <a:srgbClr val="990011"/>
                 </a:solidFill>
                 <a:latin typeface="Times New Roman" pitchFamily="34" charset="0"/>
                 <a:ea typeface="Times New Roman" pitchFamily="34" charset="-122"/>
                 <a:cs typeface="Times New Roman" pitchFamily="34" charset="-120"/>
               </a:rPr>
-              <a:t>Maasai herders with their cattle in East Africa.</a:t>
-            </a:r>
-            <a:endParaRPr lang="en-US" sz="1800" dirty="0"/>
+              <a:t>Activity 3: Answer</a:t>
+            </a:r>
+            <a:endParaRPr lang="en-US" sz="3600" dirty="0"/>
+          </a:p>
+        </p:txBody>
+      </p:sp>
+      <p:sp>
+        <p:nvSpPr>
+          <p:cNvPr id="5" name="Text 2"/>
+          <p:cNvSpPr/>
+          <p:nvPr/>
+        </p:nvSpPr>
+        <p:spPr>
+          <a:xfrm>
+            <a:off x="5349240" y="1783080"/>
+            <a:ext cx="6522415" cy="4663440"/>
+          </a:xfrm>
+          <a:prstGeom prst="rect">
+            <a:avLst/>
+          </a:prstGeom>
+          <a:noFill/>
+          <a:ln/>
+        </p:spPr>
+        <p:txBody>
+          <a:bodyPr wrap="square" lIns="0" tIns="0" rIns="0" bIns="0" rtlCol="0" anchor="t"/>
+          <a:lstStyle/>
+          <a:p>
+            <a:pPr algn="l" indent="0" marL="0">
+              <a:spcAft>
+                <a:spcPts val="800"/>
+              </a:spcAft>
+              <a:buNone/>
+            </a:pPr>
+            <a:r>
+              <a:rPr lang="en-US" sz="4000" dirty="0">
+                <a:solidFill>
+                  <a:srgbClr val="111111"/>
+                </a:solidFill>
+                <a:latin typeface="Times New Roman" pitchFamily="34" charset="0"/>
+                <a:ea typeface="Times New Roman" pitchFamily="34" charset="-122"/>
+                <a:cs typeface="Times New Roman" pitchFamily="34" charset="-120"/>
+              </a:rPr>
+              <a:t>To the south, where there is grass and water.</a:t>
+            </a:r>
+            <a:endParaRPr lang="en-US" sz="4000" dirty="0"/>
           </a:p>
         </p:txBody>
       </p:sp>
@@ -11407,9 +11630,48 @@
           </a:p>
         </p:txBody>
       </p:sp>
+      <p:sp>
+        <p:nvSpPr>
+          <p:cNvPr id="3" name="Text 1"/>
+          <p:cNvSpPr/>
+          <p:nvPr/>
+        </p:nvSpPr>
+        <p:spPr>
+          <a:xfrm>
+            <a:off x="457200" y="1005840"/>
+            <a:ext cx="11277295" cy="731520"/>
+          </a:xfrm>
+          <a:prstGeom prst="rect">
+            <a:avLst/>
+          </a:prstGeom>
+          <a:noFill/>
+          <a:ln/>
+        </p:spPr>
+        <p:txBody>
+          <a:bodyPr wrap="square" lIns="0" tIns="0" rIns="0" bIns="0" rtlCol="0" anchor="ctr"/>
+          <a:lstStyle/>
+          <a:p>
+            <a:pPr algn="ctr" indent="0" marL="0">
+              <a:buNone/>
+            </a:pPr>
+            <a:r>
+              <a:rPr lang="en-US" sz="3600" b="1" dirty="0">
+                <a:solidFill>
+                  <a:srgbClr val="990011"/>
+                </a:solidFill>
+                <a:latin typeface="Times New Roman" pitchFamily="34" charset="0"/>
+                <a:ea typeface="Times New Roman" pitchFamily="34" charset="-122"/>
+                <a:cs typeface="Times New Roman" pitchFamily="34" charset="-120"/>
+              </a:rPr>
+              <a:t>Activity 4</a:t>
+            </a:r>
+            <a:endParaRPr lang="en-US" sz="3600" dirty="0"/>
+          </a:p>
+        </p:txBody>
+      </p:sp>
       <p:pic>
         <p:nvPicPr>
-          <p:cNvPr id="3" name="Image 0" descr="/home/claude/f4/img/minesec_sheet.png">    </p:cNvPr>
+          <p:cNvPr id="4" name="Image 0" descr="/home/claude/f4/img/v2/f2t_maasai.jpg">    </p:cNvPr>
           <p:cNvPicPr>
             <a:picLocks noChangeAspect="1"/>
           </p:cNvPicPr>
@@ -11423,8 +11685,8 @@
         </p:blipFill>
         <p:spPr>
           <a:xfrm>
-            <a:off x="0" y="658368"/>
-            <a:ext cx="5120640" cy="5833872"/>
+            <a:off x="2246610" y="1783080"/>
+            <a:ext cx="7698475" cy="4270248"/>
           </a:xfrm>
           <a:prstGeom prst="rect">
             <a:avLst/>
@@ -11433,14 +11695,14 @@
       </p:pic>
       <p:sp>
         <p:nvSpPr>
-          <p:cNvPr id="4" name="Text 1"/>
+          <p:cNvPr id="5" name="Text 2"/>
           <p:cNvSpPr/>
           <p:nvPr/>
         </p:nvSpPr>
         <p:spPr>
           <a:xfrm>
-            <a:off x="5349240" y="1005840"/>
-            <a:ext cx="6522415" cy="731520"/>
+            <a:off x="457200" y="6089904"/>
+            <a:ext cx="11277295" cy="347472"/>
           </a:xfrm>
           <a:prstGeom prst="rect">
             <a:avLst/>
@@ -11449,68 +11711,24 @@
           <a:ln/>
         </p:spPr>
         <p:txBody>
-          <a:bodyPr wrap="square" lIns="0" tIns="0" rIns="0" bIns="0" rtlCol="0" anchor="ctr">
-            <a:normAutofit/>
-          </a:bodyPr>
+          <a:bodyPr wrap="square" lIns="0" tIns="0" rIns="0" bIns="0" rtlCol="0" anchor="ctr"/>
           <a:lstStyle/>
           <a:p>
             <a:pPr algn="ctr" indent="0" marL="0">
               <a:buNone/>
             </a:pPr>
             <a:r>
-              <a:rPr lang="en-US" sz="3600" b="1" dirty="0">
-                <a:solidFill>
-                  <a:srgbClr val="990011"/>
+              <a:rPr lang="en-US" sz="1800" i="1" dirty="0">
+                <a:solidFill>
+                  <a:srgbClr val="555555"/>
                 </a:solidFill>
                 <a:latin typeface="Times New Roman" pitchFamily="34" charset="0"/>
                 <a:ea typeface="Times New Roman" pitchFamily="34" charset="-122"/>
                 <a:cs typeface="Times New Roman" pitchFamily="34" charset="-120"/>
               </a:rPr>
-              <a:t>Activity 4: Question</a:t>
-            </a:r>
-            <a:endParaRPr lang="en-US" sz="3600" dirty="0"/>
-          </a:p>
-        </p:txBody>
-      </p:sp>
-      <p:sp>
-        <p:nvSpPr>
-          <p:cNvPr id="5" name="Text 2"/>
-          <p:cNvSpPr/>
-          <p:nvPr/>
-        </p:nvSpPr>
-        <p:spPr>
-          <a:xfrm>
-            <a:off x="5349240" y="1783080"/>
-            <a:ext cx="6522415" cy="4663440"/>
-          </a:xfrm>
-          <a:prstGeom prst="rect">
-            <a:avLst/>
-          </a:prstGeom>
-          <a:noFill/>
-          <a:ln/>
-        </p:spPr>
-        <p:txBody>
-          <a:bodyPr wrap="square" lIns="0" tIns="0" rIns="0" bIns="0" rtlCol="0" anchor="t"/>
-          <a:lstStyle/>
-          <a:p>
-            <a:pPr algn="l" indent="0" marL="0">
-              <a:spcAft>
-                <a:spcPts val="800"/>
-              </a:spcAft>
-              <a:buNone/>
-            </a:pPr>
-            <a:r>
-              <a:rPr lang="en-US" sz="4000" dirty="0">
-                <a:solidFill>
-                  <a:srgbClr val="111111"/>
-                </a:solidFill>
-                <a:latin typeface="Times New Roman" pitchFamily="34" charset="0"/>
-                <a:ea typeface="Times New Roman" pitchFamily="34" charset="-122"/>
-                <a:cs typeface="Times New Roman" pitchFamily="34" charset="-120"/>
-              </a:rPr>
-              <a:t>Why are cattle important for these herders?</a:t>
-            </a:r>
-            <a:endParaRPr lang="en-US" sz="4000" dirty="0"/>
+              <a:t>Herders with cattle.</a:t>
+            </a:r>
+            <a:endParaRPr lang="en-US" sz="1800" dirty="0"/>
           </a:p>
         </p:txBody>
       </p:sp>
@@ -12694,7 +12912,7 @@
                 <a:ea typeface="Times New Roman" pitchFamily="34" charset="-122"/>
                 <a:cs typeface="Times New Roman" pitchFamily="34" charset="-120"/>
               </a:rPr>
-              <a:t>Activity 4: Answer</a:t>
+              <a:t>Activity 4: Question</a:t>
             </a:r>
             <a:endParaRPr lang="en-US" sz="3600" dirty="0"/>
           </a:p>
@@ -12736,7 +12954,7 @@
                 <a:ea typeface="Times New Roman" pitchFamily="34" charset="-122"/>
                 <a:cs typeface="Times New Roman" pitchFamily="34" charset="-120"/>
               </a:rPr>
-              <a:t>Cattle give milk, meat and money. They show that a man is rich.</a:t>
+              <a:t>Why are cattle important for herders?</a:t>
             </a:r>
             <a:endParaRPr lang="en-US" sz="4000" dirty="0"/>
           </a:p>
@@ -12848,54 +13066,15 @@
                 <a:ea typeface="Calibri" pitchFamily="34" charset="-122"/>
                 <a:cs typeface="Calibri" pitchFamily="34" charset="-120"/>
               </a:rPr>
-              <a:t>3. OTHER ACTIVITIES</a:t>
+              <a:t>2. LIVESTOCK REARING</a:t>
             </a:r>
             <a:endParaRPr lang="en-US" sz="1400" dirty="0"/>
-          </a:p>
-        </p:txBody>
-      </p:sp>
-      <p:sp>
-        <p:nvSpPr>
-          <p:cNvPr id="3" name="Text 1"/>
-          <p:cNvSpPr/>
-          <p:nvPr/>
-        </p:nvSpPr>
-        <p:spPr>
-          <a:xfrm>
-            <a:off x="457200" y="1005840"/>
-            <a:ext cx="11277295" cy="731520"/>
-          </a:xfrm>
-          <a:prstGeom prst="rect">
-            <a:avLst/>
-          </a:prstGeom>
-          <a:noFill/>
-          <a:ln/>
-        </p:spPr>
-        <p:txBody>
-          <a:bodyPr wrap="square" lIns="0" tIns="0" rIns="0" bIns="0" rtlCol="0" anchor="ctr"/>
-          <a:lstStyle/>
-          <a:p>
-            <a:pPr algn="ctr" indent="0" marL="0">
-              <a:buNone/>
-            </a:pPr>
-            <a:r>
-              <a:rPr lang="en-US" sz="3600" b="1" dirty="0">
-                <a:solidFill>
-                  <a:srgbClr val="990011"/>
-                </a:solidFill>
-                <a:latin typeface="Times New Roman" pitchFamily="34" charset="0"/>
-                <a:ea typeface="Times New Roman" pitchFamily="34" charset="-122"/>
-                <a:cs typeface="Times New Roman" pitchFamily="34" charset="-120"/>
-              </a:rPr>
-              <a:t>Activity 5</a:t>
-            </a:r>
-            <a:endParaRPr lang="en-US" sz="3600" dirty="0"/>
           </a:p>
         </p:txBody>
       </p:sp>
       <p:pic>
         <p:nvPicPr>
-          <p:cNvPr id="4" name="Image 0" descr="/home/claude/f4/img/v2/f2t_fishing.jpg">    </p:cNvPr>
+          <p:cNvPr id="3" name="Image 0" descr="/home/claude/f4/img/minesec_sheet.png">    </p:cNvPr>
           <p:cNvPicPr>
             <a:picLocks noChangeAspect="1"/>
           </p:cNvPicPr>
@@ -12909,8 +13088,8 @@
         </p:blipFill>
         <p:spPr>
           <a:xfrm>
-            <a:off x="2246610" y="1783080"/>
-            <a:ext cx="7698475" cy="4270248"/>
+            <a:off x="0" y="658368"/>
+            <a:ext cx="5120640" cy="5833872"/>
           </a:xfrm>
           <a:prstGeom prst="rect">
             <a:avLst/>
@@ -12919,14 +13098,14 @@
       </p:pic>
       <p:sp>
         <p:nvSpPr>
-          <p:cNvPr id="5" name="Text 2"/>
+          <p:cNvPr id="4" name="Text 1"/>
           <p:cNvSpPr/>
           <p:nvPr/>
         </p:nvSpPr>
         <p:spPr>
           <a:xfrm>
-            <a:off x="457200" y="6089904"/>
-            <a:ext cx="11277295" cy="347472"/>
+            <a:off x="5349240" y="1005840"/>
+            <a:ext cx="6522415" cy="731520"/>
           </a:xfrm>
           <a:prstGeom prst="rect">
             <a:avLst/>
@@ -12935,24 +13114,68 @@
           <a:ln/>
         </p:spPr>
         <p:txBody>
-          <a:bodyPr wrap="square" lIns="0" tIns="0" rIns="0" bIns="0" rtlCol="0" anchor="ctr"/>
+          <a:bodyPr wrap="square" lIns="0" tIns="0" rIns="0" bIns="0" rtlCol="0" anchor="ctr">
+            <a:normAutofit/>
+          </a:bodyPr>
           <a:lstStyle/>
           <a:p>
             <a:pPr algn="ctr" indent="0" marL="0">
               <a:buNone/>
             </a:pPr>
             <a:r>
-              <a:rPr lang="en-US" sz="1800" i="1" dirty="0">
-                <a:solidFill>
-                  <a:srgbClr val="555555"/>
+              <a:rPr lang="en-US" sz="3600" b="1" dirty="0">
+                <a:solidFill>
+                  <a:srgbClr val="990011"/>
                 </a:solidFill>
                 <a:latin typeface="Times New Roman" pitchFamily="34" charset="0"/>
                 <a:ea typeface="Times New Roman" pitchFamily="34" charset="-122"/>
                 <a:cs typeface="Times New Roman" pitchFamily="34" charset="-120"/>
               </a:rPr>
-              <a:t>Fishermen in a canoe on a river.</a:t>
-            </a:r>
-            <a:endParaRPr lang="en-US" sz="1800" dirty="0"/>
+              <a:t>Activity 4: Answer</a:t>
+            </a:r>
+            <a:endParaRPr lang="en-US" sz="3600" dirty="0"/>
+          </a:p>
+        </p:txBody>
+      </p:sp>
+      <p:sp>
+        <p:nvSpPr>
+          <p:cNvPr id="5" name="Text 2"/>
+          <p:cNvSpPr/>
+          <p:nvPr/>
+        </p:nvSpPr>
+        <p:spPr>
+          <a:xfrm>
+            <a:off x="5349240" y="1783080"/>
+            <a:ext cx="6522415" cy="4663440"/>
+          </a:xfrm>
+          <a:prstGeom prst="rect">
+            <a:avLst/>
+          </a:prstGeom>
+          <a:noFill/>
+          <a:ln/>
+        </p:spPr>
+        <p:txBody>
+          <a:bodyPr wrap="square" lIns="0" tIns="0" rIns="0" bIns="0" rtlCol="0" anchor="t"/>
+          <a:lstStyle/>
+          <a:p>
+            <a:pPr algn="l" indent="0" marL="0">
+              <a:spcAft>
+                <a:spcPts val="800"/>
+              </a:spcAft>
+              <a:buNone/>
+            </a:pPr>
+            <a:r>
+              <a:rPr lang="en-US" sz="4000" dirty="0">
+                <a:solidFill>
+                  <a:srgbClr val="111111"/>
+                </a:solidFill>
+                <a:latin typeface="Times New Roman" pitchFamily="34" charset="0"/>
+                <a:ea typeface="Times New Roman" pitchFamily="34" charset="-122"/>
+                <a:cs typeface="Times New Roman" pitchFamily="34" charset="-120"/>
+              </a:rPr>
+              <a:t>They give milk, meat and money.</a:t>
+            </a:r>
+            <a:endParaRPr lang="en-US" sz="4000" dirty="0"/>
           </a:p>
         </p:txBody>
       </p:sp>
@@ -13068,9 +13291,48 @@
           </a:p>
         </p:txBody>
       </p:sp>
+      <p:sp>
+        <p:nvSpPr>
+          <p:cNvPr id="3" name="Text 1"/>
+          <p:cNvSpPr/>
+          <p:nvPr/>
+        </p:nvSpPr>
+        <p:spPr>
+          <a:xfrm>
+            <a:off x="457200" y="1005840"/>
+            <a:ext cx="11277295" cy="731520"/>
+          </a:xfrm>
+          <a:prstGeom prst="rect">
+            <a:avLst/>
+          </a:prstGeom>
+          <a:noFill/>
+          <a:ln/>
+        </p:spPr>
+        <p:txBody>
+          <a:bodyPr wrap="square" lIns="0" tIns="0" rIns="0" bIns="0" rtlCol="0" anchor="ctr"/>
+          <a:lstStyle/>
+          <a:p>
+            <a:pPr algn="ctr" indent="0" marL="0">
+              <a:buNone/>
+            </a:pPr>
+            <a:r>
+              <a:rPr lang="en-US" sz="3600" b="1" dirty="0">
+                <a:solidFill>
+                  <a:srgbClr val="990011"/>
+                </a:solidFill>
+                <a:latin typeface="Times New Roman" pitchFamily="34" charset="0"/>
+                <a:ea typeface="Times New Roman" pitchFamily="34" charset="-122"/>
+                <a:cs typeface="Times New Roman" pitchFamily="34" charset="-120"/>
+              </a:rPr>
+              <a:t>Activity 5</a:t>
+            </a:r>
+            <a:endParaRPr lang="en-US" sz="3600" dirty="0"/>
+          </a:p>
+        </p:txBody>
+      </p:sp>
       <p:pic>
         <p:nvPicPr>
-          <p:cNvPr id="3" name="Image 0" descr="/home/claude/f4/img/minesec_sheet.png">    </p:cNvPr>
+          <p:cNvPr id="4" name="Image 0" descr="/home/claude/f4/img/v2/f2t_fishing.jpg">    </p:cNvPr>
           <p:cNvPicPr>
             <a:picLocks noChangeAspect="1"/>
           </p:cNvPicPr>
@@ -13084,8 +13346,8 @@
         </p:blipFill>
         <p:spPr>
           <a:xfrm>
-            <a:off x="0" y="658368"/>
-            <a:ext cx="5120640" cy="5833872"/>
+            <a:off x="2246610" y="1783080"/>
+            <a:ext cx="7698475" cy="4270248"/>
           </a:xfrm>
           <a:prstGeom prst="rect">
             <a:avLst/>
@@ -13094,14 +13356,14 @@
       </p:pic>
       <p:sp>
         <p:nvSpPr>
-          <p:cNvPr id="4" name="Text 1"/>
+          <p:cNvPr id="5" name="Text 2"/>
           <p:cNvSpPr/>
           <p:nvPr/>
         </p:nvSpPr>
         <p:spPr>
           <a:xfrm>
-            <a:off x="5349240" y="1005840"/>
-            <a:ext cx="6522415" cy="731520"/>
+            <a:off x="457200" y="6089904"/>
+            <a:ext cx="11277295" cy="347472"/>
           </a:xfrm>
           <a:prstGeom prst="rect">
             <a:avLst/>
@@ -13110,68 +13372,24 @@
           <a:ln/>
         </p:spPr>
         <p:txBody>
-          <a:bodyPr wrap="square" lIns="0" tIns="0" rIns="0" bIns="0" rtlCol="0" anchor="ctr">
-            <a:normAutofit/>
-          </a:bodyPr>
+          <a:bodyPr wrap="square" lIns="0" tIns="0" rIns="0" bIns="0" rtlCol="0" anchor="ctr"/>
           <a:lstStyle/>
           <a:p>
             <a:pPr algn="ctr" indent="0" marL="0">
               <a:buNone/>
             </a:pPr>
             <a:r>
-              <a:rPr lang="en-US" sz="3600" b="1" dirty="0">
-                <a:solidFill>
-                  <a:srgbClr val="990011"/>
+              <a:rPr lang="en-US" sz="1800" i="1" dirty="0">
+                <a:solidFill>
+                  <a:srgbClr val="555555"/>
                 </a:solidFill>
                 <a:latin typeface="Times New Roman" pitchFamily="34" charset="0"/>
                 <a:ea typeface="Times New Roman" pitchFamily="34" charset="-122"/>
                 <a:cs typeface="Times New Roman" pitchFamily="34" charset="-120"/>
               </a:rPr>
-              <a:t>Activity 5: Question</a:t>
-            </a:r>
-            <a:endParaRPr lang="en-US" sz="3600" dirty="0"/>
-          </a:p>
-        </p:txBody>
-      </p:sp>
-      <p:sp>
-        <p:nvSpPr>
-          <p:cNvPr id="5" name="Text 2"/>
-          <p:cNvSpPr/>
-          <p:nvPr/>
-        </p:nvSpPr>
-        <p:spPr>
-          <a:xfrm>
-            <a:off x="5349240" y="1783080"/>
-            <a:ext cx="6522415" cy="4663440"/>
-          </a:xfrm>
-          <a:prstGeom prst="rect">
-            <a:avLst/>
-          </a:prstGeom>
-          <a:noFill/>
-          <a:ln/>
-        </p:spPr>
-        <p:txBody>
-          <a:bodyPr wrap="square" lIns="0" tIns="0" rIns="0" bIns="0" rtlCol="0" anchor="t"/>
-          <a:lstStyle/>
-          <a:p>
-            <a:pPr algn="l" indent="0" marL="0">
-              <a:spcAft>
-                <a:spcPts val="800"/>
-              </a:spcAft>
-              <a:buNone/>
-            </a:pPr>
-            <a:r>
-              <a:rPr lang="en-US" sz="4000" dirty="0">
-                <a:solidFill>
-                  <a:srgbClr val="111111"/>
-                </a:solidFill>
-                <a:latin typeface="Times New Roman" pitchFamily="34" charset="0"/>
-                <a:ea typeface="Times New Roman" pitchFamily="34" charset="-122"/>
-                <a:cs typeface="Times New Roman" pitchFamily="34" charset="-120"/>
-              </a:rPr>
-              <a:t>Give two other activities of the people of the savanna.</a:t>
-            </a:r>
-            <a:endParaRPr lang="en-US" sz="4000" dirty="0"/>
+              <a:t>Fishermen.</a:t>
+            </a:r>
+            <a:endParaRPr lang="en-US" sz="1800" dirty="0"/>
           </a:p>
         </p:txBody>
       </p:sp>
@@ -13346,7 +13564,7 @@
                 <a:ea typeface="Times New Roman" pitchFamily="34" charset="-122"/>
                 <a:cs typeface="Times New Roman" pitchFamily="34" charset="-120"/>
               </a:rPr>
-              <a:t>Activity 5: Answer</a:t>
+              <a:t>Activity 5: Question</a:t>
             </a:r>
             <a:endParaRPr lang="en-US" sz="3600" dirty="0"/>
           </a:p>
@@ -13388,7 +13606,7 @@
                 <a:ea typeface="Times New Roman" pitchFamily="34" charset="-122"/>
                 <a:cs typeface="Times New Roman" pitchFamily="34" charset="-120"/>
               </a:rPr>
-              <a:t>Fishing and tourism. Also hunting and cutting wood.</a:t>
+              <a:t>Give one other activity of the people of the savanna.</a:t>
             </a:r>
             <a:endParaRPr lang="en-US" sz="4000" dirty="0"/>
           </a:p>
@@ -13500,7 +13718,7 @@
                 <a:ea typeface="Calibri" pitchFamily="34" charset="-122"/>
                 <a:cs typeface="Calibri" pitchFamily="34" charset="-120"/>
               </a:rPr>
-              <a:t>BOARD SUMMARY</a:t>
+              <a:t>3. OTHER ACTIVITIES</a:t>
             </a:r>
             <a:endParaRPr lang="en-US" sz="1400" dirty="0"/>
           </a:p>
@@ -13565,7 +13783,7 @@
                 <a:ea typeface="Times New Roman" pitchFamily="34" charset="-122"/>
                 <a:cs typeface="Times New Roman" pitchFamily="34" charset="-120"/>
               </a:rPr>
-              <a:t>Board Summary</a:t>
+              <a:t>Activity 5: Answer</a:t>
             </a:r>
             <a:endParaRPr lang="en-US" sz="3600" dirty="0"/>
           </a:p>
@@ -13599,7 +13817,7 @@
               <a:buNone/>
             </a:pPr>
             <a:r>
-              <a:rPr lang="en-US" sz="4000" b="1" dirty="0">
+              <a:rPr lang="en-US" sz="4000" dirty="0">
                 <a:solidFill>
                   <a:srgbClr val="111111"/>
                 </a:solidFill>
@@ -13607,47 +13825,7 @@
                 <a:ea typeface="Times New Roman" pitchFamily="34" charset="-122"/>
                 <a:cs typeface="Times New Roman" pitchFamily="34" charset="-120"/>
               </a:rPr>
-              <a:t>Topic: Man in His Environment</a:t>
-            </a:r>
-            <a:endParaRPr lang="en-US" sz="4000" dirty="0"/>
-          </a:p>
-          <a:p>
-            <a:pPr algn="l" indent="0" marL="0">
-              <a:spcAft>
-                <a:spcPts val="800"/>
-              </a:spcAft>
-              <a:buNone/>
-            </a:pPr>
-            <a:r>
-              <a:rPr lang="en-US" sz="4000" b="1" dirty="0">
-                <a:solidFill>
-                  <a:srgbClr val="111111"/>
-                </a:solidFill>
-                <a:latin typeface="Times New Roman" pitchFamily="34" charset="0"/>
-                <a:ea typeface="Times New Roman" pitchFamily="34" charset="-122"/>
-                <a:cs typeface="Times New Roman" pitchFamily="34" charset="-120"/>
-              </a:rPr>
-              <a:t>Sub-topic: Natural Regions</a:t>
-            </a:r>
-            <a:endParaRPr lang="en-US" sz="4000" dirty="0"/>
-          </a:p>
-          <a:p>
-            <a:pPr algn="l" indent="0" marL="0">
-              <a:spcAft>
-                <a:spcPts val="800"/>
-              </a:spcAft>
-              <a:buNone/>
-            </a:pPr>
-            <a:r>
-              <a:rPr lang="en-US" sz="4000" b="1" dirty="0">
-                <a:solidFill>
-                  <a:srgbClr val="990011"/>
-                </a:solidFill>
-                <a:latin typeface="Times New Roman" pitchFamily="34" charset="0"/>
-                <a:ea typeface="Times New Roman" pitchFamily="34" charset="-122"/>
-                <a:cs typeface="Times New Roman" pitchFamily="34" charset="-120"/>
-              </a:rPr>
-              <a:t>Lesson 2 (Part 4): The Tropical Grassland Region: Human Activities</a:t>
+              <a:t>Fishing (also hunting, tourism and cutting wood).</a:t>
             </a:r>
             <a:endParaRPr lang="en-US" sz="4000" dirty="0"/>
           </a:p>
@@ -13824,7 +14002,7 @@
                 <a:ea typeface="Times New Roman" pitchFamily="34" charset="-122"/>
                 <a:cs typeface="Times New Roman" pitchFamily="34" charset="-120"/>
               </a:rPr>
-              <a:t>DEFINITIONS</a:t>
+              <a:t>Board Summary</a:t>
             </a:r>
             <a:endParaRPr lang="en-US" sz="3600" dirty="0"/>
           </a:p>
@@ -13858,7 +14036,7 @@
               <a:buNone/>
             </a:pPr>
             <a:r>
-              <a:rPr lang="en-US" sz="4000" i="1" dirty="0">
+              <a:rPr lang="en-US" sz="4000" b="1" dirty="0">
                 <a:solidFill>
                   <a:srgbClr val="111111"/>
                 </a:solidFill>
@@ -13866,7 +14044,7 @@
                 <a:ea typeface="Times New Roman" pitchFamily="34" charset="-122"/>
                 <a:cs typeface="Times New Roman" pitchFamily="34" charset="-120"/>
               </a:rPr>
-              <a:t>The key terms of this lesson are defined as follows:</a:t>
+              <a:t>Topic: Man in His Environment</a:t>
             </a:r>
             <a:endParaRPr lang="en-US" sz="4000" dirty="0"/>
           </a:p>
@@ -13886,8 +14064,11 @@
                 <a:ea typeface="Times New Roman" pitchFamily="34" charset="-122"/>
                 <a:cs typeface="Times New Roman" pitchFamily="34" charset="-120"/>
               </a:rPr>
-              <a:t>Cash crop: </a:t>
-            </a:r>
+              <a:t>Sub-topic: Natural Regions</a:t>
+            </a:r>
+            <a:endParaRPr lang="en-US" sz="4000" dirty="0"/>
+          </a:p>
+          <a:p>
             <a:pPr algn="l" indent="0" marL="0">
               <a:spcAft>
                 <a:spcPts val="800"/>
@@ -13895,52 +14076,15 @@
               <a:buNone/>
             </a:pPr>
             <a:r>
-              <a:rPr lang="en-US" sz="4000" dirty="0">
-                <a:solidFill>
-                  <a:srgbClr val="111111"/>
+              <a:rPr lang="en-US" sz="4000" b="1" dirty="0">
+                <a:solidFill>
+                  <a:srgbClr val="990011"/>
                 </a:solidFill>
                 <a:latin typeface="Times New Roman" pitchFamily="34" charset="0"/>
                 <a:ea typeface="Times New Roman" pitchFamily="34" charset="-122"/>
                 <a:cs typeface="Times New Roman" pitchFamily="34" charset="-120"/>
               </a:rPr>
-              <a:t>It is a crop grown to be sold.</a:t>
-            </a:r>
-            <a:endParaRPr lang="en-US" sz="4000" dirty="0"/>
-          </a:p>
-          <a:p>
-            <a:pPr algn="l" indent="0" marL="0">
-              <a:spcAft>
-                <a:spcPts val="800"/>
-              </a:spcAft>
-              <a:buNone/>
-            </a:pPr>
-            <a:r>
-              <a:rPr lang="en-US" sz="4000" b="1" dirty="0">
-                <a:solidFill>
-                  <a:srgbClr val="111111"/>
-                </a:solidFill>
-                <a:latin typeface="Times New Roman" pitchFamily="34" charset="0"/>
-                <a:ea typeface="Times New Roman" pitchFamily="34" charset="-122"/>
-                <a:cs typeface="Times New Roman" pitchFamily="34" charset="-120"/>
-              </a:rPr>
-              <a:t>Food crop: </a:t>
-            </a:r>
-            <a:pPr algn="l" indent="0" marL="0">
-              <a:spcAft>
-                <a:spcPts val="800"/>
-              </a:spcAft>
-              <a:buNone/>
-            </a:pPr>
-            <a:r>
-              <a:rPr lang="en-US" sz="4000" dirty="0">
-                <a:solidFill>
-                  <a:srgbClr val="111111"/>
-                </a:solidFill>
-                <a:latin typeface="Times New Roman" pitchFamily="34" charset="0"/>
-                <a:ea typeface="Times New Roman" pitchFamily="34" charset="-122"/>
-                <a:cs typeface="Times New Roman" pitchFamily="34" charset="-120"/>
-              </a:rPr>
-              <a:t>It is a crop grown to feed the family.</a:t>
+              <a:t>Lesson 2 (Part 4): The Tropical Grassland Region: Human Activities</a:t>
             </a:r>
             <a:endParaRPr lang="en-US" sz="4000" dirty="0"/>
           </a:p>
@@ -14117,7 +14261,7 @@
                 <a:ea typeface="Times New Roman" pitchFamily="34" charset="-122"/>
                 <a:cs typeface="Times New Roman" pitchFamily="34" charset="-120"/>
               </a:rPr>
-              <a:t>DEFINITIONS (continued)</a:t>
+              <a:t>DEFINITIONS</a:t>
             </a:r>
             <a:endParaRPr lang="en-US" sz="3600" dirty="0"/>
           </a:p>
@@ -14151,6 +14295,66 @@
               <a:buNone/>
             </a:pPr>
             <a:r>
+              <a:rPr lang="en-US" sz="4000" i="1" dirty="0">
+                <a:solidFill>
+                  <a:srgbClr val="111111"/>
+                </a:solidFill>
+                <a:latin typeface="Times New Roman" pitchFamily="34" charset="0"/>
+                <a:ea typeface="Times New Roman" pitchFamily="34" charset="-122"/>
+                <a:cs typeface="Times New Roman" pitchFamily="34" charset="-120"/>
+              </a:rPr>
+              <a:t>The key terms of this lesson are defined as follows:</a:t>
+            </a:r>
+            <a:endParaRPr lang="en-US" sz="4000" dirty="0"/>
+          </a:p>
+          <a:p>
+            <a:pPr algn="l" marL="342900" indent="-342900">
+              <a:spcAft>
+                <a:spcPts val="800"/>
+              </a:spcAft>
+              <a:buSzPct val="100000"/>
+              <a:buChar char="•"/>
+            </a:pPr>
+            <a:r>
+              <a:rPr lang="en-US" sz="4000" b="1" dirty="0">
+                <a:solidFill>
+                  <a:srgbClr val="111111"/>
+                </a:solidFill>
+                <a:latin typeface="Times New Roman" pitchFamily="34" charset="0"/>
+                <a:ea typeface="Times New Roman" pitchFamily="34" charset="-122"/>
+                <a:cs typeface="Times New Roman" pitchFamily="34" charset="-120"/>
+              </a:rPr>
+              <a:t>Cash crop: </a:t>
+            </a:r>
+            <a:pPr algn="l" marL="342900" indent="-342900">
+              <a:spcAft>
+                <a:spcPts val="800"/>
+              </a:spcAft>
+              <a:buSzPct val="100000"/>
+              <a:buChar char="•"/>
+            </a:pPr>
+            <a:r>
+              <a:rPr lang="en-US" sz="4000" dirty="0">
+                <a:solidFill>
+                  <a:srgbClr val="111111"/>
+                </a:solidFill>
+                <a:latin typeface="Times New Roman" pitchFamily="34" charset="0"/>
+                <a:ea typeface="Times New Roman" pitchFamily="34" charset="-122"/>
+                <a:cs typeface="Times New Roman" pitchFamily="34" charset="-120"/>
+              </a:rPr>
+              <a:t>It is a crop grown to be sold.</a:t>
+            </a:r>
+            <a:endParaRPr lang="en-US" sz="4000" dirty="0"/>
+          </a:p>
+          <a:p>
+            <a:pPr algn="l" marL="342900" indent="-342900">
+              <a:spcAft>
+                <a:spcPts val="800"/>
+              </a:spcAft>
+              <a:buSzPct val="100000"/>
+              <a:buChar char="•"/>
+            </a:pPr>
+            <a:r>
               <a:rPr lang="en-US" sz="4000" b="1" dirty="0">
                 <a:solidFill>
                   <a:srgbClr val="111111"/>
@@ -14161,11 +14365,12 @@
               </a:rPr>
               <a:t>Transhumance: </a:t>
             </a:r>
-            <a:pPr algn="l" indent="0" marL="0">
+            <a:pPr algn="l" marL="342900" indent="-342900">
               <a:spcAft>
                 <a:spcPts val="800"/>
               </a:spcAft>
-              <a:buNone/>
+              <a:buSzPct val="100000"/>
+              <a:buChar char="•"/>
             </a:pPr>
             <a:r>
               <a:rPr lang="en-US" sz="4000" dirty="0">
@@ -14176,7 +14381,7 @@
                 <a:ea typeface="Times New Roman" pitchFamily="34" charset="-122"/>
                 <a:cs typeface="Times New Roman" pitchFamily="34" charset="-120"/>
               </a:rPr>
-              <a:t>It is the seasonal movement of herders with their animals.</a:t>
+              <a:t>It is the seasonal movement of herders and their animals.</a:t>
             </a:r>
             <a:endParaRPr lang="en-US" sz="4000" dirty="0"/>
           </a:p>
@@ -14311,7 +14516,7 @@
         <p:spPr>
           <a:xfrm>
             <a:off x="0" y="658368"/>
-            <a:ext cx="3840480" cy="5833872"/>
+            <a:ext cx="5120640" cy="5833872"/>
           </a:xfrm>
           <a:prstGeom prst="rect">
             <a:avLst/>
@@ -14326,8 +14531,8 @@
         </p:nvSpPr>
         <p:spPr>
           <a:xfrm>
-            <a:off x="4069080" y="1005840"/>
-            <a:ext cx="7802575" cy="731520"/>
+            <a:off x="5349240" y="1005840"/>
+            <a:ext cx="6522415" cy="731520"/>
           </a:xfrm>
           <a:prstGeom prst="rect">
             <a:avLst/>
@@ -14353,7 +14558,7 @@
                 <a:ea typeface="Times New Roman" pitchFamily="34" charset="-122"/>
                 <a:cs typeface="Times New Roman" pitchFamily="34" charset="-120"/>
               </a:rPr>
-              <a:t>1. Crop Farming</a:t>
+              <a:t>1. Farming</a:t>
             </a:r>
             <a:endParaRPr lang="en-US" sz="3600" dirty="0"/>
           </a:p>
@@ -14367,8 +14572,8 @@
         </p:nvSpPr>
         <p:spPr>
           <a:xfrm>
-            <a:off x="4069080" y="1783080"/>
-            <a:ext cx="7802575" cy="4663440"/>
+            <a:off x="5349240" y="1783080"/>
+            <a:ext cx="6522415" cy="4663440"/>
           </a:xfrm>
           <a:prstGeom prst="rect">
             <a:avLst/>
@@ -14395,16 +14600,17 @@
                 <a:ea typeface="Times New Roman" pitchFamily="34" charset="-122"/>
                 <a:cs typeface="Times New Roman" pitchFamily="34" charset="-120"/>
               </a:rPr>
-              <a:t>Crop farming in the savanna takes the following forms:</a:t>
+              <a:t>Farming in the savanna has the following forms:</a:t>
             </a:r>
             <a:endParaRPr lang="en-US" sz="4000" dirty="0"/>
           </a:p>
           <a:p>
-            <a:pPr algn="l" indent="0" marL="0">
+            <a:pPr algn="l" marL="342900" indent="-342900">
               <a:spcAft>
                 <a:spcPts val="800"/>
               </a:spcAft>
-              <a:buNone/>
+              <a:buSzPct val="100000"/>
+              <a:buChar char="•"/>
             </a:pPr>
             <a:r>
               <a:rPr lang="en-US" sz="4000" b="1" dirty="0">
@@ -14417,11 +14623,12 @@
               </a:rPr>
               <a:t>Food crops: </a:t>
             </a:r>
-            <a:pPr algn="l" indent="0" marL="0">
+            <a:pPr algn="l" marL="342900" indent="-342900">
               <a:spcAft>
                 <a:spcPts val="800"/>
               </a:spcAft>
-              <a:buNone/>
+              <a:buSzPct val="100000"/>
+              <a:buChar char="•"/>
             </a:pPr>
             <a:r>
               <a:rPr lang="en-US" sz="4000" dirty="0">
@@ -14432,44 +14639,7 @@
                 <a:ea typeface="Times New Roman" pitchFamily="34" charset="-122"/>
                 <a:cs typeface="Times New Roman" pitchFamily="34" charset="-120"/>
               </a:rPr>
-              <a:t>Farmers grow sorghum, millet and maize to feed their families.</a:t>
-            </a:r>
-            <a:endParaRPr lang="en-US" sz="4000" dirty="0"/>
-          </a:p>
-          <a:p>
-            <a:pPr algn="l" indent="0" marL="0">
-              <a:spcAft>
-                <a:spcPts val="800"/>
-              </a:spcAft>
-              <a:buNone/>
-            </a:pPr>
-            <a:r>
-              <a:rPr lang="en-US" sz="4000" b="1" dirty="0">
-                <a:solidFill>
-                  <a:srgbClr val="111111"/>
-                </a:solidFill>
-                <a:latin typeface="Times New Roman" pitchFamily="34" charset="0"/>
-                <a:ea typeface="Times New Roman" pitchFamily="34" charset="-122"/>
-                <a:cs typeface="Times New Roman" pitchFamily="34" charset="-120"/>
-              </a:rPr>
-              <a:t>Cash crops: </a:t>
-            </a:r>
-            <a:pPr algn="l" indent="0" marL="0">
-              <a:spcAft>
-                <a:spcPts val="800"/>
-              </a:spcAft>
-              <a:buNone/>
-            </a:pPr>
-            <a:r>
-              <a:rPr lang="en-US" sz="4000" dirty="0">
-                <a:solidFill>
-                  <a:srgbClr val="111111"/>
-                </a:solidFill>
-                <a:latin typeface="Times New Roman" pitchFamily="34" charset="0"/>
-                <a:ea typeface="Times New Roman" pitchFamily="34" charset="-122"/>
-                <a:cs typeface="Times New Roman" pitchFamily="34" charset="-120"/>
-              </a:rPr>
-              <a:t>Farmers grow cotton and sell it to SODECOTON.</a:t>
+              <a:t>Maize, sorghum, millet and groundnuts.</a:t>
             </a:r>
             <a:endParaRPr lang="en-US" sz="4000" dirty="0"/>
           </a:p>
@@ -14587,9 +14757,111 @@
           </a:p>
         </p:txBody>
       </p:sp>
+      <p:sp>
+        <p:nvSpPr>
+          <p:cNvPr id="3" name="Text 1"/>
+          <p:cNvSpPr/>
+          <p:nvPr/>
+        </p:nvSpPr>
+        <p:spPr>
+          <a:xfrm>
+            <a:off x="365760" y="1005840"/>
+            <a:ext cx="11460175" cy="731520"/>
+          </a:xfrm>
+          <a:prstGeom prst="rect">
+            <a:avLst/>
+          </a:prstGeom>
+          <a:noFill/>
+          <a:ln/>
+        </p:spPr>
+        <p:txBody>
+          <a:bodyPr wrap="square" lIns="0" tIns="0" rIns="0" bIns="0" rtlCol="0" anchor="ctr">
+            <a:normAutofit/>
+          </a:bodyPr>
+          <a:lstStyle/>
+          <a:p>
+            <a:pPr algn="ctr" indent="0" marL="0">
+              <a:buNone/>
+            </a:pPr>
+            <a:r>
+              <a:rPr lang="en-US" sz="3600" b="1" dirty="0">
+                <a:solidFill>
+                  <a:srgbClr val="990011"/>
+                </a:solidFill>
+                <a:latin typeface="Times New Roman" pitchFamily="34" charset="0"/>
+                <a:ea typeface="Times New Roman" pitchFamily="34" charset="-122"/>
+                <a:cs typeface="Times New Roman" pitchFamily="34" charset="-120"/>
+              </a:rPr>
+              <a:t>1. Farming</a:t>
+            </a:r>
+            <a:endParaRPr lang="en-US" sz="3600" dirty="0"/>
+          </a:p>
+        </p:txBody>
+      </p:sp>
+      <p:sp>
+        <p:nvSpPr>
+          <p:cNvPr id="4" name="Text 2"/>
+          <p:cNvSpPr/>
+          <p:nvPr/>
+        </p:nvSpPr>
+        <p:spPr>
+          <a:xfrm>
+            <a:off x="365760" y="1783080"/>
+            <a:ext cx="4846320" cy="4617720"/>
+          </a:xfrm>
+          <a:prstGeom prst="rect">
+            <a:avLst/>
+          </a:prstGeom>
+          <a:noFill/>
+          <a:ln/>
+        </p:spPr>
+        <p:txBody>
+          <a:bodyPr wrap="square" lIns="0" tIns="0" rIns="0" bIns="0" rtlCol="0" anchor="t"/>
+          <a:lstStyle/>
+          <a:p>
+            <a:pPr algn="l" marL="342900" indent="-342900">
+              <a:spcAft>
+                <a:spcPts val="800"/>
+              </a:spcAft>
+              <a:buSzPct val="100000"/>
+              <a:buChar char="•"/>
+            </a:pPr>
+            <a:r>
+              <a:rPr lang="en-US" sz="3600" b="1" dirty="0">
+                <a:solidFill>
+                  <a:srgbClr val="111111"/>
+                </a:solidFill>
+                <a:latin typeface="Times New Roman" pitchFamily="34" charset="0"/>
+                <a:ea typeface="Times New Roman" pitchFamily="34" charset="-122"/>
+                <a:cs typeface="Times New Roman" pitchFamily="34" charset="-120"/>
+              </a:rPr>
+              <a:t>Cash crops: </a:t>
+            </a:r>
+            <a:pPr algn="l" marL="342900" indent="-342900">
+              <a:spcAft>
+                <a:spcPts val="800"/>
+              </a:spcAft>
+              <a:buSzPct val="100000"/>
+              <a:buChar char="•"/>
+            </a:pPr>
+            <a:r>
+              <a:rPr lang="en-US" sz="3600" dirty="0">
+                <a:solidFill>
+                  <a:srgbClr val="111111"/>
+                </a:solidFill>
+                <a:latin typeface="Times New Roman" pitchFamily="34" charset="0"/>
+                <a:ea typeface="Times New Roman" pitchFamily="34" charset="-122"/>
+                <a:cs typeface="Times New Roman" pitchFamily="34" charset="-120"/>
+              </a:rPr>
+              <a:t>Cotton, bought by SODECOTON.</a:t>
+            </a:r>
+            <a:endParaRPr lang="en-US" sz="3600" dirty="0"/>
+          </a:p>
+        </p:txBody>
+      </p:sp>
       <p:pic>
         <p:nvPicPr>
-          <p:cNvPr id="3" name="Image 0" descr="/home/claude/f4/img/minesec_sheet.png">    </p:cNvPr>
+          <p:cNvPr id="5" name="Image 0" descr="/home/claude/f4/img/v2/f2t_cotton_harvest.jpg">    </p:cNvPr>
           <p:cNvPicPr>
             <a:picLocks noChangeAspect="1"/>
           </p:cNvPicPr>
@@ -14603,8 +14875,8 @@
         </p:blipFill>
         <p:spPr>
           <a:xfrm>
-            <a:off x="0" y="658368"/>
-            <a:ext cx="5120640" cy="5833872"/>
+            <a:off x="5349240" y="2069407"/>
+            <a:ext cx="6659575" cy="3697594"/>
           </a:xfrm>
           <a:prstGeom prst="rect">
             <a:avLst/>
@@ -14613,14 +14885,14 @@
       </p:pic>
       <p:sp>
         <p:nvSpPr>
-          <p:cNvPr id="4" name="Text 1"/>
+          <p:cNvPr id="6" name="Text 3"/>
           <p:cNvSpPr/>
           <p:nvPr/>
         </p:nvSpPr>
         <p:spPr>
           <a:xfrm>
-            <a:off x="5349240" y="1005840"/>
-            <a:ext cx="6522415" cy="731520"/>
+            <a:off x="5349240" y="6089904"/>
+            <a:ext cx="6659575" cy="347472"/>
           </a:xfrm>
           <a:prstGeom prst="rect">
             <a:avLst/>
@@ -14629,85 +14901,24 @@
           <a:ln/>
         </p:spPr>
         <p:txBody>
-          <a:bodyPr wrap="square" lIns="0" tIns="0" rIns="0" bIns="0" rtlCol="0" anchor="ctr">
-            <a:normAutofit/>
-          </a:bodyPr>
+          <a:bodyPr wrap="square" lIns="0" tIns="0" rIns="0" bIns="0" rtlCol="0" anchor="ctr"/>
           <a:lstStyle/>
           <a:p>
             <a:pPr algn="ctr" indent="0" marL="0">
               <a:buNone/>
             </a:pPr>
             <a:r>
-              <a:rPr lang="en-US" sz="3600" b="1" dirty="0">
-                <a:solidFill>
-                  <a:srgbClr val="990011"/>
+              <a:rPr lang="en-US" sz="1600" i="1" dirty="0">
+                <a:solidFill>
+                  <a:srgbClr val="555555"/>
                 </a:solidFill>
                 <a:latin typeface="Times New Roman" pitchFamily="34" charset="0"/>
                 <a:ea typeface="Times New Roman" pitchFamily="34" charset="-122"/>
                 <a:cs typeface="Times New Roman" pitchFamily="34" charset="-120"/>
               </a:rPr>
-              <a:t>1. Crop Farming (continued)</a:t>
-            </a:r>
-            <a:endParaRPr lang="en-US" sz="3600" dirty="0"/>
-          </a:p>
-        </p:txBody>
-      </p:sp>
-      <p:sp>
-        <p:nvSpPr>
-          <p:cNvPr id="5" name="Text 2"/>
-          <p:cNvSpPr/>
-          <p:nvPr/>
-        </p:nvSpPr>
-        <p:spPr>
-          <a:xfrm>
-            <a:off x="5349240" y="1783080"/>
-            <a:ext cx="6522415" cy="4663440"/>
-          </a:xfrm>
-          <a:prstGeom prst="rect">
-            <a:avLst/>
-          </a:prstGeom>
-          <a:noFill/>
-          <a:ln/>
-        </p:spPr>
-        <p:txBody>
-          <a:bodyPr wrap="square" lIns="0" tIns="0" rIns="0" bIns="0" rtlCol="0" anchor="t"/>
-          <a:lstStyle/>
-          <a:p>
-            <a:pPr algn="l" indent="0" marL="0">
-              <a:spcAft>
-                <a:spcPts val="800"/>
-              </a:spcAft>
-              <a:buNone/>
-            </a:pPr>
-            <a:r>
-              <a:rPr lang="en-US" sz="4000" b="1" dirty="0">
-                <a:solidFill>
-                  <a:srgbClr val="111111"/>
-                </a:solidFill>
-                <a:latin typeface="Times New Roman" pitchFamily="34" charset="0"/>
-                <a:ea typeface="Times New Roman" pitchFamily="34" charset="-122"/>
-                <a:cs typeface="Times New Roman" pitchFamily="34" charset="-120"/>
-              </a:rPr>
-              <a:t>Irrigated farming: </a:t>
-            </a:r>
-            <a:pPr algn="l" indent="0" marL="0">
-              <a:spcAft>
-                <a:spcPts val="800"/>
-              </a:spcAft>
-              <a:buNone/>
-            </a:pPr>
-            <a:r>
-              <a:rPr lang="en-US" sz="4000" dirty="0">
-                <a:solidFill>
-                  <a:srgbClr val="111111"/>
-                </a:solidFill>
-                <a:latin typeface="Times New Roman" pitchFamily="34" charset="0"/>
-                <a:ea typeface="Times New Roman" pitchFamily="34" charset="-122"/>
-                <a:cs typeface="Times New Roman" pitchFamily="34" charset="-120"/>
-              </a:rPr>
-              <a:t>Rice is grown with irrigation at Lagdo and Yagoua.</a:t>
-            </a:r>
-            <a:endParaRPr lang="en-US" sz="4000" dirty="0"/>
+              <a:t>Illustration: harvesting cotton</a:t>
+            </a:r>
+            <a:endParaRPr lang="en-US" sz="1600" dirty="0"/>
           </a:p>
         </p:txBody>
       </p:sp>
@@ -14823,9 +15034,111 @@
           </a:p>
         </p:txBody>
       </p:sp>
+      <p:sp>
+        <p:nvSpPr>
+          <p:cNvPr id="3" name="Text 1"/>
+          <p:cNvSpPr/>
+          <p:nvPr/>
+        </p:nvSpPr>
+        <p:spPr>
+          <a:xfrm>
+            <a:off x="365760" y="1005840"/>
+            <a:ext cx="11460175" cy="731520"/>
+          </a:xfrm>
+          <a:prstGeom prst="rect">
+            <a:avLst/>
+          </a:prstGeom>
+          <a:noFill/>
+          <a:ln/>
+        </p:spPr>
+        <p:txBody>
+          <a:bodyPr wrap="square" lIns="0" tIns="0" rIns="0" bIns="0" rtlCol="0" anchor="ctr">
+            <a:normAutofit/>
+          </a:bodyPr>
+          <a:lstStyle/>
+          <a:p>
+            <a:pPr algn="ctr" indent="0" marL="0">
+              <a:buNone/>
+            </a:pPr>
+            <a:r>
+              <a:rPr lang="en-US" sz="3600" b="1" dirty="0">
+                <a:solidFill>
+                  <a:srgbClr val="990011"/>
+                </a:solidFill>
+                <a:latin typeface="Times New Roman" pitchFamily="34" charset="0"/>
+                <a:ea typeface="Times New Roman" pitchFamily="34" charset="-122"/>
+                <a:cs typeface="Times New Roman" pitchFamily="34" charset="-120"/>
+              </a:rPr>
+              <a:t>1. Farming</a:t>
+            </a:r>
+            <a:endParaRPr lang="en-US" sz="3600" dirty="0"/>
+          </a:p>
+        </p:txBody>
+      </p:sp>
+      <p:sp>
+        <p:nvSpPr>
+          <p:cNvPr id="4" name="Text 2"/>
+          <p:cNvSpPr/>
+          <p:nvPr/>
+        </p:nvSpPr>
+        <p:spPr>
+          <a:xfrm>
+            <a:off x="365760" y="1783080"/>
+            <a:ext cx="4846320" cy="4617720"/>
+          </a:xfrm>
+          <a:prstGeom prst="rect">
+            <a:avLst/>
+          </a:prstGeom>
+          <a:noFill/>
+          <a:ln/>
+        </p:spPr>
+        <p:txBody>
+          <a:bodyPr wrap="square" lIns="0" tIns="0" rIns="0" bIns="0" rtlCol="0" anchor="t"/>
+          <a:lstStyle/>
+          <a:p>
+            <a:pPr algn="l" marL="342900" indent="-342900">
+              <a:spcAft>
+                <a:spcPts val="800"/>
+              </a:spcAft>
+              <a:buSzPct val="100000"/>
+              <a:buChar char="•"/>
+            </a:pPr>
+            <a:r>
+              <a:rPr lang="en-US" sz="3600" b="1" dirty="0">
+                <a:solidFill>
+                  <a:srgbClr val="111111"/>
+                </a:solidFill>
+                <a:latin typeface="Times New Roman" pitchFamily="34" charset="0"/>
+                <a:ea typeface="Times New Roman" pitchFamily="34" charset="-122"/>
+                <a:cs typeface="Times New Roman" pitchFamily="34" charset="-120"/>
+              </a:rPr>
+              <a:t>Irrigated farming: </a:t>
+            </a:r>
+            <a:pPr algn="l" marL="342900" indent="-342900">
+              <a:spcAft>
+                <a:spcPts val="800"/>
+              </a:spcAft>
+              <a:buSzPct val="100000"/>
+              <a:buChar char="•"/>
+            </a:pPr>
+            <a:r>
+              <a:rPr lang="en-US" sz="3600" dirty="0">
+                <a:solidFill>
+                  <a:srgbClr val="111111"/>
+                </a:solidFill>
+                <a:latin typeface="Times New Roman" pitchFamily="34" charset="0"/>
+                <a:ea typeface="Times New Roman" pitchFamily="34" charset="-122"/>
+                <a:cs typeface="Times New Roman" pitchFamily="34" charset="-120"/>
+              </a:rPr>
+              <a:t>Rice and onions near rivers and dams.</a:t>
+            </a:r>
+            <a:endParaRPr lang="en-US" sz="3600" dirty="0"/>
+          </a:p>
+        </p:txBody>
+      </p:sp>
       <p:pic>
         <p:nvPicPr>
-          <p:cNvPr id="3" name="Image 0" descr="/home/claude/f4/img/minesec_sheet.png">    </p:cNvPr>
+          <p:cNvPr id="5" name="Image 0" descr="/home/claude/f4/img/v2/f2t_rice_field.jpg">    </p:cNvPr>
           <p:cNvPicPr>
             <a:picLocks noChangeAspect="1"/>
           </p:cNvPicPr>
@@ -14839,8 +15152,8 @@
         </p:blipFill>
         <p:spPr>
           <a:xfrm>
-            <a:off x="0" y="658368"/>
-            <a:ext cx="3840480" cy="5833872"/>
+            <a:off x="5349240" y="2071212"/>
+            <a:ext cx="6659575" cy="3693983"/>
           </a:xfrm>
           <a:prstGeom prst="rect">
             <a:avLst/>
@@ -14849,14 +15162,14 @@
       </p:pic>
       <p:sp>
         <p:nvSpPr>
-          <p:cNvPr id="4" name="Text 1"/>
+          <p:cNvPr id="6" name="Text 3"/>
           <p:cNvSpPr/>
           <p:nvPr/>
         </p:nvSpPr>
         <p:spPr>
           <a:xfrm>
-            <a:off x="4069080" y="1005840"/>
-            <a:ext cx="7802575" cy="731520"/>
+            <a:off x="5349240" y="6089904"/>
+            <a:ext cx="6659575" cy="347472"/>
           </a:xfrm>
           <a:prstGeom prst="rect">
             <a:avLst/>
@@ -14865,142 +15178,24 @@
           <a:ln/>
         </p:spPr>
         <p:txBody>
-          <a:bodyPr wrap="square" lIns="0" tIns="0" rIns="0" bIns="0" rtlCol="0" anchor="ctr">
-            <a:normAutofit/>
-          </a:bodyPr>
+          <a:bodyPr wrap="square" lIns="0" tIns="0" rIns="0" bIns="0" rtlCol="0" anchor="ctr"/>
           <a:lstStyle/>
           <a:p>
             <a:pPr algn="ctr" indent="0" marL="0">
               <a:buNone/>
             </a:pPr>
             <a:r>
-              <a:rPr lang="en-US" sz="3600" b="1" dirty="0">
-                <a:solidFill>
-                  <a:srgbClr val="990011"/>
+              <a:rPr lang="en-US" sz="1600" i="1" dirty="0">
+                <a:solidFill>
+                  <a:srgbClr val="555555"/>
                 </a:solidFill>
                 <a:latin typeface="Times New Roman" pitchFamily="34" charset="0"/>
                 <a:ea typeface="Times New Roman" pitchFamily="34" charset="-122"/>
                 <a:cs typeface="Times New Roman" pitchFamily="34" charset="-120"/>
               </a:rPr>
-              <a:t>2. Livestock Rearing</a:t>
-            </a:r>
-            <a:endParaRPr lang="en-US" sz="3600" dirty="0"/>
-          </a:p>
-        </p:txBody>
-      </p:sp>
-      <p:sp>
-        <p:nvSpPr>
-          <p:cNvPr id="5" name="Text 2"/>
-          <p:cNvSpPr/>
-          <p:nvPr/>
-        </p:nvSpPr>
-        <p:spPr>
-          <a:xfrm>
-            <a:off x="4069080" y="1783080"/>
-            <a:ext cx="7802575" cy="4663440"/>
-          </a:xfrm>
-          <a:prstGeom prst="rect">
-            <a:avLst/>
-          </a:prstGeom>
-          <a:noFill/>
-          <a:ln/>
-        </p:spPr>
-        <p:txBody>
-          <a:bodyPr wrap="square" lIns="0" tIns="0" rIns="0" bIns="0" rtlCol="0" anchor="t"/>
-          <a:lstStyle/>
-          <a:p>
-            <a:pPr algn="l" indent="0" marL="0">
-              <a:spcAft>
-                <a:spcPts val="800"/>
-              </a:spcAft>
-              <a:buNone/>
-            </a:pPr>
-            <a:r>
-              <a:rPr lang="en-US" sz="4000" i="1" dirty="0">
-                <a:solidFill>
-                  <a:srgbClr val="111111"/>
-                </a:solidFill>
-                <a:latin typeface="Times New Roman" pitchFamily="34" charset="0"/>
-                <a:ea typeface="Times New Roman" pitchFamily="34" charset="-122"/>
-                <a:cs typeface="Times New Roman" pitchFamily="34" charset="-120"/>
-              </a:rPr>
-              <a:t>Herders rear animals in three ways:</a:t>
-            </a:r>
-            <a:endParaRPr lang="en-US" sz="4000" dirty="0"/>
-          </a:p>
-          <a:p>
-            <a:pPr algn="l" indent="0" marL="0">
-              <a:spcAft>
-                <a:spcPts val="800"/>
-              </a:spcAft>
-              <a:buNone/>
-            </a:pPr>
-            <a:r>
-              <a:rPr lang="en-US" sz="4000" b="1" dirty="0">
-                <a:solidFill>
-                  <a:srgbClr val="111111"/>
-                </a:solidFill>
-                <a:latin typeface="Times New Roman" pitchFamily="34" charset="0"/>
-                <a:ea typeface="Times New Roman" pitchFamily="34" charset="-122"/>
-                <a:cs typeface="Times New Roman" pitchFamily="34" charset="-120"/>
-              </a:rPr>
-              <a:t>Nomadic herding: </a:t>
-            </a:r>
-            <a:pPr algn="l" indent="0" marL="0">
-              <a:spcAft>
-                <a:spcPts val="800"/>
-              </a:spcAft>
-              <a:buNone/>
-            </a:pPr>
-            <a:r>
-              <a:rPr lang="en-US" sz="4000" dirty="0">
-                <a:solidFill>
-                  <a:srgbClr val="111111"/>
-                </a:solidFill>
-                <a:latin typeface="Times New Roman" pitchFamily="34" charset="0"/>
-                <a:ea typeface="Times New Roman" pitchFamily="34" charset="-122"/>
-                <a:cs typeface="Times New Roman" pitchFamily="34" charset="-120"/>
-              </a:rPr>
-              <a:t>Herders move from place to place with their animals.</a:t>
-            </a:r>
-            <a:endParaRPr lang="en-US" sz="4000" dirty="0"/>
-          </a:p>
-          <a:p>
-            <a:pPr algn="l" indent="0" marL="0">
-              <a:spcAft>
-                <a:spcPts val="800"/>
-              </a:spcAft>
-              <a:buNone/>
-            </a:pPr>
-            <a:r>
-              <a:rPr lang="en-US" sz="4000" b="1" dirty="0">
-                <a:solidFill>
-                  <a:srgbClr val="111111"/>
-                </a:solidFill>
-                <a:latin typeface="Times New Roman" pitchFamily="34" charset="0"/>
-                <a:ea typeface="Times New Roman" pitchFamily="34" charset="-122"/>
-                <a:cs typeface="Times New Roman" pitchFamily="34" charset="-120"/>
-              </a:rPr>
-              <a:t>Transhumance: </a:t>
-            </a:r>
-            <a:pPr algn="l" indent="0" marL="0">
-              <a:spcAft>
-                <a:spcPts val="800"/>
-              </a:spcAft>
-              <a:buNone/>
-            </a:pPr>
-            <a:r>
-              <a:rPr lang="en-US" sz="4000" dirty="0">
-                <a:solidFill>
-                  <a:srgbClr val="111111"/>
-                </a:solidFill>
-                <a:latin typeface="Times New Roman" pitchFamily="34" charset="0"/>
-                <a:ea typeface="Times New Roman" pitchFamily="34" charset="-122"/>
-                <a:cs typeface="Times New Roman" pitchFamily="34" charset="-120"/>
-              </a:rPr>
-              <a:t>Herders move south in the dry season and come back in the wet season.</a:t>
-            </a:r>
-            <a:endParaRPr lang="en-US" sz="4000" dirty="0"/>
+              <a:t>Illustration: a rice field</a:t>
+            </a:r>
+            <a:endParaRPr lang="en-US" sz="1600" dirty="0"/>
           </a:p>
         </p:txBody>
       </p:sp>
@@ -15414,7 +15609,7 @@
                 <a:ea typeface="Times New Roman" pitchFamily="34" charset="-122"/>
                 <a:cs typeface="Times New Roman" pitchFamily="34" charset="-120"/>
               </a:rPr>
-              <a:t>2. Livestock Rearing (continued)</a:t>
+              <a:t>2. Livestock Rearing</a:t>
             </a:r>
             <a:endParaRPr lang="en-US" sz="3600" dirty="0"/>
           </a:p>
@@ -15448,7 +15643,7 @@
               <a:buNone/>
             </a:pPr>
             <a:r>
-              <a:rPr lang="en-US" sz="4000" b="1" dirty="0">
+              <a:rPr lang="en-US" sz="4000" i="1" dirty="0">
                 <a:solidFill>
                   <a:srgbClr val="111111"/>
                 </a:solidFill>
@@ -15456,16 +15651,20 @@
                 <a:ea typeface="Times New Roman" pitchFamily="34" charset="-122"/>
                 <a:cs typeface="Times New Roman" pitchFamily="34" charset="-120"/>
               </a:rPr>
-              <a:t>Ranching: </a:t>
-            </a:r>
-            <a:pPr algn="l" indent="0" marL="0">
+              <a:t>Livestock rearing has the following forms:</a:t>
+            </a:r>
+            <a:endParaRPr lang="en-US" sz="4000" dirty="0"/>
+          </a:p>
+          <a:p>
+            <a:pPr algn="l" marL="342900" indent="-342900">
               <a:spcAft>
                 <a:spcPts val="800"/>
               </a:spcAft>
-              <a:buNone/>
+              <a:buSzPct val="100000"/>
+              <a:buChar char="•"/>
             </a:pPr>
             <a:r>
-              <a:rPr lang="en-US" sz="4000" dirty="0">
+              <a:rPr lang="en-US" sz="4000" b="1" dirty="0">
                 <a:solidFill>
                   <a:srgbClr val="111111"/>
                 </a:solidFill>
@@ -15473,7 +15672,25 @@
                 <a:ea typeface="Times New Roman" pitchFamily="34" charset="-122"/>
                 <a:cs typeface="Times New Roman" pitchFamily="34" charset="-120"/>
               </a:rPr>
-              <a:t>Cattle are kept on large farms, as on the Adamawa plateau.</a:t>
+              <a:t>Nomadic pastoralism: </a:t>
+            </a:r>
+            <a:pPr algn="l" marL="342900" indent="-342900">
+              <a:spcAft>
+                <a:spcPts val="800"/>
+              </a:spcAft>
+              <a:buSzPct val="100000"/>
+              <a:buChar char="•"/>
+            </a:pPr>
+            <a:r>
+              <a:rPr lang="en-US" sz="4000" dirty="0">
+                <a:solidFill>
+                  <a:srgbClr val="111111"/>
+                </a:solidFill>
+                <a:latin typeface="Times New Roman" pitchFamily="34" charset="0"/>
+                <a:ea typeface="Times New Roman" pitchFamily="34" charset="-122"/>
+                <a:cs typeface="Times New Roman" pitchFamily="34" charset="-120"/>
+              </a:rPr>
+              <a:t>Herders move all the time with their animals.</a:t>
             </a:r>
             <a:endParaRPr lang="en-US" sz="4000" dirty="0"/>
           </a:p>
@@ -15591,9 +15808,111 @@
           </a:p>
         </p:txBody>
       </p:sp>
+      <p:sp>
+        <p:nvSpPr>
+          <p:cNvPr id="3" name="Text 1"/>
+          <p:cNvSpPr/>
+          <p:nvPr/>
+        </p:nvSpPr>
+        <p:spPr>
+          <a:xfrm>
+            <a:off x="365760" y="1005840"/>
+            <a:ext cx="11460175" cy="731520"/>
+          </a:xfrm>
+          <a:prstGeom prst="rect">
+            <a:avLst/>
+          </a:prstGeom>
+          <a:noFill/>
+          <a:ln/>
+        </p:spPr>
+        <p:txBody>
+          <a:bodyPr wrap="square" lIns="0" tIns="0" rIns="0" bIns="0" rtlCol="0" anchor="ctr">
+            <a:normAutofit/>
+          </a:bodyPr>
+          <a:lstStyle/>
+          <a:p>
+            <a:pPr algn="ctr" indent="0" marL="0">
+              <a:buNone/>
+            </a:pPr>
+            <a:r>
+              <a:rPr lang="en-US" sz="3600" b="1" dirty="0">
+                <a:solidFill>
+                  <a:srgbClr val="990011"/>
+                </a:solidFill>
+                <a:latin typeface="Times New Roman" pitchFamily="34" charset="0"/>
+                <a:ea typeface="Times New Roman" pitchFamily="34" charset="-122"/>
+                <a:cs typeface="Times New Roman" pitchFamily="34" charset="-120"/>
+              </a:rPr>
+              <a:t>2. Livestock Rearing</a:t>
+            </a:r>
+            <a:endParaRPr lang="en-US" sz="3600" dirty="0"/>
+          </a:p>
+        </p:txBody>
+      </p:sp>
+      <p:sp>
+        <p:nvSpPr>
+          <p:cNvPr id="4" name="Text 2"/>
+          <p:cNvSpPr/>
+          <p:nvPr/>
+        </p:nvSpPr>
+        <p:spPr>
+          <a:xfrm>
+            <a:off x="365760" y="1783080"/>
+            <a:ext cx="4846320" cy="4617720"/>
+          </a:xfrm>
+          <a:prstGeom prst="rect">
+            <a:avLst/>
+          </a:prstGeom>
+          <a:noFill/>
+          <a:ln/>
+        </p:spPr>
+        <p:txBody>
+          <a:bodyPr wrap="square" lIns="0" tIns="0" rIns="0" bIns="0" rtlCol="0" anchor="t"/>
+          <a:lstStyle/>
+          <a:p>
+            <a:pPr algn="l" marL="342900" indent="-342900">
+              <a:spcAft>
+                <a:spcPts val="800"/>
+              </a:spcAft>
+              <a:buSzPct val="100000"/>
+              <a:buChar char="•"/>
+            </a:pPr>
+            <a:r>
+              <a:rPr lang="en-US" sz="3600" b="1" dirty="0">
+                <a:solidFill>
+                  <a:srgbClr val="111111"/>
+                </a:solidFill>
+                <a:latin typeface="Times New Roman" pitchFamily="34" charset="0"/>
+                <a:ea typeface="Times New Roman" pitchFamily="34" charset="-122"/>
+                <a:cs typeface="Times New Roman" pitchFamily="34" charset="-120"/>
+              </a:rPr>
+              <a:t>Transhumance: </a:t>
+            </a:r>
+            <a:pPr algn="l" marL="342900" indent="-342900">
+              <a:spcAft>
+                <a:spcPts val="800"/>
+              </a:spcAft>
+              <a:buSzPct val="100000"/>
+              <a:buChar char="•"/>
+            </a:pPr>
+            <a:r>
+              <a:rPr lang="en-US" sz="3600" dirty="0">
+                <a:solidFill>
+                  <a:srgbClr val="111111"/>
+                </a:solidFill>
+                <a:latin typeface="Times New Roman" pitchFamily="34" charset="0"/>
+                <a:ea typeface="Times New Roman" pitchFamily="34" charset="-122"/>
+                <a:cs typeface="Times New Roman" pitchFamily="34" charset="-120"/>
+              </a:rPr>
+              <a:t>Herders move south in the dry season and return in the rainy season.</a:t>
+            </a:r>
+            <a:endParaRPr lang="en-US" sz="3600" dirty="0"/>
+          </a:p>
+        </p:txBody>
+      </p:sp>
       <p:pic>
         <p:nvPicPr>
-          <p:cNvPr id="3" name="Image 0" descr="/home/claude/f4/img/minesec_sheet.png">    </p:cNvPr>
+          <p:cNvPr id="5" name="Image 0" descr="/home/claude/f4/img/v2/transhumance_mid.png">    </p:cNvPr>
           <p:cNvPicPr>
             <a:picLocks noChangeAspect="1"/>
           </p:cNvPicPr>
@@ -15607,8 +15926,8 @@
         </p:blipFill>
         <p:spPr>
           <a:xfrm>
-            <a:off x="0" y="658368"/>
-            <a:ext cx="5120640" cy="5833872"/>
+            <a:off x="5349240" y="2617506"/>
+            <a:ext cx="6659575" cy="2601397"/>
           </a:xfrm>
           <a:prstGeom prst="rect">
             <a:avLst/>
@@ -15617,14 +15936,14 @@
       </p:pic>
       <p:sp>
         <p:nvSpPr>
-          <p:cNvPr id="4" name="Text 1"/>
+          <p:cNvPr id="6" name="Text 3"/>
           <p:cNvSpPr/>
           <p:nvPr/>
         </p:nvSpPr>
         <p:spPr>
           <a:xfrm>
-            <a:off x="5349240" y="1005840"/>
-            <a:ext cx="6522415" cy="731520"/>
+            <a:off x="5349240" y="6089904"/>
+            <a:ext cx="6659575" cy="347472"/>
           </a:xfrm>
           <a:prstGeom prst="rect">
             <a:avLst/>
@@ -15633,142 +15952,24 @@
           <a:ln/>
         </p:spPr>
         <p:txBody>
-          <a:bodyPr wrap="square" lIns="0" tIns="0" rIns="0" bIns="0" rtlCol="0" anchor="ctr">
-            <a:normAutofit/>
-          </a:bodyPr>
+          <a:bodyPr wrap="square" lIns="0" tIns="0" rIns="0" bIns="0" rtlCol="0" anchor="ctr"/>
           <a:lstStyle/>
           <a:p>
             <a:pPr algn="ctr" indent="0" marL="0">
               <a:buNone/>
             </a:pPr>
             <a:r>
-              <a:rPr lang="en-US" sz="3600" b="1" dirty="0">
-                <a:solidFill>
-                  <a:srgbClr val="990011"/>
+              <a:rPr lang="en-US" sz="1600" i="1" dirty="0">
+                <a:solidFill>
+                  <a:srgbClr val="555555"/>
                 </a:solidFill>
                 <a:latin typeface="Times New Roman" pitchFamily="34" charset="0"/>
                 <a:ea typeface="Times New Roman" pitchFamily="34" charset="-122"/>
                 <a:cs typeface="Times New Roman" pitchFamily="34" charset="-120"/>
               </a:rPr>
-              <a:t>3. Other Activities</a:t>
-            </a:r>
-            <a:endParaRPr lang="en-US" sz="3600" dirty="0"/>
-          </a:p>
-        </p:txBody>
-      </p:sp>
-      <p:sp>
-        <p:nvSpPr>
-          <p:cNvPr id="5" name="Text 2"/>
-          <p:cNvSpPr/>
-          <p:nvPr/>
-        </p:nvSpPr>
-        <p:spPr>
-          <a:xfrm>
-            <a:off x="5349240" y="1783080"/>
-            <a:ext cx="6522415" cy="4663440"/>
-          </a:xfrm>
-          <a:prstGeom prst="rect">
-            <a:avLst/>
-          </a:prstGeom>
-          <a:noFill/>
-          <a:ln/>
-        </p:spPr>
-        <p:txBody>
-          <a:bodyPr wrap="square" lIns="0" tIns="0" rIns="0" bIns="0" rtlCol="0" anchor="t"/>
-          <a:lstStyle/>
-          <a:p>
-            <a:pPr algn="l" indent="0" marL="0">
-              <a:spcAft>
-                <a:spcPts val="800"/>
-              </a:spcAft>
-              <a:buNone/>
-            </a:pPr>
-            <a:r>
-              <a:rPr lang="en-US" sz="4000" i="1" dirty="0">
-                <a:solidFill>
-                  <a:srgbClr val="111111"/>
-                </a:solidFill>
-                <a:latin typeface="Times New Roman" pitchFamily="34" charset="0"/>
-                <a:ea typeface="Times New Roman" pitchFamily="34" charset="-122"/>
-                <a:cs typeface="Times New Roman" pitchFamily="34" charset="-120"/>
-              </a:rPr>
-              <a:t>People also carry out the following activities:</a:t>
-            </a:r>
-            <a:endParaRPr lang="en-US" sz="4000" dirty="0"/>
-          </a:p>
-          <a:p>
-            <a:pPr algn="l" indent="0" marL="0">
-              <a:spcAft>
-                <a:spcPts val="800"/>
-              </a:spcAft>
-              <a:buNone/>
-            </a:pPr>
-            <a:r>
-              <a:rPr lang="en-US" sz="4000" b="1" dirty="0">
-                <a:solidFill>
-                  <a:srgbClr val="111111"/>
-                </a:solidFill>
-                <a:latin typeface="Times New Roman" pitchFamily="34" charset="0"/>
-                <a:ea typeface="Times New Roman" pitchFamily="34" charset="-122"/>
-                <a:cs typeface="Times New Roman" pitchFamily="34" charset="-120"/>
-              </a:rPr>
-              <a:t>Fishing: </a:t>
-            </a:r>
-            <a:pPr algn="l" indent="0" marL="0">
-              <a:spcAft>
-                <a:spcPts val="800"/>
-              </a:spcAft>
-              <a:buNone/>
-            </a:pPr>
-            <a:r>
-              <a:rPr lang="en-US" sz="4000" dirty="0">
-                <a:solidFill>
-                  <a:srgbClr val="111111"/>
-                </a:solidFill>
-                <a:latin typeface="Times New Roman" pitchFamily="34" charset="0"/>
-                <a:ea typeface="Times New Roman" pitchFamily="34" charset="-122"/>
-                <a:cs typeface="Times New Roman" pitchFamily="34" charset="-120"/>
-              </a:rPr>
-              <a:t>People fish in the Lagdo lake and the Benue.</a:t>
-            </a:r>
-            <a:endParaRPr lang="en-US" sz="4000" dirty="0"/>
-          </a:p>
-          <a:p>
-            <a:pPr algn="l" indent="0" marL="0">
-              <a:spcAft>
-                <a:spcPts val="800"/>
-              </a:spcAft>
-              <a:buNone/>
-            </a:pPr>
-            <a:r>
-              <a:rPr lang="en-US" sz="4000" b="1" dirty="0">
-                <a:solidFill>
-                  <a:srgbClr val="111111"/>
-                </a:solidFill>
-                <a:latin typeface="Times New Roman" pitchFamily="34" charset="0"/>
-                <a:ea typeface="Times New Roman" pitchFamily="34" charset="-122"/>
-                <a:cs typeface="Times New Roman" pitchFamily="34" charset="-120"/>
-              </a:rPr>
-              <a:t>Tourism: </a:t>
-            </a:r>
-            <a:pPr algn="l" indent="0" marL="0">
-              <a:spcAft>
-                <a:spcPts val="800"/>
-              </a:spcAft>
-              <a:buNone/>
-            </a:pPr>
-            <a:r>
-              <a:rPr lang="en-US" sz="4000" dirty="0">
-                <a:solidFill>
-                  <a:srgbClr val="111111"/>
-                </a:solidFill>
-                <a:latin typeface="Times New Roman" pitchFamily="34" charset="0"/>
-                <a:ea typeface="Times New Roman" pitchFamily="34" charset="-122"/>
-                <a:cs typeface="Times New Roman" pitchFamily="34" charset="-120"/>
-              </a:rPr>
-              <a:t>Tourists visit national parks such as the Benue and Waza.</a:t>
-            </a:r>
-            <a:endParaRPr lang="en-US" sz="4000" dirty="0"/>
+              <a:t>Illustration: transhumance</a:t>
+            </a:r>
+            <a:endParaRPr lang="en-US" sz="1600" dirty="0"/>
           </a:p>
         </p:txBody>
       </p:sp>
@@ -15943,7 +16144,7 @@
                 <a:ea typeface="Times New Roman" pitchFamily="34" charset="-122"/>
                 <a:cs typeface="Times New Roman" pitchFamily="34" charset="-120"/>
               </a:rPr>
-              <a:t>3. Other Activities (continued)</a:t>
+              <a:t>2. Livestock Rearing</a:t>
             </a:r>
             <a:endParaRPr lang="en-US" sz="3600" dirty="0"/>
           </a:p>
@@ -15970,11 +16171,12 @@
           <a:bodyPr wrap="square" lIns="0" tIns="0" rIns="0" bIns="0" rtlCol="0" anchor="t"/>
           <a:lstStyle/>
           <a:p>
-            <a:pPr algn="l" indent="0" marL="0">
+            <a:pPr algn="l" marL="342900" indent="-342900">
               <a:spcAft>
                 <a:spcPts val="800"/>
               </a:spcAft>
-              <a:buNone/>
+              <a:buSzPct val="100000"/>
+              <a:buChar char="•"/>
             </a:pPr>
             <a:r>
               <a:rPr lang="en-US" sz="4000" b="1" dirty="0">
@@ -15985,13 +16187,14 @@
                 <a:ea typeface="Times New Roman" pitchFamily="34" charset="-122"/>
                 <a:cs typeface="Times New Roman" pitchFamily="34" charset="-120"/>
               </a:rPr>
-              <a:t>Hunting: </a:t>
-            </a:r>
-            <a:pPr algn="l" indent="0" marL="0">
+              <a:t>Ranching: </a:t>
+            </a:r>
+            <a:pPr algn="l" marL="342900" indent="-342900">
               <a:spcAft>
                 <a:spcPts val="800"/>
               </a:spcAft>
-              <a:buNone/>
+              <a:buSzPct val="100000"/>
+              <a:buChar char="•"/>
             </a:pPr>
             <a:r>
               <a:rPr lang="en-US" sz="4000" dirty="0">
@@ -16002,7 +16205,7 @@
                 <a:ea typeface="Times New Roman" pitchFamily="34" charset="-122"/>
                 <a:cs typeface="Times New Roman" pitchFamily="34" charset="-120"/>
               </a:rPr>
-              <a:t>People hunt in authorised hunting zones.</a:t>
+              <a:t>Animals are reared on large, fenced farms.</a:t>
             </a:r>
             <a:endParaRPr lang="en-US" sz="4000" dirty="0"/>
           </a:p>
@@ -16114,7 +16317,7 @@
                 <a:ea typeface="Calibri" pitchFamily="34" charset="-122"/>
                 <a:cs typeface="Calibri" pitchFamily="34" charset="-120"/>
               </a:rPr>
-              <a:t>FORMATIVE EVALUATION</a:t>
+              <a:t>BOARD SUMMARY</a:t>
             </a:r>
             <a:endParaRPr lang="en-US" sz="1400" dirty="0"/>
           </a:p>
@@ -16179,7 +16382,7 @@
                 <a:ea typeface="Times New Roman" pitchFamily="34" charset="-122"/>
                 <a:cs typeface="Times New Roman" pitchFamily="34" charset="-120"/>
               </a:rPr>
-              <a:t>Evaluation 1</a:t>
+              <a:t>3. Other Activities</a:t>
             </a:r>
             <a:endParaRPr lang="en-US" sz="3600" dirty="0"/>
           </a:p>
@@ -16213,7 +16416,7 @@
               <a:buNone/>
             </a:pPr>
             <a:r>
-              <a:rPr lang="en-US" sz="4000" dirty="0">
+              <a:rPr lang="en-US" sz="4000" i="1" dirty="0">
                 <a:solidFill>
                   <a:srgbClr val="111111"/>
                 </a:solidFill>
@@ -16221,7 +16424,46 @@
                 <a:ea typeface="Times New Roman" pitchFamily="34" charset="-122"/>
                 <a:cs typeface="Times New Roman" pitchFamily="34" charset="-120"/>
               </a:rPr>
-              <a:t>What is the difference between a food crop and a cash crop?</a:t>
+              <a:t>People also carry out the following activities:</a:t>
+            </a:r>
+            <a:endParaRPr lang="en-US" sz="4000" dirty="0"/>
+          </a:p>
+          <a:p>
+            <a:pPr algn="l" marL="342900" indent="-342900">
+              <a:spcAft>
+                <a:spcPts val="800"/>
+              </a:spcAft>
+              <a:buSzPct val="100000"/>
+              <a:buChar char="•"/>
+            </a:pPr>
+            <a:r>
+              <a:rPr lang="en-US" sz="4000" b="1" dirty="0">
+                <a:solidFill>
+                  <a:srgbClr val="111111"/>
+                </a:solidFill>
+                <a:latin typeface="Times New Roman" pitchFamily="34" charset="0"/>
+                <a:ea typeface="Times New Roman" pitchFamily="34" charset="-122"/>
+                <a:cs typeface="Times New Roman" pitchFamily="34" charset="-120"/>
+              </a:rPr>
+              <a:t>Hunting: </a:t>
+            </a:r>
+            <a:pPr algn="l" marL="342900" indent="-342900">
+              <a:spcAft>
+                <a:spcPts val="800"/>
+              </a:spcAft>
+              <a:buSzPct val="100000"/>
+              <a:buChar char="•"/>
+            </a:pPr>
+            <a:r>
+              <a:rPr lang="en-US" sz="4000" dirty="0">
+                <a:solidFill>
+                  <a:srgbClr val="111111"/>
+                </a:solidFill>
+                <a:latin typeface="Times New Roman" pitchFamily="34" charset="0"/>
+                <a:ea typeface="Times New Roman" pitchFamily="34" charset="-122"/>
+                <a:cs typeface="Times New Roman" pitchFamily="34" charset="-120"/>
+              </a:rPr>
+              <a:t>Controlled hunting in hunting zones.</a:t>
             </a:r>
             <a:endParaRPr lang="en-US" sz="4000" dirty="0"/>
           </a:p>
@@ -16333,15 +16575,117 @@
                 <a:ea typeface="Calibri" pitchFamily="34" charset="-122"/>
                 <a:cs typeface="Calibri" pitchFamily="34" charset="-120"/>
               </a:rPr>
-              <a:t>FORMATIVE EVALUATION</a:t>
+              <a:t>BOARD SUMMARY</a:t>
             </a:r>
             <a:endParaRPr lang="en-US" sz="1400" dirty="0"/>
+          </a:p>
+        </p:txBody>
+      </p:sp>
+      <p:sp>
+        <p:nvSpPr>
+          <p:cNvPr id="3" name="Text 1"/>
+          <p:cNvSpPr/>
+          <p:nvPr/>
+        </p:nvSpPr>
+        <p:spPr>
+          <a:xfrm>
+            <a:off x="365760" y="1005840"/>
+            <a:ext cx="11460175" cy="731520"/>
+          </a:xfrm>
+          <a:prstGeom prst="rect">
+            <a:avLst/>
+          </a:prstGeom>
+          <a:noFill/>
+          <a:ln/>
+        </p:spPr>
+        <p:txBody>
+          <a:bodyPr wrap="square" lIns="0" tIns="0" rIns="0" bIns="0" rtlCol="0" anchor="ctr">
+            <a:normAutofit/>
+          </a:bodyPr>
+          <a:lstStyle/>
+          <a:p>
+            <a:pPr algn="ctr" indent="0" marL="0">
+              <a:buNone/>
+            </a:pPr>
+            <a:r>
+              <a:rPr lang="en-US" sz="3600" b="1" dirty="0">
+                <a:solidFill>
+                  <a:srgbClr val="990011"/>
+                </a:solidFill>
+                <a:latin typeface="Times New Roman" pitchFamily="34" charset="0"/>
+                <a:ea typeface="Times New Roman" pitchFamily="34" charset="-122"/>
+                <a:cs typeface="Times New Roman" pitchFamily="34" charset="-120"/>
+              </a:rPr>
+              <a:t>3. Other Activities</a:t>
+            </a:r>
+            <a:endParaRPr lang="en-US" sz="3600" dirty="0"/>
+          </a:p>
+        </p:txBody>
+      </p:sp>
+      <p:sp>
+        <p:nvSpPr>
+          <p:cNvPr id="4" name="Text 2"/>
+          <p:cNvSpPr/>
+          <p:nvPr/>
+        </p:nvSpPr>
+        <p:spPr>
+          <a:xfrm>
+            <a:off x="365760" y="1783080"/>
+            <a:ext cx="4846320" cy="4617720"/>
+          </a:xfrm>
+          <a:prstGeom prst="rect">
+            <a:avLst/>
+          </a:prstGeom>
+          <a:noFill/>
+          <a:ln/>
+        </p:spPr>
+        <p:txBody>
+          <a:bodyPr wrap="square" lIns="0" tIns="0" rIns="0" bIns="0" rtlCol="0" anchor="t"/>
+          <a:lstStyle/>
+          <a:p>
+            <a:pPr algn="l" marL="342900" indent="-342900">
+              <a:spcAft>
+                <a:spcPts val="800"/>
+              </a:spcAft>
+              <a:buSzPct val="100000"/>
+              <a:buChar char="•"/>
+            </a:pPr>
+            <a:r>
+              <a:rPr lang="en-US" sz="3600" b="1" dirty="0">
+                <a:solidFill>
+                  <a:srgbClr val="111111"/>
+                </a:solidFill>
+                <a:latin typeface="Times New Roman" pitchFamily="34" charset="0"/>
+                <a:ea typeface="Times New Roman" pitchFamily="34" charset="-122"/>
+                <a:cs typeface="Times New Roman" pitchFamily="34" charset="-120"/>
+              </a:rPr>
+              <a:t>Fishing: </a:t>
+            </a:r>
+            <a:pPr algn="l" marL="342900" indent="-342900">
+              <a:spcAft>
+                <a:spcPts val="800"/>
+              </a:spcAft>
+              <a:buSzPct val="100000"/>
+              <a:buChar char="•"/>
+            </a:pPr>
+            <a:r>
+              <a:rPr lang="en-US" sz="3600" dirty="0">
+                <a:solidFill>
+                  <a:srgbClr val="111111"/>
+                </a:solidFill>
+                <a:latin typeface="Times New Roman" pitchFamily="34" charset="0"/>
+                <a:ea typeface="Times New Roman" pitchFamily="34" charset="-122"/>
+                <a:cs typeface="Times New Roman" pitchFamily="34" charset="-120"/>
+              </a:rPr>
+              <a:t>In the Benue and the Lagdo lake.</a:t>
+            </a:r>
+            <a:endParaRPr lang="en-US" sz="3600" dirty="0"/>
           </a:p>
         </p:txBody>
       </p:sp>
       <p:pic>
         <p:nvPicPr>
-          <p:cNvPr id="3" name="Image 0" descr="/home/claude/f4/img/minesec_sheet.png">    </p:cNvPr>
+          <p:cNvPr id="5" name="Image 0" descr="/home/claude/f4/img/v2/f2t_fishing.jpg">    </p:cNvPr>
           <p:cNvPicPr>
             <a:picLocks noChangeAspect="1"/>
           </p:cNvPicPr>
@@ -16355,8 +16699,8 @@
         </p:blipFill>
         <p:spPr>
           <a:xfrm>
-            <a:off x="0" y="658368"/>
-            <a:ext cx="5120640" cy="5833872"/>
+            <a:off x="5349240" y="2071212"/>
+            <a:ext cx="6659575" cy="3693983"/>
           </a:xfrm>
           <a:prstGeom prst="rect">
             <a:avLst/>
@@ -16365,14 +16709,14 @@
       </p:pic>
       <p:sp>
         <p:nvSpPr>
-          <p:cNvPr id="4" name="Text 1"/>
+          <p:cNvPr id="6" name="Text 3"/>
           <p:cNvSpPr/>
           <p:nvPr/>
         </p:nvSpPr>
         <p:spPr>
           <a:xfrm>
-            <a:off x="5349240" y="1005840"/>
-            <a:ext cx="6522415" cy="731520"/>
+            <a:off x="5349240" y="6089904"/>
+            <a:ext cx="6659575" cy="347472"/>
           </a:xfrm>
           <a:prstGeom prst="rect">
             <a:avLst/>
@@ -16381,68 +16725,24 @@
           <a:ln/>
         </p:spPr>
         <p:txBody>
-          <a:bodyPr wrap="square" lIns="0" tIns="0" rIns="0" bIns="0" rtlCol="0" anchor="ctr">
-            <a:normAutofit/>
-          </a:bodyPr>
+          <a:bodyPr wrap="square" lIns="0" tIns="0" rIns="0" bIns="0" rtlCol="0" anchor="ctr"/>
           <a:lstStyle/>
           <a:p>
             <a:pPr algn="ctr" indent="0" marL="0">
               <a:buNone/>
             </a:pPr>
             <a:r>
-              <a:rPr lang="en-US" sz="3600" b="1" dirty="0">
-                <a:solidFill>
-                  <a:srgbClr val="990011"/>
+              <a:rPr lang="en-US" sz="1600" i="1" dirty="0">
+                <a:solidFill>
+                  <a:srgbClr val="555555"/>
                 </a:solidFill>
                 <a:latin typeface="Times New Roman" pitchFamily="34" charset="0"/>
                 <a:ea typeface="Times New Roman" pitchFamily="34" charset="-122"/>
                 <a:cs typeface="Times New Roman" pitchFamily="34" charset="-120"/>
               </a:rPr>
-              <a:t>Expected Answer</a:t>
-            </a:r>
-            <a:endParaRPr lang="en-US" sz="3600" dirty="0"/>
-          </a:p>
-        </p:txBody>
-      </p:sp>
-      <p:sp>
-        <p:nvSpPr>
-          <p:cNvPr id="5" name="Text 2"/>
-          <p:cNvSpPr/>
-          <p:nvPr/>
-        </p:nvSpPr>
-        <p:spPr>
-          <a:xfrm>
-            <a:off x="5349240" y="1783080"/>
-            <a:ext cx="6522415" cy="4663440"/>
-          </a:xfrm>
-          <a:prstGeom prst="rect">
-            <a:avLst/>
-          </a:prstGeom>
-          <a:noFill/>
-          <a:ln/>
-        </p:spPr>
-        <p:txBody>
-          <a:bodyPr wrap="square" lIns="0" tIns="0" rIns="0" bIns="0" rtlCol="0" anchor="t"/>
-          <a:lstStyle/>
-          <a:p>
-            <a:pPr algn="l" indent="0" marL="0">
-              <a:spcAft>
-                <a:spcPts val="800"/>
-              </a:spcAft>
-              <a:buNone/>
-            </a:pPr>
-            <a:r>
-              <a:rPr lang="en-US" sz="4000" dirty="0">
-                <a:solidFill>
-                  <a:srgbClr val="111111"/>
-                </a:solidFill>
-                <a:latin typeface="Times New Roman" pitchFamily="34" charset="0"/>
-                <a:ea typeface="Times New Roman" pitchFamily="34" charset="-122"/>
-                <a:cs typeface="Times New Roman" pitchFamily="34" charset="-120"/>
-              </a:rPr>
-              <a:t>A food crop feeds the family; a cash crop is sold.</a:t>
-            </a:r>
-            <a:endParaRPr lang="en-US" sz="4000" dirty="0"/>
+              <a:t>Illustration: fishing</a:t>
+            </a:r>
+            <a:endParaRPr lang="en-US" sz="1600" dirty="0"/>
           </a:p>
         </p:txBody>
       </p:sp>
@@ -16552,7 +16852,7 @@
                 <a:ea typeface="Calibri" pitchFamily="34" charset="-122"/>
                 <a:cs typeface="Calibri" pitchFamily="34" charset="-120"/>
               </a:rPr>
-              <a:t>FORMATIVE EVALUATION</a:t>
+              <a:t>BOARD SUMMARY</a:t>
             </a:r>
             <a:endParaRPr lang="en-US" sz="1400" dirty="0"/>
           </a:p>
@@ -16617,7 +16917,7 @@
                 <a:ea typeface="Times New Roman" pitchFamily="34" charset="-122"/>
                 <a:cs typeface="Times New Roman" pitchFamily="34" charset="-120"/>
               </a:rPr>
-              <a:t>Evaluation 2</a:t>
+              <a:t>3. Other Activities</a:t>
             </a:r>
             <a:endParaRPr lang="en-US" sz="3600" dirty="0"/>
           </a:p>
@@ -16644,14 +16944,15 @@
           <a:bodyPr wrap="square" lIns="0" tIns="0" rIns="0" bIns="0" rtlCol="0" anchor="t"/>
           <a:lstStyle/>
           <a:p>
-            <a:pPr algn="l" indent="0" marL="0">
+            <a:pPr algn="l" marL="342900" indent="-342900">
               <a:spcAft>
                 <a:spcPts val="800"/>
               </a:spcAft>
-              <a:buNone/>
+              <a:buSzPct val="100000"/>
+              <a:buChar char="•"/>
             </a:pPr>
             <a:r>
-              <a:rPr lang="en-US" sz="4000" dirty="0">
+              <a:rPr lang="en-US" sz="4000" b="1" dirty="0">
                 <a:solidFill>
                   <a:srgbClr val="111111"/>
                 </a:solidFill>
@@ -16659,7 +16960,64 @@
                 <a:ea typeface="Times New Roman" pitchFamily="34" charset="-122"/>
                 <a:cs typeface="Times New Roman" pitchFamily="34" charset="-120"/>
               </a:rPr>
-              <a:t>What is transhumance?</a:t>
+              <a:t>Lumbering: </a:t>
+            </a:r>
+            <a:pPr algn="l" marL="342900" indent="-342900">
+              <a:spcAft>
+                <a:spcPts val="800"/>
+              </a:spcAft>
+              <a:buSzPct val="100000"/>
+              <a:buChar char="•"/>
+            </a:pPr>
+            <a:r>
+              <a:rPr lang="en-US" sz="4000" dirty="0">
+                <a:solidFill>
+                  <a:srgbClr val="111111"/>
+                </a:solidFill>
+                <a:latin typeface="Times New Roman" pitchFamily="34" charset="0"/>
+                <a:ea typeface="Times New Roman" pitchFamily="34" charset="-122"/>
+                <a:cs typeface="Times New Roman" pitchFamily="34" charset="-120"/>
+              </a:rPr>
+              <a:t>Cutting wood for fuel and building.</a:t>
+            </a:r>
+            <a:endParaRPr lang="en-US" sz="4000" dirty="0"/>
+          </a:p>
+          <a:p>
+            <a:pPr algn="l" marL="342900" indent="-342900">
+              <a:spcAft>
+                <a:spcPts val="800"/>
+              </a:spcAft>
+              <a:buSzPct val="100000"/>
+              <a:buChar char="•"/>
+            </a:pPr>
+            <a:r>
+              <a:rPr lang="en-US" sz="4000" b="1" dirty="0">
+                <a:solidFill>
+                  <a:srgbClr val="111111"/>
+                </a:solidFill>
+                <a:latin typeface="Times New Roman" pitchFamily="34" charset="0"/>
+                <a:ea typeface="Times New Roman" pitchFamily="34" charset="-122"/>
+                <a:cs typeface="Times New Roman" pitchFamily="34" charset="-120"/>
+              </a:rPr>
+              <a:t>Tourism: </a:t>
+            </a:r>
+            <a:pPr algn="l" marL="342900" indent="-342900">
+              <a:spcAft>
+                <a:spcPts val="800"/>
+              </a:spcAft>
+              <a:buSzPct val="100000"/>
+              <a:buChar char="•"/>
+            </a:pPr>
+            <a:r>
+              <a:rPr lang="en-US" sz="4000" dirty="0">
+                <a:solidFill>
+                  <a:srgbClr val="111111"/>
+                </a:solidFill>
+                <a:latin typeface="Times New Roman" pitchFamily="34" charset="0"/>
+                <a:ea typeface="Times New Roman" pitchFamily="34" charset="-122"/>
+                <a:cs typeface="Times New Roman" pitchFamily="34" charset="-120"/>
+              </a:rPr>
+              <a:t>Visits to national parks.</a:t>
             </a:r>
             <a:endParaRPr lang="en-US" sz="4000" dirty="0"/>
           </a:p>
@@ -16836,7 +17194,7 @@
                 <a:ea typeface="Times New Roman" pitchFamily="34" charset="-122"/>
                 <a:cs typeface="Times New Roman" pitchFamily="34" charset="-120"/>
               </a:rPr>
-              <a:t>Expected Answer</a:t>
+              <a:t>Evaluation 1</a:t>
             </a:r>
             <a:endParaRPr lang="en-US" sz="3600" dirty="0"/>
           </a:p>
@@ -16878,7 +17236,7 @@
                 <a:ea typeface="Times New Roman" pitchFamily="34" charset="-122"/>
                 <a:cs typeface="Times New Roman" pitchFamily="34" charset="-120"/>
               </a:rPr>
-              <a:t>The movement of herders with their animals between seasons.</a:t>
+              <a:t>What is the difference between a food crop and a cash crop?</a:t>
             </a:r>
             <a:endParaRPr lang="en-US" sz="4000" dirty="0"/>
           </a:p>
@@ -16990,7 +17348,7 @@
                 <a:ea typeface="Calibri" pitchFamily="34" charset="-122"/>
                 <a:cs typeface="Calibri" pitchFamily="34" charset="-120"/>
               </a:rPr>
-              <a:t>REMEDIATION</a:t>
+              <a:t>FORMATIVE EVALUATION</a:t>
             </a:r>
             <a:endParaRPr lang="en-US" sz="1400" dirty="0"/>
           </a:p>
@@ -17013,7 +17371,7 @@
         <p:spPr>
           <a:xfrm>
             <a:off x="0" y="658368"/>
-            <a:ext cx="3840480" cy="5833872"/>
+            <a:ext cx="5120640" cy="5833872"/>
           </a:xfrm>
           <a:prstGeom prst="rect">
             <a:avLst/>
@@ -17028,8 +17386,8 @@
         </p:nvSpPr>
         <p:spPr>
           <a:xfrm>
-            <a:off x="4069080" y="1005840"/>
-            <a:ext cx="7802575" cy="731520"/>
+            <a:off x="5349240" y="1005840"/>
+            <a:ext cx="6522415" cy="731520"/>
           </a:xfrm>
           <a:prstGeom prst="rect">
             <a:avLst/>
@@ -17055,7 +17413,7 @@
                 <a:ea typeface="Times New Roman" pitchFamily="34" charset="-122"/>
                 <a:cs typeface="Times New Roman" pitchFamily="34" charset="-120"/>
               </a:rPr>
-              <a:t>Remediation</a:t>
+              <a:t>Expected Answer</a:t>
             </a:r>
             <a:endParaRPr lang="en-US" sz="3600" dirty="0"/>
           </a:p>
@@ -17069,8 +17427,8 @@
         </p:nvSpPr>
         <p:spPr>
           <a:xfrm>
-            <a:off x="4069080" y="1783080"/>
-            <a:ext cx="7802575" cy="4663440"/>
+            <a:off x="5349240" y="1783080"/>
+            <a:ext cx="6522415" cy="4663440"/>
           </a:xfrm>
           <a:prstGeom prst="rect">
             <a:avLst/>
@@ -17089,7 +17447,7 @@
               <a:buNone/>
             </a:pPr>
             <a:r>
-              <a:rPr lang="en-US" sz="4000" b="1" dirty="0">
+              <a:rPr lang="en-US" sz="4000" dirty="0">
                 <a:solidFill>
                   <a:srgbClr val="111111"/>
                 </a:solidFill>
@@ -17097,73 +17455,7 @@
                 <a:ea typeface="Times New Roman" pitchFamily="34" charset="-122"/>
                 <a:cs typeface="Times New Roman" pitchFamily="34" charset="-120"/>
               </a:rPr>
-              <a:t>Fill in the blanks:</a:t>
-            </a:r>
-            <a:endParaRPr lang="en-US" sz="4000" dirty="0"/>
-          </a:p>
-          <a:p>
-            <a:pPr algn="l" marL="342900" indent="-342900">
-              <a:spcAft>
-                <a:spcPts val="800"/>
-              </a:spcAft>
-              <a:buSzPct val="100000"/>
-              <a:buFont typeface="+mj-lt"/>
-              <a:buAutoNum type="arabicPeriod" startAt="1"/>
-            </a:pPr>
-            <a:r>
-              <a:rPr lang="en-US" sz="4000" dirty="0">
-                <a:solidFill>
-                  <a:srgbClr val="111111"/>
-                </a:solidFill>
-                <a:latin typeface="Times New Roman" pitchFamily="34" charset="0"/>
-                <a:ea typeface="Times New Roman" pitchFamily="34" charset="-122"/>
-                <a:cs typeface="Times New Roman" pitchFamily="34" charset="-120"/>
-              </a:rPr>
-              <a:t>Cotton is a ______ crop.</a:t>
-            </a:r>
-            <a:endParaRPr lang="en-US" sz="4000" dirty="0"/>
-          </a:p>
-          <a:p>
-            <a:pPr algn="l" marL="342900" indent="-342900">
-              <a:spcAft>
-                <a:spcPts val="800"/>
-              </a:spcAft>
-              <a:buSzPct val="100000"/>
-              <a:buFont typeface="+mj-lt"/>
-              <a:buAutoNum type="arabicPeriod" startAt="1"/>
-            </a:pPr>
-            <a:r>
-              <a:rPr lang="en-US" sz="4000" dirty="0">
-                <a:solidFill>
-                  <a:srgbClr val="111111"/>
-                </a:solidFill>
-                <a:latin typeface="Times New Roman" pitchFamily="34" charset="0"/>
-                <a:ea typeface="Times New Roman" pitchFamily="34" charset="-122"/>
-                <a:cs typeface="Times New Roman" pitchFamily="34" charset="-120"/>
-              </a:rPr>
-              <a:t>The movement of herders between seasons is called ______.</a:t>
-            </a:r>
-            <a:endParaRPr lang="en-US" sz="4000" dirty="0"/>
-          </a:p>
-          <a:p>
-            <a:pPr algn="l" marL="342900" indent="-342900">
-              <a:spcAft>
-                <a:spcPts val="800"/>
-              </a:spcAft>
-              <a:buSzPct val="100000"/>
-              <a:buFont typeface="+mj-lt"/>
-              <a:buAutoNum type="arabicPeriod" startAt="1"/>
-            </a:pPr>
-            <a:r>
-              <a:rPr lang="en-US" sz="4000" dirty="0">
-                <a:solidFill>
-                  <a:srgbClr val="111111"/>
-                </a:solidFill>
-                <a:latin typeface="Times New Roman" pitchFamily="34" charset="0"/>
-                <a:ea typeface="Times New Roman" pitchFamily="34" charset="-122"/>
-                <a:cs typeface="Times New Roman" pitchFamily="34" charset="-120"/>
-              </a:rPr>
-              <a:t>Bringing water to the fields is called ______.</a:t>
+              <a:t>A food crop feeds the family; a cash crop is sold.</a:t>
             </a:r>
             <a:endParaRPr lang="en-US" sz="4000" dirty="0"/>
           </a:p>
@@ -17275,7 +17567,7 @@
                 <a:ea typeface="Calibri" pitchFamily="34" charset="-122"/>
                 <a:cs typeface="Calibri" pitchFamily="34" charset="-120"/>
               </a:rPr>
-              <a:t>HOMEWORK</a:t>
+              <a:t>FORMATIVE EVALUATION</a:t>
             </a:r>
             <a:endParaRPr lang="en-US" sz="1400" dirty="0"/>
           </a:p>
@@ -17340,7 +17632,7 @@
                 <a:ea typeface="Times New Roman" pitchFamily="34" charset="-122"/>
                 <a:cs typeface="Times New Roman" pitchFamily="34" charset="-120"/>
               </a:rPr>
-              <a:t>Homework</a:t>
+              <a:t>Evaluation 2</a:t>
             </a:r>
             <a:endParaRPr lang="en-US" sz="3600" dirty="0"/>
           </a:p>
@@ -17382,7 +17674,7 @@
                 <a:ea typeface="Times New Roman" pitchFamily="34" charset="-122"/>
                 <a:cs typeface="Times New Roman" pitchFamily="34" charset="-120"/>
               </a:rPr>
-              <a:t>Write down two problems that farmers or herders around Garoua face, for example with rain, fires or pests.</a:t>
+              <a:t>What is transhumance?</a:t>
             </a:r>
             <a:endParaRPr lang="en-US" sz="4000" dirty="0"/>
           </a:p>
@@ -17494,7 +17786,7 @@
                 <a:ea typeface="Calibri" pitchFamily="34" charset="-122"/>
                 <a:cs typeface="Calibri" pitchFamily="34" charset="-120"/>
               </a:rPr>
-              <a:t>NEXT LESSON</a:t>
+              <a:t>FORMATIVE EVALUATION</a:t>
             </a:r>
             <a:endParaRPr lang="en-US" sz="1400" dirty="0"/>
           </a:p>
@@ -17559,7 +17851,7 @@
                 <a:ea typeface="Times New Roman" pitchFamily="34" charset="-122"/>
                 <a:cs typeface="Times New Roman" pitchFamily="34" charset="-120"/>
               </a:rPr>
-              <a:t>Next Lesson</a:t>
+              <a:t>Expected Answer</a:t>
             </a:r>
             <a:endParaRPr lang="en-US" sz="3600" dirty="0"/>
           </a:p>
@@ -17583,17 +17875,17 @@
           <a:ln/>
         </p:spPr>
         <p:txBody>
-          <a:bodyPr wrap="square" lIns="0" tIns="0" rIns="0" bIns="0" rtlCol="0" anchor="ctr"/>
-          <a:lstStyle/>
-          <a:p>
-            <a:pPr algn="ctr" indent="0" marL="0">
+          <a:bodyPr wrap="square" lIns="0" tIns="0" rIns="0" bIns="0" rtlCol="0" anchor="t"/>
+          <a:lstStyle/>
+          <a:p>
+            <a:pPr algn="l" indent="0" marL="0">
               <a:spcAft>
                 <a:spcPts val="800"/>
               </a:spcAft>
               <a:buNone/>
             </a:pPr>
             <a:r>
-              <a:rPr lang="en-US" sz="4000" b="1" dirty="0">
+              <a:rPr lang="en-US" sz="4000" dirty="0">
                 <a:solidFill>
                   <a:srgbClr val="111111"/>
                 </a:solidFill>
@@ -17601,27 +17893,7 @@
                 <a:ea typeface="Times New Roman" pitchFamily="34" charset="-122"/>
                 <a:cs typeface="Times New Roman" pitchFamily="34" charset="-120"/>
               </a:rPr>
-              <a:t>Our next lesson will be on:</a:t>
-            </a:r>
-            <a:endParaRPr lang="en-US" sz="4000" dirty="0"/>
-          </a:p>
-          <a:p>
-            <a:pPr algn="ctr" indent="0" marL="0">
-              <a:spcAft>
-                <a:spcPts val="800"/>
-              </a:spcAft>
-              <a:buNone/>
-            </a:pPr>
-            <a:r>
-              <a:rPr lang="en-US" sz="4000" b="1" dirty="0">
-                <a:solidFill>
-                  <a:srgbClr val="990011"/>
-                </a:solidFill>
-                <a:latin typeface="Times New Roman" pitchFamily="34" charset="0"/>
-                <a:ea typeface="Times New Roman" pitchFamily="34" charset="-122"/>
-                <a:cs typeface="Times New Roman" pitchFamily="34" charset="-120"/>
-              </a:rPr>
-              <a:t>Lesson 2 (Part 5): The Tropical Grassland Region: Problems Faced and Attempted Solutions</a:t>
+              <a:t>The movement of herders with their animals between seasons.</a:t>
             </a:r>
             <a:endParaRPr lang="en-US" sz="4000" dirty="0"/>
           </a:p>
@@ -17952,6 +18224,749 @@
                 <a:ea typeface="Calibri" pitchFamily="34" charset="-122"/>
                 <a:cs typeface="Calibri" pitchFamily="34" charset="-120"/>
               </a:rPr>
+              <a:t>REMEDIATION</a:t>
+            </a:r>
+            <a:endParaRPr lang="en-US" sz="1400" dirty="0"/>
+          </a:p>
+        </p:txBody>
+      </p:sp>
+      <p:pic>
+        <p:nvPicPr>
+          <p:cNvPr id="3" name="Image 0" descr="/home/claude/f4/img/minesec_sheet.png">    </p:cNvPr>
+          <p:cNvPicPr>
+            <a:picLocks noChangeAspect="1"/>
+          </p:cNvPicPr>
+          <p:nvPr/>
+        </p:nvPicPr>
+        <p:blipFill>
+          <a:blip r:embed="rId1"/>
+          <a:stretch>
+            <a:fillRect/>
+          </a:stretch>
+        </p:blipFill>
+        <p:spPr>
+          <a:xfrm>
+            <a:off x="0" y="658368"/>
+            <a:ext cx="3840480" cy="5833872"/>
+          </a:xfrm>
+          <a:prstGeom prst="rect">
+            <a:avLst/>
+          </a:prstGeom>
+        </p:spPr>
+      </p:pic>
+      <p:sp>
+        <p:nvSpPr>
+          <p:cNvPr id="4" name="Text 1"/>
+          <p:cNvSpPr/>
+          <p:nvPr/>
+        </p:nvSpPr>
+        <p:spPr>
+          <a:xfrm>
+            <a:off x="4069080" y="1005840"/>
+            <a:ext cx="7802575" cy="731520"/>
+          </a:xfrm>
+          <a:prstGeom prst="rect">
+            <a:avLst/>
+          </a:prstGeom>
+          <a:noFill/>
+          <a:ln/>
+        </p:spPr>
+        <p:txBody>
+          <a:bodyPr wrap="square" lIns="0" tIns="0" rIns="0" bIns="0" rtlCol="0" anchor="ctr">
+            <a:normAutofit/>
+          </a:bodyPr>
+          <a:lstStyle/>
+          <a:p>
+            <a:pPr algn="ctr" indent="0" marL="0">
+              <a:buNone/>
+            </a:pPr>
+            <a:r>
+              <a:rPr lang="en-US" sz="3600" b="1" dirty="0">
+                <a:solidFill>
+                  <a:srgbClr val="990011"/>
+                </a:solidFill>
+                <a:latin typeface="Times New Roman" pitchFamily="34" charset="0"/>
+                <a:ea typeface="Times New Roman" pitchFamily="34" charset="-122"/>
+                <a:cs typeface="Times New Roman" pitchFamily="34" charset="-120"/>
+              </a:rPr>
+              <a:t>Remediation</a:t>
+            </a:r>
+            <a:endParaRPr lang="en-US" sz="3600" dirty="0"/>
+          </a:p>
+        </p:txBody>
+      </p:sp>
+      <p:sp>
+        <p:nvSpPr>
+          <p:cNvPr id="5" name="Text 2"/>
+          <p:cNvSpPr/>
+          <p:nvPr/>
+        </p:nvSpPr>
+        <p:spPr>
+          <a:xfrm>
+            <a:off x="4069080" y="1783080"/>
+            <a:ext cx="7802575" cy="4663440"/>
+          </a:xfrm>
+          <a:prstGeom prst="rect">
+            <a:avLst/>
+          </a:prstGeom>
+          <a:noFill/>
+          <a:ln/>
+        </p:spPr>
+        <p:txBody>
+          <a:bodyPr wrap="square" lIns="0" tIns="0" rIns="0" bIns="0" rtlCol="0" anchor="t"/>
+          <a:lstStyle/>
+          <a:p>
+            <a:pPr algn="l" indent="0" marL="0">
+              <a:spcAft>
+                <a:spcPts val="800"/>
+              </a:spcAft>
+              <a:buNone/>
+            </a:pPr>
+            <a:r>
+              <a:rPr lang="en-US" sz="4000" b="1" dirty="0">
+                <a:solidFill>
+                  <a:srgbClr val="111111"/>
+                </a:solidFill>
+                <a:latin typeface="Times New Roman" pitchFamily="34" charset="0"/>
+                <a:ea typeface="Times New Roman" pitchFamily="34" charset="-122"/>
+                <a:cs typeface="Times New Roman" pitchFamily="34" charset="-120"/>
+              </a:rPr>
+              <a:t>Fill in the blanks:</a:t>
+            </a:r>
+            <a:endParaRPr lang="en-US" sz="4000" dirty="0"/>
+          </a:p>
+          <a:p>
+            <a:pPr algn="l" marL="342900" indent="-342900">
+              <a:spcAft>
+                <a:spcPts val="800"/>
+              </a:spcAft>
+              <a:buSzPct val="100000"/>
+              <a:buFont typeface="+mj-lt"/>
+              <a:buAutoNum type="arabicPeriod" startAt="1"/>
+            </a:pPr>
+            <a:r>
+              <a:rPr lang="en-US" sz="4000" dirty="0">
+                <a:solidFill>
+                  <a:srgbClr val="111111"/>
+                </a:solidFill>
+                <a:latin typeface="Times New Roman" pitchFamily="34" charset="0"/>
+                <a:ea typeface="Times New Roman" pitchFamily="34" charset="-122"/>
+                <a:cs typeface="Times New Roman" pitchFamily="34" charset="-120"/>
+              </a:rPr>
+              <a:t>Cotton is a ______ crop.</a:t>
+            </a:r>
+            <a:endParaRPr lang="en-US" sz="4000" dirty="0"/>
+          </a:p>
+          <a:p>
+            <a:pPr algn="l" marL="342900" indent="-342900">
+              <a:spcAft>
+                <a:spcPts val="800"/>
+              </a:spcAft>
+              <a:buSzPct val="100000"/>
+              <a:buFont typeface="+mj-lt"/>
+              <a:buAutoNum type="arabicPeriod" startAt="1"/>
+            </a:pPr>
+            <a:r>
+              <a:rPr lang="en-US" sz="4000" dirty="0">
+                <a:solidFill>
+                  <a:srgbClr val="111111"/>
+                </a:solidFill>
+                <a:latin typeface="Times New Roman" pitchFamily="34" charset="0"/>
+                <a:ea typeface="Times New Roman" pitchFamily="34" charset="-122"/>
+                <a:cs typeface="Times New Roman" pitchFamily="34" charset="-120"/>
+              </a:rPr>
+              <a:t>The movement of herders between seasons is called ______.</a:t>
+            </a:r>
+            <a:endParaRPr lang="en-US" sz="4000" dirty="0"/>
+          </a:p>
+          <a:p>
+            <a:pPr algn="l" marL="342900" indent="-342900">
+              <a:spcAft>
+                <a:spcPts val="800"/>
+              </a:spcAft>
+              <a:buSzPct val="100000"/>
+              <a:buFont typeface="+mj-lt"/>
+              <a:buAutoNum type="arabicPeriod" startAt="1"/>
+            </a:pPr>
+            <a:r>
+              <a:rPr lang="en-US" sz="4000" dirty="0">
+                <a:solidFill>
+                  <a:srgbClr val="111111"/>
+                </a:solidFill>
+                <a:latin typeface="Times New Roman" pitchFamily="34" charset="0"/>
+                <a:ea typeface="Times New Roman" pitchFamily="34" charset="-122"/>
+                <a:cs typeface="Times New Roman" pitchFamily="34" charset="-120"/>
+              </a:rPr>
+              <a:t>Bringing water to the fields is called ______.</a:t>
+            </a:r>
+            <a:endParaRPr lang="en-US" sz="4000" dirty="0"/>
+          </a:p>
+        </p:txBody>
+      </p:sp>
+      <p:sp>
+        <p:nvSpPr>
+          <p:cNvPr id="25" name="Slide Number Placeholder 0"/>
+          <p:cNvSpPr>
+            <a:spLocks noGrp="1"/>
+          </p:cNvSpPr>
+          <p:nvPr>
+            <p:ph type="sldNum" sz="quarter" idx="4294967295"/>
+          </p:nvPr>
+        </p:nvSpPr>
+        <p:spPr>
+          <a:xfrm>
+            <a:off x="27432" y="91440"/>
+            <a:ext cx="585216" cy="475488"/>
+          </a:xfrm>
+          <a:prstGeom prst="rect">
+            <a:avLst/>
+          </a:prstGeom>
+          <a:extLst>
+            <a:ext uri="{C572A759-6A51-4108-AA02-DFA0A04FC94B}">
+              <ma14:wrappingTextBoxFlag xmlns:ma14="http://schemas.microsoft.com/office/mac/drawingml/2011/main" val="0"/>
+            </a:ext>
+          </a:extLst>
+        </p:spPr>
+        <p:txBody>
+          <a:bodyPr/>
+          <a:lstStyle>
+            <a:lvl1pPr>
+              <a:defRPr sz="2000">
+                <a:solidFill>
+                  <a:srgbClr val="FFFFFF"/>
+                </a:solidFill>
+                <a:latin typeface="Calibri"/>
+                <a:ea typeface="Calibri"/>
+                <a:cs typeface="Calibri"/>
+              </a:defRPr>
+            </a:lvl1pPr>
+          </a:lstStyle>
+          <a:p>
+            <a:pPr algn="ctr"/>
+            <a:fld id="{F7021451-1387-4CA6-816F-3879F97B5CBC}" type="slidenum">
+              <a:rPr b="1" lang="en-US"/>
+              <a:t>50</a:t>
+            </a:fld>
+            <a:endParaRPr lang="en-US"/>
+          </a:p>
+        </p:txBody>
+      </p:sp>
+    </p:spTree>
+  </p:cSld>
+  <p:clrMapOvr>
+    <a:masterClrMapping/>
+  </p:clrMapOvr>
+</p:sld>
+</file>
+
+<file path=ppt/slides/slide51.xml><?xml version="1.0" encoding="utf-8"?>
+<p:sld xmlns:a="http://schemas.openxmlformats.org/drawingml/2006/main" xmlns:r="http://schemas.openxmlformats.org/officeDocument/2006/relationships" xmlns:p="http://schemas.openxmlformats.org/presentationml/2006/main">
+  <p:cSld name="Slide 51">
+    <p:spTree>
+      <p:nvGrpSpPr>
+        <p:cNvPr id="1" name=""/>
+        <p:cNvGrpSpPr/>
+        <p:nvPr/>
+      </p:nvGrpSpPr>
+      <p:grpSpPr>
+        <a:xfrm>
+          <a:off x="0" y="0"/>
+          <a:ext cx="0" cy="0"/>
+          <a:chOff x="0" y="0"/>
+          <a:chExt cx="0" cy="0"/>
+        </a:xfrm>
+      </p:grpSpPr>
+      <p:sp>
+        <p:nvSpPr>
+          <p:cNvPr id="2" name="Text 0"/>
+          <p:cNvSpPr/>
+          <p:nvPr/>
+        </p:nvSpPr>
+        <p:spPr>
+          <a:xfrm>
+            <a:off x="457200" y="713232"/>
+            <a:ext cx="11368735" cy="274320"/>
+          </a:xfrm>
+          <a:prstGeom prst="rect">
+            <a:avLst/>
+          </a:prstGeom>
+          <a:noFill/>
+          <a:ln/>
+        </p:spPr>
+        <p:txBody>
+          <a:bodyPr wrap="square" lIns="0" tIns="0" rIns="0" bIns="0" rtlCol="0" anchor="ctr"/>
+          <a:lstStyle/>
+          <a:p>
+            <a:pPr algn="r" indent="0" marL="0">
+              <a:buNone/>
+            </a:pPr>
+            <a:r>
+              <a:rPr lang="en-US" sz="1400" b="1" dirty="0">
+                <a:solidFill>
+                  <a:srgbClr val="1C3F6E"/>
+                </a:solidFill>
+                <a:latin typeface="Calibri" pitchFamily="34" charset="0"/>
+                <a:ea typeface="Calibri" pitchFamily="34" charset="-122"/>
+                <a:cs typeface="Calibri" pitchFamily="34" charset="-120"/>
+              </a:rPr>
+              <a:t>HOMEWORK</a:t>
+            </a:r>
+            <a:endParaRPr lang="en-US" sz="1400" dirty="0"/>
+          </a:p>
+        </p:txBody>
+      </p:sp>
+      <p:pic>
+        <p:nvPicPr>
+          <p:cNvPr id="3" name="Image 0" descr="/home/claude/f4/img/minesec_sheet.png">    </p:cNvPr>
+          <p:cNvPicPr>
+            <a:picLocks noChangeAspect="1"/>
+          </p:cNvPicPr>
+          <p:nvPr/>
+        </p:nvPicPr>
+        <p:blipFill>
+          <a:blip r:embed="rId1"/>
+          <a:stretch>
+            <a:fillRect/>
+          </a:stretch>
+        </p:blipFill>
+        <p:spPr>
+          <a:xfrm>
+            <a:off x="0" y="658368"/>
+            <a:ext cx="5120640" cy="5833872"/>
+          </a:xfrm>
+          <a:prstGeom prst="rect">
+            <a:avLst/>
+          </a:prstGeom>
+        </p:spPr>
+      </p:pic>
+      <p:sp>
+        <p:nvSpPr>
+          <p:cNvPr id="4" name="Text 1"/>
+          <p:cNvSpPr/>
+          <p:nvPr/>
+        </p:nvSpPr>
+        <p:spPr>
+          <a:xfrm>
+            <a:off x="5349240" y="1005840"/>
+            <a:ext cx="6522415" cy="731520"/>
+          </a:xfrm>
+          <a:prstGeom prst="rect">
+            <a:avLst/>
+          </a:prstGeom>
+          <a:noFill/>
+          <a:ln/>
+        </p:spPr>
+        <p:txBody>
+          <a:bodyPr wrap="square" lIns="0" tIns="0" rIns="0" bIns="0" rtlCol="0" anchor="ctr">
+            <a:normAutofit/>
+          </a:bodyPr>
+          <a:lstStyle/>
+          <a:p>
+            <a:pPr algn="ctr" indent="0" marL="0">
+              <a:buNone/>
+            </a:pPr>
+            <a:r>
+              <a:rPr lang="en-US" sz="3600" b="1" dirty="0">
+                <a:solidFill>
+                  <a:srgbClr val="990011"/>
+                </a:solidFill>
+                <a:latin typeface="Times New Roman" pitchFamily="34" charset="0"/>
+                <a:ea typeface="Times New Roman" pitchFamily="34" charset="-122"/>
+                <a:cs typeface="Times New Roman" pitchFamily="34" charset="-120"/>
+              </a:rPr>
+              <a:t>Homework</a:t>
+            </a:r>
+            <a:endParaRPr lang="en-US" sz="3600" dirty="0"/>
+          </a:p>
+        </p:txBody>
+      </p:sp>
+      <p:sp>
+        <p:nvSpPr>
+          <p:cNvPr id="5" name="Text 2"/>
+          <p:cNvSpPr/>
+          <p:nvPr/>
+        </p:nvSpPr>
+        <p:spPr>
+          <a:xfrm>
+            <a:off x="5349240" y="1783080"/>
+            <a:ext cx="6522415" cy="4663440"/>
+          </a:xfrm>
+          <a:prstGeom prst="rect">
+            <a:avLst/>
+          </a:prstGeom>
+          <a:noFill/>
+          <a:ln/>
+        </p:spPr>
+        <p:txBody>
+          <a:bodyPr wrap="square" lIns="0" tIns="0" rIns="0" bIns="0" rtlCol="0" anchor="t"/>
+          <a:lstStyle/>
+          <a:p>
+            <a:pPr algn="l" indent="0" marL="0">
+              <a:spcAft>
+                <a:spcPts val="800"/>
+              </a:spcAft>
+              <a:buNone/>
+            </a:pPr>
+            <a:r>
+              <a:rPr lang="en-US" sz="4000" dirty="0">
+                <a:solidFill>
+                  <a:srgbClr val="111111"/>
+                </a:solidFill>
+                <a:latin typeface="Times New Roman" pitchFamily="34" charset="0"/>
+                <a:ea typeface="Times New Roman" pitchFamily="34" charset="-122"/>
+                <a:cs typeface="Times New Roman" pitchFamily="34" charset="-120"/>
+              </a:rPr>
+              <a:t>Write down two problems that farmers or herders around Garoua face, for example with rain, fires or pests.</a:t>
+            </a:r>
+            <a:endParaRPr lang="en-US" sz="4000" dirty="0"/>
+          </a:p>
+        </p:txBody>
+      </p:sp>
+      <p:sp>
+        <p:nvSpPr>
+          <p:cNvPr id="25" name="Slide Number Placeholder 0"/>
+          <p:cNvSpPr>
+            <a:spLocks noGrp="1"/>
+          </p:cNvSpPr>
+          <p:nvPr>
+            <p:ph type="sldNum" sz="quarter" idx="4294967295"/>
+          </p:nvPr>
+        </p:nvSpPr>
+        <p:spPr>
+          <a:xfrm>
+            <a:off x="27432" y="91440"/>
+            <a:ext cx="585216" cy="475488"/>
+          </a:xfrm>
+          <a:prstGeom prst="rect">
+            <a:avLst/>
+          </a:prstGeom>
+          <a:extLst>
+            <a:ext uri="{C572A759-6A51-4108-AA02-DFA0A04FC94B}">
+              <ma14:wrappingTextBoxFlag xmlns:ma14="http://schemas.microsoft.com/office/mac/drawingml/2011/main" val="0"/>
+            </a:ext>
+          </a:extLst>
+        </p:spPr>
+        <p:txBody>
+          <a:bodyPr/>
+          <a:lstStyle>
+            <a:lvl1pPr>
+              <a:defRPr sz="2000">
+                <a:solidFill>
+                  <a:srgbClr val="FFFFFF"/>
+                </a:solidFill>
+                <a:latin typeface="Calibri"/>
+                <a:ea typeface="Calibri"/>
+                <a:cs typeface="Calibri"/>
+              </a:defRPr>
+            </a:lvl1pPr>
+          </a:lstStyle>
+          <a:p>
+            <a:pPr algn="ctr"/>
+            <a:fld id="{F7021451-1387-4CA6-816F-3879F97B5CBC}" type="slidenum">
+              <a:rPr b="1" lang="en-US"/>
+              <a:t>51</a:t>
+            </a:fld>
+            <a:endParaRPr lang="en-US"/>
+          </a:p>
+        </p:txBody>
+      </p:sp>
+    </p:spTree>
+  </p:cSld>
+  <p:clrMapOvr>
+    <a:masterClrMapping/>
+  </p:clrMapOvr>
+</p:sld>
+</file>
+
+<file path=ppt/slides/slide52.xml><?xml version="1.0" encoding="utf-8"?>
+<p:sld xmlns:a="http://schemas.openxmlformats.org/drawingml/2006/main" xmlns:r="http://schemas.openxmlformats.org/officeDocument/2006/relationships" xmlns:p="http://schemas.openxmlformats.org/presentationml/2006/main">
+  <p:cSld name="Slide 52">
+    <p:spTree>
+      <p:nvGrpSpPr>
+        <p:cNvPr id="1" name=""/>
+        <p:cNvGrpSpPr/>
+        <p:nvPr/>
+      </p:nvGrpSpPr>
+      <p:grpSpPr>
+        <a:xfrm>
+          <a:off x="0" y="0"/>
+          <a:ext cx="0" cy="0"/>
+          <a:chOff x="0" y="0"/>
+          <a:chExt cx="0" cy="0"/>
+        </a:xfrm>
+      </p:grpSpPr>
+      <p:sp>
+        <p:nvSpPr>
+          <p:cNvPr id="2" name="Text 0"/>
+          <p:cNvSpPr/>
+          <p:nvPr/>
+        </p:nvSpPr>
+        <p:spPr>
+          <a:xfrm>
+            <a:off x="457200" y="713232"/>
+            <a:ext cx="11368735" cy="274320"/>
+          </a:xfrm>
+          <a:prstGeom prst="rect">
+            <a:avLst/>
+          </a:prstGeom>
+          <a:noFill/>
+          <a:ln/>
+        </p:spPr>
+        <p:txBody>
+          <a:bodyPr wrap="square" lIns="0" tIns="0" rIns="0" bIns="0" rtlCol="0" anchor="ctr"/>
+          <a:lstStyle/>
+          <a:p>
+            <a:pPr algn="r" indent="0" marL="0">
+              <a:buNone/>
+            </a:pPr>
+            <a:r>
+              <a:rPr lang="en-US" sz="1400" b="1" dirty="0">
+                <a:solidFill>
+                  <a:srgbClr val="1C3F6E"/>
+                </a:solidFill>
+                <a:latin typeface="Calibri" pitchFamily="34" charset="0"/>
+                <a:ea typeface="Calibri" pitchFamily="34" charset="-122"/>
+                <a:cs typeface="Calibri" pitchFamily="34" charset="-120"/>
+              </a:rPr>
+              <a:t>NEXT LESSON</a:t>
+            </a:r>
+            <a:endParaRPr lang="en-US" sz="1400" dirty="0"/>
+          </a:p>
+        </p:txBody>
+      </p:sp>
+      <p:pic>
+        <p:nvPicPr>
+          <p:cNvPr id="3" name="Image 0" descr="/home/claude/f4/img/minesec_sheet.png">    </p:cNvPr>
+          <p:cNvPicPr>
+            <a:picLocks noChangeAspect="1"/>
+          </p:cNvPicPr>
+          <p:nvPr/>
+        </p:nvPicPr>
+        <p:blipFill>
+          <a:blip r:embed="rId1"/>
+          <a:stretch>
+            <a:fillRect/>
+          </a:stretch>
+        </p:blipFill>
+        <p:spPr>
+          <a:xfrm>
+            <a:off x="0" y="658368"/>
+            <a:ext cx="5120640" cy="5833872"/>
+          </a:xfrm>
+          <a:prstGeom prst="rect">
+            <a:avLst/>
+          </a:prstGeom>
+        </p:spPr>
+      </p:pic>
+      <p:sp>
+        <p:nvSpPr>
+          <p:cNvPr id="4" name="Text 1"/>
+          <p:cNvSpPr/>
+          <p:nvPr/>
+        </p:nvSpPr>
+        <p:spPr>
+          <a:xfrm>
+            <a:off x="5349240" y="1005840"/>
+            <a:ext cx="6522415" cy="731520"/>
+          </a:xfrm>
+          <a:prstGeom prst="rect">
+            <a:avLst/>
+          </a:prstGeom>
+          <a:noFill/>
+          <a:ln/>
+        </p:spPr>
+        <p:txBody>
+          <a:bodyPr wrap="square" lIns="0" tIns="0" rIns="0" bIns="0" rtlCol="0" anchor="ctr">
+            <a:normAutofit/>
+          </a:bodyPr>
+          <a:lstStyle/>
+          <a:p>
+            <a:pPr algn="ctr" indent="0" marL="0">
+              <a:buNone/>
+            </a:pPr>
+            <a:r>
+              <a:rPr lang="en-US" sz="3600" b="1" dirty="0">
+                <a:solidFill>
+                  <a:srgbClr val="990011"/>
+                </a:solidFill>
+                <a:latin typeface="Times New Roman" pitchFamily="34" charset="0"/>
+                <a:ea typeface="Times New Roman" pitchFamily="34" charset="-122"/>
+                <a:cs typeface="Times New Roman" pitchFamily="34" charset="-120"/>
+              </a:rPr>
+              <a:t>Next Lesson</a:t>
+            </a:r>
+            <a:endParaRPr lang="en-US" sz="3600" dirty="0"/>
+          </a:p>
+        </p:txBody>
+      </p:sp>
+      <p:sp>
+        <p:nvSpPr>
+          <p:cNvPr id="5" name="Text 2"/>
+          <p:cNvSpPr/>
+          <p:nvPr/>
+        </p:nvSpPr>
+        <p:spPr>
+          <a:xfrm>
+            <a:off x="5349240" y="1783080"/>
+            <a:ext cx="6522415" cy="4663440"/>
+          </a:xfrm>
+          <a:prstGeom prst="rect">
+            <a:avLst/>
+          </a:prstGeom>
+          <a:noFill/>
+          <a:ln/>
+        </p:spPr>
+        <p:txBody>
+          <a:bodyPr wrap="square" lIns="0" tIns="0" rIns="0" bIns="0" rtlCol="0" anchor="ctr"/>
+          <a:lstStyle/>
+          <a:p>
+            <a:pPr algn="ctr" indent="0" marL="0">
+              <a:spcAft>
+                <a:spcPts val="800"/>
+              </a:spcAft>
+              <a:buNone/>
+            </a:pPr>
+            <a:r>
+              <a:rPr lang="en-US" sz="4000" b="1" dirty="0">
+                <a:solidFill>
+                  <a:srgbClr val="111111"/>
+                </a:solidFill>
+                <a:latin typeface="Times New Roman" pitchFamily="34" charset="0"/>
+                <a:ea typeface="Times New Roman" pitchFamily="34" charset="-122"/>
+                <a:cs typeface="Times New Roman" pitchFamily="34" charset="-120"/>
+              </a:rPr>
+              <a:t>Our next lesson will be on:</a:t>
+            </a:r>
+            <a:endParaRPr lang="en-US" sz="4000" dirty="0"/>
+          </a:p>
+          <a:p>
+            <a:pPr algn="ctr" indent="0" marL="0">
+              <a:spcAft>
+                <a:spcPts val="800"/>
+              </a:spcAft>
+              <a:buNone/>
+            </a:pPr>
+            <a:r>
+              <a:rPr lang="en-US" sz="4000" b="1" dirty="0">
+                <a:solidFill>
+                  <a:srgbClr val="990011"/>
+                </a:solidFill>
+                <a:latin typeface="Times New Roman" pitchFamily="34" charset="0"/>
+                <a:ea typeface="Times New Roman" pitchFamily="34" charset="-122"/>
+                <a:cs typeface="Times New Roman" pitchFamily="34" charset="-120"/>
+              </a:rPr>
+              <a:t>Lesson 2 (Part 5): The Tropical Grassland Region: Problems Faced and Attempted Solutions</a:t>
+            </a:r>
+            <a:endParaRPr lang="en-US" sz="4000" dirty="0"/>
+          </a:p>
+        </p:txBody>
+      </p:sp>
+      <p:sp>
+        <p:nvSpPr>
+          <p:cNvPr id="25" name="Slide Number Placeholder 0"/>
+          <p:cNvSpPr>
+            <a:spLocks noGrp="1"/>
+          </p:cNvSpPr>
+          <p:nvPr>
+            <p:ph type="sldNum" sz="quarter" idx="4294967295"/>
+          </p:nvPr>
+        </p:nvSpPr>
+        <p:spPr>
+          <a:xfrm>
+            <a:off x="27432" y="91440"/>
+            <a:ext cx="585216" cy="475488"/>
+          </a:xfrm>
+          <a:prstGeom prst="rect">
+            <a:avLst/>
+          </a:prstGeom>
+          <a:extLst>
+            <a:ext uri="{C572A759-6A51-4108-AA02-DFA0A04FC94B}">
+              <ma14:wrappingTextBoxFlag xmlns:ma14="http://schemas.microsoft.com/office/mac/drawingml/2011/main" val="0"/>
+            </a:ext>
+          </a:extLst>
+        </p:spPr>
+        <p:txBody>
+          <a:bodyPr/>
+          <a:lstStyle>
+            <a:lvl1pPr>
+              <a:defRPr sz="2000">
+                <a:solidFill>
+                  <a:srgbClr val="FFFFFF"/>
+                </a:solidFill>
+                <a:latin typeface="Calibri"/>
+                <a:ea typeface="Calibri"/>
+                <a:cs typeface="Calibri"/>
+              </a:defRPr>
+            </a:lvl1pPr>
+          </a:lstStyle>
+          <a:p>
+            <a:pPr algn="ctr"/>
+            <a:fld id="{F7021451-1387-4CA6-816F-3879F97B5CBC}" type="slidenum">
+              <a:rPr b="1" lang="en-US"/>
+              <a:t>52</a:t>
+            </a:fld>
+            <a:endParaRPr lang="en-US"/>
+          </a:p>
+        </p:txBody>
+      </p:sp>
+    </p:spTree>
+  </p:cSld>
+  <p:clrMapOvr>
+    <a:masterClrMapping/>
+  </p:clrMapOvr>
+</p:sld>
+</file>
+
+<file path=ppt/slides/slide53.xml><?xml version="1.0" encoding="utf-8"?>
+<p:sld xmlns:a="http://schemas.openxmlformats.org/drawingml/2006/main" xmlns:r="http://schemas.openxmlformats.org/officeDocument/2006/relationships" xmlns:p="http://schemas.openxmlformats.org/presentationml/2006/main">
+  <p:cSld name="Slide 53">
+    <p:spTree>
+      <p:nvGrpSpPr>
+        <p:cNvPr id="1" name=""/>
+        <p:cNvGrpSpPr/>
+        <p:nvPr/>
+      </p:nvGrpSpPr>
+      <p:grpSpPr>
+        <a:xfrm>
+          <a:off x="0" y="0"/>
+          <a:ext cx="0" cy="0"/>
+          <a:chOff x="0" y="0"/>
+          <a:chExt cx="0" cy="0"/>
+        </a:xfrm>
+      </p:grpSpPr>
+      <p:sp>
+        <p:nvSpPr>
+          <p:cNvPr id="2" name="Text 0"/>
+          <p:cNvSpPr/>
+          <p:nvPr/>
+        </p:nvSpPr>
+        <p:spPr>
+          <a:xfrm>
+            <a:off x="457200" y="713232"/>
+            <a:ext cx="11368735" cy="274320"/>
+          </a:xfrm>
+          <a:prstGeom prst="rect">
+            <a:avLst/>
+          </a:prstGeom>
+          <a:noFill/>
+          <a:ln/>
+        </p:spPr>
+        <p:txBody>
+          <a:bodyPr wrap="square" lIns="0" tIns="0" rIns="0" bIns="0" rtlCol="0" anchor="ctr"/>
+          <a:lstStyle/>
+          <a:p>
+            <a:pPr algn="r" indent="0" marL="0">
+              <a:buNone/>
+            </a:pPr>
+            <a:r>
+              <a:rPr lang="en-US" sz="1400" b="1" dirty="0">
+                <a:solidFill>
+                  <a:srgbClr val="1C3F6E"/>
+                </a:solidFill>
+                <a:latin typeface="Calibri" pitchFamily="34" charset="0"/>
+                <a:ea typeface="Calibri" pitchFamily="34" charset="-122"/>
+                <a:cs typeface="Calibri" pitchFamily="34" charset="-120"/>
+              </a:rPr>
               <a:t>BILINGUAL GAME</a:t>
             </a:r>
             <a:endParaRPr lang="en-US" sz="1400" dirty="0"/>
@@ -17999,7 +19014,7 @@
       </p:sp>
       <p:graphicFrame>
         <p:nvGraphicFramePr>
-          <p:cNvPr id="51" name="Table 0"/>
+          <p:cNvPr id="54" name="Table 0"/>
           <p:cNvGraphicFramePr>
             <a:graphicFrameLocks noGrp="1"/>
           </p:cNvGraphicFramePr>
@@ -19311,7 +20326,7 @@
             <a:pPr algn="ctr"/>
             <a:fld id="{F7021451-1387-4CA6-816F-3879F97B5CBC}" type="slidenum">
               <a:rPr b="1" lang="en-US"/>
-              <a:t>50</a:t>
+              <a:t>53</a:t>
             </a:fld>
             <a:endParaRPr lang="en-US"/>
           </a:p>
@@ -19325,9 +20340,9 @@
 </p:sld>
 </file>
 
-<file path=ppt/slides/slide51.xml><?xml version="1.0" encoding="utf-8"?>
+<file path=ppt/slides/slide54.xml><?xml version="1.0" encoding="utf-8"?>
 <p:sld xmlns:a="http://schemas.openxmlformats.org/drawingml/2006/main" xmlns:r="http://schemas.openxmlformats.org/officeDocument/2006/relationships" xmlns:p="http://schemas.openxmlformats.org/presentationml/2006/main">
-  <p:cSld name="Slide 51">
+  <p:cSld name="Slide 54">
     <p:spTree>
       <p:nvGrpSpPr>
         <p:cNvPr id="1" name=""/>
@@ -19422,7 +20437,7 @@
       </p:sp>
       <p:graphicFrame>
         <p:nvGraphicFramePr>
-          <p:cNvPr id="52" name="Table 0"/>
+          <p:cNvPr id="55" name="Table 0"/>
           <p:cNvGraphicFramePr>
             <a:graphicFrameLocks noGrp="1"/>
           </p:cNvGraphicFramePr>
@@ -20044,7 +21059,7 @@
             <a:pPr algn="ctr"/>
             <a:fld id="{F7021451-1387-4CA6-816F-3879F97B5CBC}" type="slidenum">
               <a:rPr b="1" lang="en-US"/>
-              <a:t>51</a:t>
+              <a:t>54</a:t>
             </a:fld>
             <a:endParaRPr lang="en-US"/>
           </a:p>
@@ -20058,9 +21073,9 @@
 </p:sld>
 </file>
 
-<file path=ppt/slides/slide52.xml><?xml version="1.0" encoding="utf-8"?>
+<file path=ppt/slides/slide55.xml><?xml version="1.0" encoding="utf-8"?>
 <p:sld xmlns:a="http://schemas.openxmlformats.org/drawingml/2006/main" xmlns:r="http://schemas.openxmlformats.org/officeDocument/2006/relationships" xmlns:p="http://schemas.openxmlformats.org/presentationml/2006/main">
-  <p:cSld name="Slide 52">
+  <p:cSld name="Slide 55">
     <p:spTree>
       <p:nvGrpSpPr>
         <p:cNvPr id="1" name=""/>
@@ -20155,7 +21170,7 @@
       </p:sp>
       <p:graphicFrame>
         <p:nvGraphicFramePr>
-          <p:cNvPr id="53" name="Table 0"/>
+          <p:cNvPr id="56" name="Table 0"/>
           <p:cNvGraphicFramePr>
             <a:graphicFrameLocks noGrp="1"/>
           </p:cNvGraphicFramePr>
@@ -20265,7 +21280,7 @@
                           <a:ea typeface="Calibri" pitchFamily="34" charset="-122"/>
                           <a:cs typeface="Calibri" pitchFamily="34" charset="-120"/>
                         </a:rPr>
-                        <a:t>DEFINITIONS; Crop Farming; Livestock Rearing; Other Activities.</a:t>
+                        <a:t>DEFINITIONS; Farming; Livestock Rearing; Other Activities.</a:t>
                       </a:r>
                       <a:endParaRPr lang="en-US" sz="1600" dirty="0">
                         <a:latin typeface="Calibri" charset="0"/>
@@ -20915,7 +21930,7 @@
             <a:pPr algn="ctr"/>
             <a:fld id="{F7021451-1387-4CA6-816F-3879F97B5CBC}" type="slidenum">
               <a:rPr b="1" lang="en-US"/>
-              <a:t>52</a:t>
+              <a:t>55</a:t>
             </a:fld>
             <a:endParaRPr lang="en-US"/>
           </a:p>
@@ -20929,9 +21944,9 @@
 </p:sld>
 </file>
 
-<file path=ppt/slides/slide53.xml><?xml version="1.0" encoding="utf-8"?>
+<file path=ppt/slides/slide56.xml><?xml version="1.0" encoding="utf-8"?>
 <p:sld xmlns:a="http://schemas.openxmlformats.org/drawingml/2006/main" xmlns:r="http://schemas.openxmlformats.org/officeDocument/2006/relationships" xmlns:p="http://schemas.openxmlformats.org/presentationml/2006/main">
-  <p:cSld name="Slide 53">
+  <p:cSld name="Slide 56">
     <p:spTree>
       <p:nvGrpSpPr>
         <p:cNvPr id="1" name=""/>
@@ -21002,7 +22017,7 @@
         <p:spPr>
           <a:xfrm>
             <a:off x="0" y="658368"/>
-            <a:ext cx="1463040" cy="5833872"/>
+            <a:ext cx="2468880" cy="5833872"/>
           </a:xfrm>
           <a:prstGeom prst="rect">
             <a:avLst/>
@@ -21017,8 +22032,8 @@
         </p:nvSpPr>
         <p:spPr>
           <a:xfrm>
-            <a:off x="1691640" y="1005840"/>
-            <a:ext cx="10180015" cy="731520"/>
+            <a:off x="2697480" y="1005840"/>
+            <a:ext cx="9174175" cy="731520"/>
           </a:xfrm>
           <a:prstGeom prst="rect">
             <a:avLst/>
@@ -21058,8 +22073,8 @@
         </p:nvSpPr>
         <p:spPr>
           <a:xfrm>
-            <a:off x="1691640" y="1783080"/>
-            <a:ext cx="10180015" cy="4663440"/>
+            <a:off x="2697480" y="1783080"/>
+            <a:ext cx="9174175" cy="4663440"/>
           </a:xfrm>
           <a:prstGeom prst="rect">
             <a:avLst/>
@@ -21150,7 +22165,7 @@
                 <a:ea typeface="Calibri" pitchFamily="34" charset="-122"/>
                 <a:cs typeface="Calibri" pitchFamily="34" charset="-120"/>
               </a:rPr>
-              <a:t>Without the projector (Activity 1): ask learners which crops their family sells.</a:t>
+              <a:t>Without the projector (Activity 1): name cash crops of the North.</a:t>
             </a:r>
             <a:endParaRPr lang="en-US" sz="2000" dirty="0"/>
           </a:p>
@@ -21171,7 +22186,7 @@
                 <a:ea typeface="Calibri" pitchFamily="34" charset="-122"/>
                 <a:cs typeface="Calibri" pitchFamily="34" charset="-120"/>
               </a:rPr>
-              <a:t>Without the projector (Activity 2): mention the rice fields of Lagdo and Yagoua (SEMRY).</a:t>
+              <a:t>Without the projector (Activity 2): describe rice fields near Lagdo.</a:t>
             </a:r>
             <a:endParaRPr lang="en-US" sz="2000" dirty="0"/>
           </a:p>
@@ -21192,7 +22207,7 @@
                 <a:ea typeface="Calibri" pitchFamily="34" charset="-122"/>
                 <a:cs typeface="Calibri" pitchFamily="34" charset="-120"/>
               </a:rPr>
-              <a:t>Without the projector (Activity 3): draw an arrow going south and an arrow going north on the board.</a:t>
+              <a:t>Without the projector (Activity 3): draw arrows on a map.</a:t>
             </a:r>
             <a:endParaRPr lang="en-US" sz="2000" dirty="0"/>
           </a:p>
@@ -21213,7 +22228,28 @@
                 <a:ea typeface="Calibri" pitchFamily="34" charset="-122"/>
                 <a:cs typeface="Calibri" pitchFamily="34" charset="-120"/>
               </a:rPr>
-              <a:t>Without the projector (Activity 4): compare with the Fulani of North Cameroon.</a:t>
+              <a:t>Without the projector (Activity 4): ask about cattle markets.</a:t>
+            </a:r>
+            <a:endParaRPr lang="en-US" sz="2000" dirty="0"/>
+          </a:p>
+          <a:p>
+            <a:pPr algn="l" marL="342900" indent="-342900">
+              <a:spcAft>
+                <a:spcPts val="800"/>
+              </a:spcAft>
+              <a:buSzPct val="100000"/>
+              <a:buChar char="•"/>
+            </a:pPr>
+            <a:r>
+              <a:rPr lang="en-US" sz="2000" dirty="0">
+                <a:solidFill>
+                  <a:srgbClr val="111111"/>
+                </a:solidFill>
+                <a:latin typeface="Calibri" pitchFamily="34" charset="0"/>
+                <a:ea typeface="Calibri" pitchFamily="34" charset="-122"/>
+                <a:cs typeface="Calibri" pitchFamily="34" charset="-120"/>
+              </a:rPr>
+              <a:t>Without the projector (Activity 5): list jobs of the area.</a:t>
             </a:r>
             <a:endParaRPr lang="en-US" sz="2000" dirty="0"/>
           </a:p>
@@ -21261,7 +22297,7 @@
             <a:pPr algn="ctr"/>
             <a:fld id="{F7021451-1387-4CA6-816F-3879F97B5CBC}" type="slidenum">
               <a:rPr b="1" lang="en-US"/>
-              <a:t>53</a:t>
+              <a:t>56</a:t>
             </a:fld>
             <a:endParaRPr lang="en-US"/>
           </a:p>
@@ -21275,9 +22311,9 @@
 </p:sld>
 </file>
 
-<file path=ppt/slides/slide54.xml><?xml version="1.0" encoding="utf-8"?>
+<file path=ppt/slides/slide57.xml><?xml version="1.0" encoding="utf-8"?>
 <p:sld xmlns:a="http://schemas.openxmlformats.org/drawingml/2006/main" xmlns:r="http://schemas.openxmlformats.org/officeDocument/2006/relationships" xmlns:p="http://schemas.openxmlformats.org/presentationml/2006/main">
-  <p:cSld name="Slide 54">
+  <p:cSld name="Slide 57">
     <p:spTree>
       <p:nvGrpSpPr>
         <p:cNvPr id="1" name=""/>
@@ -21325,7 +22361,7 @@
                 <a:ea typeface="Calibri" pitchFamily="34" charset="-122"/>
                 <a:cs typeface="Calibri" pitchFamily="34" charset="-120"/>
               </a:rPr>
-              <a:t>TEACHER'S NOTE</a:t>
+              <a:t>REFERENCES</a:t>
             </a:r>
             <a:endParaRPr lang="en-US" sz="1400" dirty="0"/>
           </a:p>
@@ -21348,7 +22384,7 @@
         <p:spPr>
           <a:xfrm>
             <a:off x="0" y="658368"/>
-            <a:ext cx="5120640" cy="5833872"/>
+            <a:ext cx="3840480" cy="5833872"/>
           </a:xfrm>
           <a:prstGeom prst="rect">
             <a:avLst/>
@@ -21363,8 +22399,8 @@
         </p:nvSpPr>
         <p:spPr>
           <a:xfrm>
-            <a:off x="5349240" y="1005840"/>
-            <a:ext cx="6522415" cy="731520"/>
+            <a:off x="4069080" y="1005840"/>
+            <a:ext cx="7802575" cy="731520"/>
           </a:xfrm>
           <a:prstGeom prst="rect">
             <a:avLst/>
@@ -21390,7 +22426,7 @@
                 <a:ea typeface="Times New Roman" pitchFamily="34" charset="-122"/>
                 <a:cs typeface="Times New Roman" pitchFamily="34" charset="-120"/>
               </a:rPr>
-              <a:t>Teacher's Note (continued)</a:t>
+              <a:t>References</a:t>
             </a:r>
             <a:endParaRPr lang="en-US" sz="3600" dirty="0"/>
           </a:p>
@@ -21404,8 +22440,8 @@
         </p:nvSpPr>
         <p:spPr>
           <a:xfrm>
-            <a:off x="5349240" y="1783080"/>
-            <a:ext cx="6522415" cy="4663440"/>
+            <a:off x="4069080" y="1783080"/>
+            <a:ext cx="7802575" cy="4663440"/>
           </a:xfrm>
           <a:prstGeom prst="rect">
             <a:avLst/>
@@ -21425,7 +22461,7 @@
               <a:buChar char="•"/>
             </a:pPr>
             <a:r>
-              <a:rPr lang="en-US" sz="2000" dirty="0">
+              <a:rPr lang="en-US" sz="1800" dirty="0">
                 <a:solidFill>
                   <a:srgbClr val="111111"/>
                 </a:solidFill>
@@ -21433,9 +22469,135 @@
                 <a:ea typeface="Calibri" pitchFamily="34" charset="-122"/>
                 <a:cs typeface="Calibri" pitchFamily="34" charset="-120"/>
               </a:rPr>
-              <a:t>Without the projector (Activity 5): ask learners what work their parents do.</a:t>
-            </a:r>
-            <a:endParaRPr lang="en-US" sz="2000" dirty="0"/>
+              <a:t>Harmonised Progression Sheet, Economic Geography (5051), Form 2.</a:t>
+            </a:r>
+            <a:endParaRPr lang="en-US" sz="1800" dirty="0"/>
+          </a:p>
+          <a:p>
+            <a:pPr algn="l" marL="342900" indent="-342900">
+              <a:spcAft>
+                <a:spcPts val="800"/>
+              </a:spcAft>
+              <a:buSzPct val="100000"/>
+              <a:buChar char="•"/>
+            </a:pPr>
+            <a:r>
+              <a:rPr lang="en-US" sz="1800" dirty="0">
+                <a:solidFill>
+                  <a:srgbClr val="111111"/>
+                </a:solidFill>
+                <a:latin typeface="Calibri" pitchFamily="34" charset="0"/>
+                <a:ea typeface="Calibri" pitchFamily="34" charset="-122"/>
+                <a:cs typeface="Calibri" pitchFamily="34" charset="-120"/>
+              </a:rPr>
+              <a:t>Class textbook: The major biomes of the world (tropical grassland).</a:t>
+            </a:r>
+            <a:endParaRPr lang="en-US" sz="1800" dirty="0"/>
+          </a:p>
+          <a:p>
+            <a:pPr algn="l" marL="342900" indent="-342900">
+              <a:spcAft>
+                <a:spcPts val="800"/>
+              </a:spcAft>
+              <a:buSzPct val="100000"/>
+              <a:buChar char="•"/>
+            </a:pPr>
+            <a:r>
+              <a:rPr lang="en-US" sz="1800" dirty="0">
+                <a:solidFill>
+                  <a:srgbClr val="111111"/>
+                </a:solidFill>
+                <a:latin typeface="Calibri" pitchFamily="34" charset="0"/>
+                <a:ea typeface="Calibri" pitchFamily="34" charset="-122"/>
+                <a:cs typeface="Calibri" pitchFamily="34" charset="-120"/>
+              </a:rPr>
+              <a:t>Photo, Activity 1: “Cotton harvest” by CIFOR, CC BY-NC-ND 2.0, via Flickr (https://www.flickr.com/photos/45423546@N07/35706862552)</a:t>
+            </a:r>
+            <a:endParaRPr lang="en-US" sz="1800" dirty="0"/>
+          </a:p>
+          <a:p>
+            <a:pPr algn="l" marL="342900" indent="-342900">
+              <a:spcAft>
+                <a:spcPts val="800"/>
+              </a:spcAft>
+              <a:buSzPct val="100000"/>
+              <a:buChar char="•"/>
+            </a:pPr>
+            <a:r>
+              <a:rPr lang="en-US" sz="1800" dirty="0">
+                <a:solidFill>
+                  <a:srgbClr val="111111"/>
+                </a:solidFill>
+                <a:latin typeface="Calibri" pitchFamily="34" charset="0"/>
+                <a:ea typeface="Calibri" pitchFamily="34" charset="-122"/>
+                <a:cs typeface="Calibri" pitchFamily="34" charset="-120"/>
+              </a:rPr>
+              <a:t>Photo, Activity 2: “Irrigated rice fields in Sefula, Zambia. Photo by Kate Longley, 2013.” by WorldFish, CC BY-NC-ND 2.0, via Flickr (https://www.flickr.com/photos/61545321@N06/8608804590)</a:t>
+            </a:r>
+            <a:endParaRPr lang="en-US" sz="1800" dirty="0"/>
+          </a:p>
+          <a:p>
+            <a:pPr algn="l" marL="342900" indent="-342900">
+              <a:spcAft>
+                <a:spcPts val="800"/>
+              </a:spcAft>
+              <a:buSzPct val="100000"/>
+              <a:buChar char="•"/>
+            </a:pPr>
+            <a:r>
+              <a:rPr lang="en-US" sz="1800" dirty="0">
+                <a:solidFill>
+                  <a:srgbClr val="111111"/>
+                </a:solidFill>
+                <a:latin typeface="Calibri" pitchFamily="34" charset="0"/>
+                <a:ea typeface="Calibri" pitchFamily="34" charset="-122"/>
+                <a:cs typeface="Calibri" pitchFamily="34" charset="-120"/>
+              </a:rPr>
+              <a:t>Photo, Activity 4: “Young Maasai herder, Kenya, 1979” by gbaku, CC BY-SA 2.0, via Flickr (https://www.flickr.com/photos/72105154@N00/482990998)</a:t>
+            </a:r>
+            <a:endParaRPr lang="en-US" sz="1800" dirty="0"/>
+          </a:p>
+          <a:p>
+            <a:pPr algn="l" marL="342900" indent="-342900">
+              <a:spcAft>
+                <a:spcPts val="800"/>
+              </a:spcAft>
+              <a:buSzPct val="100000"/>
+              <a:buChar char="•"/>
+            </a:pPr>
+            <a:r>
+              <a:rPr lang="en-US" sz="1800" dirty="0">
+                <a:solidFill>
+                  <a:srgbClr val="111111"/>
+                </a:solidFill>
+                <a:latin typeface="Calibri" pitchFamily="34" charset="0"/>
+                <a:ea typeface="Calibri" pitchFamily="34" charset="-122"/>
+                <a:cs typeface="Calibri" pitchFamily="34" charset="-120"/>
+              </a:rPr>
+              <a:t>Photo, Activity 5: “Fishermen, Lake Tana” by A.Davey, CC BY 2.0, via Flickr (https://www.flickr.com/photos/40595948@N00/2260748777)</a:t>
+            </a:r>
+            <a:endParaRPr lang="en-US" sz="1800" dirty="0"/>
+          </a:p>
+          <a:p>
+            <a:pPr algn="l" marL="342900" indent="-342900">
+              <a:spcAft>
+                <a:spcPts val="800"/>
+              </a:spcAft>
+              <a:buSzPct val="100000"/>
+              <a:buChar char="•"/>
+            </a:pPr>
+            <a:r>
+              <a:rPr lang="en-US" sz="1800" dirty="0">
+                <a:solidFill>
+                  <a:srgbClr val="111111"/>
+                </a:solidFill>
+                <a:latin typeface="Calibri" pitchFamily="34" charset="0"/>
+                <a:ea typeface="Calibri" pitchFamily="34" charset="-122"/>
+                <a:cs typeface="Calibri" pitchFamily="34" charset="-120"/>
+              </a:rPr>
+              <a:t>Diagrams and animations: drawn for this lesson (Geography Department).</a:t>
+            </a:r>
+            <a:endParaRPr lang="en-US" sz="1800" dirty="0"/>
           </a:p>
         </p:txBody>
       </p:sp>
@@ -21481,353 +22643,7 @@
             <a:pPr algn="ctr"/>
             <a:fld id="{F7021451-1387-4CA6-816F-3879F97B5CBC}" type="slidenum">
               <a:rPr b="1" lang="en-US"/>
-              <a:t>54</a:t>
-            </a:fld>
-            <a:endParaRPr lang="en-US"/>
-          </a:p>
-        </p:txBody>
-      </p:sp>
-    </p:spTree>
-  </p:cSld>
-  <p:clrMapOvr>
-    <a:masterClrMapping/>
-  </p:clrMapOvr>
-</p:sld>
-</file>
-
-<file path=ppt/slides/slide55.xml><?xml version="1.0" encoding="utf-8"?>
-<p:sld xmlns:a="http://schemas.openxmlformats.org/drawingml/2006/main" xmlns:r="http://schemas.openxmlformats.org/officeDocument/2006/relationships" xmlns:p="http://schemas.openxmlformats.org/presentationml/2006/main">
-  <p:cSld name="Slide 55">
-    <p:spTree>
-      <p:nvGrpSpPr>
-        <p:cNvPr id="1" name=""/>
-        <p:cNvGrpSpPr/>
-        <p:nvPr/>
-      </p:nvGrpSpPr>
-      <p:grpSpPr>
-        <a:xfrm>
-          <a:off x="0" y="0"/>
-          <a:ext cx="0" cy="0"/>
-          <a:chOff x="0" y="0"/>
-          <a:chExt cx="0" cy="0"/>
-        </a:xfrm>
-      </p:grpSpPr>
-      <p:sp>
-        <p:nvSpPr>
-          <p:cNvPr id="2" name="Text 0"/>
-          <p:cNvSpPr/>
-          <p:nvPr/>
-        </p:nvSpPr>
-        <p:spPr>
-          <a:xfrm>
-            <a:off x="457200" y="713232"/>
-            <a:ext cx="11368735" cy="274320"/>
-          </a:xfrm>
-          <a:prstGeom prst="rect">
-            <a:avLst/>
-          </a:prstGeom>
-          <a:noFill/>
-          <a:ln/>
-        </p:spPr>
-        <p:txBody>
-          <a:bodyPr wrap="square" lIns="0" tIns="0" rIns="0" bIns="0" rtlCol="0" anchor="ctr"/>
-          <a:lstStyle/>
-          <a:p>
-            <a:pPr algn="r" indent="0" marL="0">
-              <a:buNone/>
-            </a:pPr>
-            <a:r>
-              <a:rPr lang="en-US" sz="1400" b="1" dirty="0">
-                <a:solidFill>
-                  <a:srgbClr val="1C3F6E"/>
-                </a:solidFill>
-                <a:latin typeface="Calibri" pitchFamily="34" charset="0"/>
-                <a:ea typeface="Calibri" pitchFamily="34" charset="-122"/>
-                <a:cs typeface="Calibri" pitchFamily="34" charset="-120"/>
-              </a:rPr>
-              <a:t>REFERENCES</a:t>
-            </a:r>
-            <a:endParaRPr lang="en-US" sz="1400" dirty="0"/>
-          </a:p>
-        </p:txBody>
-      </p:sp>
-      <p:pic>
-        <p:nvPicPr>
-          <p:cNvPr id="3" name="Image 0" descr="/home/claude/f4/img/minesec_sheet.png">    </p:cNvPr>
-          <p:cNvPicPr>
-            <a:picLocks noChangeAspect="1"/>
-          </p:cNvPicPr>
-          <p:nvPr/>
-        </p:nvPicPr>
-        <p:blipFill>
-          <a:blip r:embed="rId1"/>
-          <a:stretch>
-            <a:fillRect/>
-          </a:stretch>
-        </p:blipFill>
-        <p:spPr>
-          <a:xfrm>
-            <a:off x="0" y="658368"/>
-            <a:ext cx="3840480" cy="5833872"/>
-          </a:xfrm>
-          <a:prstGeom prst="rect">
-            <a:avLst/>
-          </a:prstGeom>
-        </p:spPr>
-      </p:pic>
-      <p:sp>
-        <p:nvSpPr>
-          <p:cNvPr id="4" name="Text 1"/>
-          <p:cNvSpPr/>
-          <p:nvPr/>
-        </p:nvSpPr>
-        <p:spPr>
-          <a:xfrm>
-            <a:off x="4069080" y="1005840"/>
-            <a:ext cx="7802575" cy="731520"/>
-          </a:xfrm>
-          <a:prstGeom prst="rect">
-            <a:avLst/>
-          </a:prstGeom>
-          <a:noFill/>
-          <a:ln/>
-        </p:spPr>
-        <p:txBody>
-          <a:bodyPr wrap="square" lIns="0" tIns="0" rIns="0" bIns="0" rtlCol="0" anchor="ctr">
-            <a:normAutofit/>
-          </a:bodyPr>
-          <a:lstStyle/>
-          <a:p>
-            <a:pPr algn="ctr" indent="0" marL="0">
-              <a:buNone/>
-            </a:pPr>
-            <a:r>
-              <a:rPr lang="en-US" sz="3600" b="1" dirty="0">
-                <a:solidFill>
-                  <a:srgbClr val="990011"/>
-                </a:solidFill>
-                <a:latin typeface="Times New Roman" pitchFamily="34" charset="0"/>
-                <a:ea typeface="Times New Roman" pitchFamily="34" charset="-122"/>
-                <a:cs typeface="Times New Roman" pitchFamily="34" charset="-120"/>
-              </a:rPr>
-              <a:t>References</a:t>
-            </a:r>
-            <a:endParaRPr lang="en-US" sz="3600" dirty="0"/>
-          </a:p>
-        </p:txBody>
-      </p:sp>
-      <p:sp>
-        <p:nvSpPr>
-          <p:cNvPr id="5" name="Text 2"/>
-          <p:cNvSpPr/>
-          <p:nvPr/>
-        </p:nvSpPr>
-        <p:spPr>
-          <a:xfrm>
-            <a:off x="4069080" y="1783080"/>
-            <a:ext cx="7802575" cy="4663440"/>
-          </a:xfrm>
-          <a:prstGeom prst="rect">
-            <a:avLst/>
-          </a:prstGeom>
-          <a:noFill/>
-          <a:ln/>
-        </p:spPr>
-        <p:txBody>
-          <a:bodyPr wrap="square" lIns="0" tIns="0" rIns="0" bIns="0" rtlCol="0" anchor="t"/>
-          <a:lstStyle/>
-          <a:p>
-            <a:pPr algn="l" marL="342900" indent="-342900">
-              <a:spcAft>
-                <a:spcPts val="800"/>
-              </a:spcAft>
-              <a:buSzPct val="100000"/>
-              <a:buChar char="•"/>
-            </a:pPr>
-            <a:r>
-              <a:rPr lang="en-US" sz="1800" dirty="0">
-                <a:solidFill>
-                  <a:srgbClr val="111111"/>
-                </a:solidFill>
-                <a:latin typeface="Calibri" pitchFamily="34" charset="0"/>
-                <a:ea typeface="Calibri" pitchFamily="34" charset="-122"/>
-                <a:cs typeface="Calibri" pitchFamily="34" charset="-120"/>
-              </a:rPr>
-              <a:t>Harmonised Progression Sheet, Economic Geography (5051), Form 2.</a:t>
-            </a:r>
-            <a:endParaRPr lang="en-US" sz="1800" dirty="0"/>
-          </a:p>
-          <a:p>
-            <a:pPr algn="l" marL="342900" indent="-342900">
-              <a:spcAft>
-                <a:spcPts val="800"/>
-              </a:spcAft>
-              <a:buSzPct val="100000"/>
-              <a:buChar char="•"/>
-            </a:pPr>
-            <a:r>
-              <a:rPr lang="en-US" sz="1800" dirty="0">
-                <a:solidFill>
-                  <a:srgbClr val="111111"/>
-                </a:solidFill>
-                <a:latin typeface="Calibri" pitchFamily="34" charset="0"/>
-                <a:ea typeface="Calibri" pitchFamily="34" charset="-122"/>
-                <a:cs typeface="Calibri" pitchFamily="34" charset="-120"/>
-              </a:rPr>
-              <a:t>Class textbook: The major biomes of the world (tropical grassland).</a:t>
-            </a:r>
-            <a:endParaRPr lang="en-US" sz="1800" dirty="0"/>
-          </a:p>
-          <a:p>
-            <a:pPr algn="l" marL="342900" indent="-342900">
-              <a:spcAft>
-                <a:spcPts val="800"/>
-              </a:spcAft>
-              <a:buSzPct val="100000"/>
-              <a:buChar char="•"/>
-            </a:pPr>
-            <a:r>
-              <a:rPr lang="en-US" sz="1800" dirty="0">
-                <a:solidFill>
-                  <a:srgbClr val="111111"/>
-                </a:solidFill>
-                <a:latin typeface="Calibri" pitchFamily="34" charset="0"/>
-                <a:ea typeface="Calibri" pitchFamily="34" charset="-122"/>
-                <a:cs typeface="Calibri" pitchFamily="34" charset="-120"/>
-              </a:rPr>
-              <a:t>Photo, Activity 1: “Cotton harvest” by CIFOR, CC BY-NC-ND 2.0, via Flickr (https://www.flickr.com/photos/45423546@N07/35706862552)</a:t>
-            </a:r>
-            <a:endParaRPr lang="en-US" sz="1800" dirty="0"/>
-          </a:p>
-          <a:p>
-            <a:pPr algn="l" marL="342900" indent="-342900">
-              <a:spcAft>
-                <a:spcPts val="800"/>
-              </a:spcAft>
-              <a:buSzPct val="100000"/>
-              <a:buChar char="•"/>
-            </a:pPr>
-            <a:r>
-              <a:rPr lang="en-US" sz="1800" dirty="0">
-                <a:solidFill>
-                  <a:srgbClr val="111111"/>
-                </a:solidFill>
-                <a:latin typeface="Calibri" pitchFamily="34" charset="0"/>
-                <a:ea typeface="Calibri" pitchFamily="34" charset="-122"/>
-                <a:cs typeface="Calibri" pitchFamily="34" charset="-120"/>
-              </a:rPr>
-              <a:t>Photo, Activity 2: “Irrigated rice fields in Sefula, Zambia. Photo by Kate Longley, 2013.” by WorldFish, CC BY-NC-ND 2.0, via Flickr (https://www.flickr.com/photos/61545321@N06/8608804590)</a:t>
-            </a:r>
-            <a:endParaRPr lang="en-US" sz="1800" dirty="0"/>
-          </a:p>
-          <a:p>
-            <a:pPr algn="l" marL="342900" indent="-342900">
-              <a:spcAft>
-                <a:spcPts val="800"/>
-              </a:spcAft>
-              <a:buSzPct val="100000"/>
-              <a:buChar char="•"/>
-            </a:pPr>
-            <a:r>
-              <a:rPr lang="en-US" sz="1800" dirty="0">
-                <a:solidFill>
-                  <a:srgbClr val="111111"/>
-                </a:solidFill>
-                <a:latin typeface="Calibri" pitchFamily="34" charset="0"/>
-                <a:ea typeface="Calibri" pitchFamily="34" charset="-122"/>
-                <a:cs typeface="Calibri" pitchFamily="34" charset="-120"/>
-              </a:rPr>
-              <a:t>Photo, Activity 4: “Young Maasai herder, Kenya, 1979” by gbaku, CC BY-SA 2.0, via Flickr (https://www.flickr.com/photos/72105154@N00/482990998)</a:t>
-            </a:r>
-            <a:endParaRPr lang="en-US" sz="1800" dirty="0"/>
-          </a:p>
-          <a:p>
-            <a:pPr algn="l" marL="342900" indent="-342900">
-              <a:spcAft>
-                <a:spcPts val="800"/>
-              </a:spcAft>
-              <a:buSzPct val="100000"/>
-              <a:buChar char="•"/>
-            </a:pPr>
-            <a:r>
-              <a:rPr lang="en-US" sz="1800" dirty="0">
-                <a:solidFill>
-                  <a:srgbClr val="111111"/>
-                </a:solidFill>
-                <a:latin typeface="Calibri" pitchFamily="34" charset="0"/>
-                <a:ea typeface="Calibri" pitchFamily="34" charset="-122"/>
-                <a:cs typeface="Calibri" pitchFamily="34" charset="-120"/>
-              </a:rPr>
-              <a:t>Photo, Activity 5: “Fishermen, Lake Tana” by A.Davey, CC BY 2.0, via Flickr (https://www.flickr.com/photos/40595948@N00/2260748777)</a:t>
-            </a:r>
-            <a:endParaRPr lang="en-US" sz="1800" dirty="0"/>
-          </a:p>
-          <a:p>
-            <a:pPr algn="l" marL="342900" indent="-342900">
-              <a:spcAft>
-                <a:spcPts val="800"/>
-              </a:spcAft>
-              <a:buSzPct val="100000"/>
-              <a:buChar char="•"/>
-            </a:pPr>
-            <a:r>
-              <a:rPr lang="en-US" sz="1800" dirty="0">
-                <a:solidFill>
-                  <a:srgbClr val="111111"/>
-                </a:solidFill>
-                <a:latin typeface="Calibri" pitchFamily="34" charset="0"/>
-                <a:ea typeface="Calibri" pitchFamily="34" charset="-122"/>
-                <a:cs typeface="Calibri" pitchFamily="34" charset="-120"/>
-              </a:rPr>
-              <a:t>Diagrams and animations: drawn for this lesson (Geography Department).</a:t>
-            </a:r>
-            <a:endParaRPr lang="en-US" sz="1800" dirty="0"/>
-          </a:p>
-        </p:txBody>
-      </p:sp>
-      <p:sp>
-        <p:nvSpPr>
-          <p:cNvPr id="25" name="Slide Number Placeholder 0"/>
-          <p:cNvSpPr>
-            <a:spLocks noGrp="1"/>
-          </p:cNvSpPr>
-          <p:nvPr>
-            <p:ph type="sldNum" sz="quarter" idx="4294967295"/>
-          </p:nvPr>
-        </p:nvSpPr>
-        <p:spPr>
-          <a:xfrm>
-            <a:off x="27432" y="91440"/>
-            <a:ext cx="585216" cy="475488"/>
-          </a:xfrm>
-          <a:prstGeom prst="rect">
-            <a:avLst/>
-          </a:prstGeom>
-          <a:extLst>
-            <a:ext uri="{C572A759-6A51-4108-AA02-DFA0A04FC94B}">
-              <ma14:wrappingTextBoxFlag xmlns:ma14="http://schemas.microsoft.com/office/mac/drawingml/2011/main" val="0"/>
-            </a:ext>
-          </a:extLst>
-        </p:spPr>
-        <p:txBody>
-          <a:bodyPr/>
-          <a:lstStyle>
-            <a:lvl1pPr>
-              <a:defRPr sz="2000">
-                <a:solidFill>
-                  <a:srgbClr val="FFFFFF"/>
-                </a:solidFill>
-                <a:latin typeface="Calibri"/>
-                <a:ea typeface="Calibri"/>
-                <a:cs typeface="Calibri"/>
-              </a:defRPr>
-            </a:lvl1pPr>
-          </a:lstStyle>
-          <a:p>
-            <a:pPr algn="ctr"/>
-            <a:fld id="{F7021451-1387-4CA6-816F-3879F97B5CBC}" type="slidenum">
-              <a:rPr b="1" lang="en-US"/>
-              <a:t>55</a:t>
+              <a:t>57</a:t>
             </a:fld>
             <a:endParaRPr lang="en-US"/>
           </a:p>

--- a/lecons/F2T/09_S03_L2_P4_Tropical_Grassland_Human_Activities.pptx
+++ b/lecons/F2T/09_S03_L2_P4_Tropical_Grassland_Human_Activities.pptx
@@ -3462,7 +3462,7 @@
           <a:p>
             <a:r>
               <a:rPr lang="en-US" dirty="0"/>
-              <a:t>Before we start the new lesson, let us correct the homework I gave you at the end of Lesson 2 (Part 3): The Tropical Grassland Region: Types of Resources and Methods of Exploitation. The question was: Ask a farmer or a herder in your area about his work: what he produces, which tools he uses and where he sells his products. Take out your exercise books.</a:t>
+              <a:t>Before we start the new lesson, let us correct the homework I gave you at the end of Lesson 2 (Part 3): The Tropical Grassland Region: Types of Resources and Methods of Exploitation. The question was: Define transhumance. Take out your exercise books.</a:t>
             </a:r>
             <a:endParaRPr lang="en-US" dirty="0"/>
           </a:p>
@@ -4430,7 +4430,7 @@
           <a:p>
             <a:r>
               <a:rPr lang="en-US" dirty="0"/>
-              <a:t>Here is a good answer. Answers vary. Example: a farmer produces cotton and maize with a hoe and oxen, and sells cotton to SODECOTON; a herder rears cattle, uses a stick and moves with them, and sells them at the cattle market. Compare it with your own answer and correct your work in red.</a:t>
+              <a:t>Here is a good answer. It is the seasonal movement of herders and their animals. Compare it with your own answer and correct your work in red.</a:t>
             </a:r>
             <a:endParaRPr lang="en-US" dirty="0"/>
           </a:p>
@@ -4606,7 +4606,7 @@
           <a:p>
             <a:r>
               <a:rPr lang="en-US" dirty="0"/>
-              <a:t>For your homework: Write down two problems that farmers or herders around Garoua face, for example with rain, fires or pests. We shall correct it at the beginning of our next lesson.</a:t>
+              <a:t>For your homework: Give two problems of the savanna. We shall correct it at the beginning of our next lesson.</a:t>
             </a:r>
             <a:endParaRPr lang="en-US" dirty="0"/>
           </a:p>
@@ -15328,7 +15328,7 @@
         <p:spPr>
           <a:xfrm>
             <a:off x="0" y="658368"/>
-            <a:ext cx="2468880" cy="5833872"/>
+            <a:ext cx="5120640" cy="5833872"/>
           </a:xfrm>
           <a:prstGeom prst="rect">
             <a:avLst/>
@@ -15343,8 +15343,8 @@
         </p:nvSpPr>
         <p:spPr>
           <a:xfrm>
-            <a:off x="2697480" y="1005840"/>
-            <a:ext cx="9174175" cy="731520"/>
+            <a:off x="5349240" y="1005840"/>
+            <a:ext cx="6522415" cy="731520"/>
           </a:xfrm>
           <a:prstGeom prst="rect">
             <a:avLst/>
@@ -15384,8 +15384,8 @@
         </p:nvSpPr>
         <p:spPr>
           <a:xfrm>
-            <a:off x="2697480" y="1783080"/>
-            <a:ext cx="9174175" cy="4663440"/>
+            <a:off x="5349240" y="1783080"/>
+            <a:ext cx="6522415" cy="4663440"/>
           </a:xfrm>
           <a:prstGeom prst="rect">
             <a:avLst/>
@@ -15432,7 +15432,7 @@
                 <a:ea typeface="Times New Roman" pitchFamily="34" charset="-122"/>
                 <a:cs typeface="Times New Roman" pitchFamily="34" charset="-120"/>
               </a:rPr>
-              <a:t>Ask a farmer or a herder in your area about his work: what he produces, which tools he uses and where he sells his products.</a:t>
+              <a:t>Define transhumance.</a:t>
             </a:r>
             <a:endParaRPr lang="en-US" sz="4000" dirty="0"/>
           </a:p>
@@ -18028,7 +18028,7 @@
         <p:spPr>
           <a:xfrm>
             <a:off x="0" y="658368"/>
-            <a:ext cx="3840480" cy="5833872"/>
+            <a:ext cx="5120640" cy="5833872"/>
           </a:xfrm>
           <a:prstGeom prst="rect">
             <a:avLst/>
@@ -18043,8 +18043,8 @@
         </p:nvSpPr>
         <p:spPr>
           <a:xfrm>
-            <a:off x="4069080" y="1005840"/>
-            <a:ext cx="7802575" cy="731520"/>
+            <a:off x="5349240" y="1005840"/>
+            <a:ext cx="6522415" cy="731520"/>
           </a:xfrm>
           <a:prstGeom prst="rect">
             <a:avLst/>
@@ -18084,8 +18084,8 @@
         </p:nvSpPr>
         <p:spPr>
           <a:xfrm>
-            <a:off x="4069080" y="1783080"/>
-            <a:ext cx="7802575" cy="4663440"/>
+            <a:off x="5349240" y="1783080"/>
+            <a:ext cx="6522415" cy="4663440"/>
           </a:xfrm>
           <a:prstGeom prst="rect">
             <a:avLst/>
@@ -18112,7 +18112,7 @@
                 <a:ea typeface="Times New Roman" pitchFamily="34" charset="-122"/>
                 <a:cs typeface="Times New Roman" pitchFamily="34" charset="-120"/>
               </a:rPr>
-              <a:t>Answers vary. Example: a farmer produces cotton and maize with a hoe and oxen, and sells cotton to SODECOTON; a herder rears cattle, uses a stick and moves with them, and sells them at the cattle market.</a:t>
+              <a:t>It is the seasonal movement of herders and their animals.</a:t>
             </a:r>
             <a:endParaRPr lang="en-US" sz="4000" dirty="0"/>
           </a:p>
@@ -18616,7 +18616,7 @@
                 <a:ea typeface="Times New Roman" pitchFamily="34" charset="-122"/>
                 <a:cs typeface="Times New Roman" pitchFamily="34" charset="-120"/>
               </a:rPr>
-              <a:t>Write down two problems that farmers or herders around Garoua face, for example with rain, fires or pests.</a:t>
+              <a:t>Give two problems of the savanna.</a:t>
             </a:r>
             <a:endParaRPr lang="en-US" sz="4000" dirty="0"/>
           </a:p>
@@ -21556,7 +21556,7 @@
                           <a:ea typeface="Calibri" pitchFamily="34" charset="-122"/>
                           <a:cs typeface="Calibri" pitchFamily="34" charset="-120"/>
                         </a:rPr>
-                        <a:t>Write down two problems that farmers or herders around Garoua face, for example with rain, fires or pests.</a:t>
+                        <a:t>Give two problems of the savanna.</a:t>
                       </a:r>
                       <a:endParaRPr lang="en-US" sz="1600" dirty="0">
                         <a:latin typeface="Calibri" charset="0"/>

--- a/lecons/F2T/09_S03_L2_P4_Tropical_Grassland_Human_Activities.pptx
+++ b/lecons/F2T/09_S03_L2_P4_Tropical_Grassland_Human_Activities.pptx
@@ -7209,7 +7209,7 @@
                 <a:ea typeface="Times New Roman" pitchFamily="34" charset="-122"/>
                 <a:cs typeface="Times New Roman" pitchFamily="34" charset="-120"/>
               </a:rPr>
-              <a:t>"</a:t>
+              <a:t>Paul asks: "Why does Adamou move with his cattle, and what other work do people do in the savanna?"</a:t>
             </a:r>
             <a:endParaRPr lang="en-US" sz="4000" dirty="0"/>
           </a:p>
